--- a/slides/DevOps-PlatformEngineering-Day1.pptx
+++ b/slides/DevOps-PlatformEngineering-Day1.pptx
@@ -35,6 +35,19 @@
     <p:sldId id="283" r:id="rId35"/>
     <p:sldId id="284" r:id="rId36"/>
     <p:sldId id="285" r:id="rId37"/>
+    <p:sldId id="286" r:id="rId38"/>
+    <p:sldId id="287" r:id="rId39"/>
+    <p:sldId id="288" r:id="rId40"/>
+    <p:sldId id="289" r:id="rId41"/>
+    <p:sldId id="290" r:id="rId42"/>
+    <p:sldId id="291" r:id="rId43"/>
+    <p:sldId id="292" r:id="rId44"/>
+    <p:sldId id="293" r:id="rId45"/>
+    <p:sldId id="294" r:id="rId46"/>
+    <p:sldId id="295" r:id="rId47"/>
+    <p:sldId id="296" r:id="rId48"/>
+    <p:sldId id="297" r:id="rId49"/>
+    <p:sldId id="298" r:id="rId50"/>
   </p:sldIdLst>
   <p:sldSz cx="9144000" cy="6858000" type="screen4x3"/>
   <p:notesSz cx="6858000" cy="9144000"/>
@@ -531,7 +544,7 @@
           <a:lstStyle/>
           <a:p>
             <a:r>
-              <a:t>Welcome participants. Explain that slides include detailed notes that also serve as the participant reference. Encourage questions and note-taking.</a:t>
+              <a:t>Welcome participants. These decks are shared with participants after the course; the speaker notes double as the written reference, so read them when reviewing. Modules 1-9 are theory with small demos; the three workshops and the capstone are the hands-on core.</a:t>
             </a:r>
           </a:p>
         </p:txBody>
@@ -601,7 +614,7 @@
           <a:lstStyle/>
           <a:p>
             <a:r>
-              <a:t>Reference the DORA research and the book Accelerate. Cite evidence that culture is measurable and correlates with business outcomes.</a:t>
+              <a:t>Orient participants before any hands-on: native Python (the 5-minute demos), Docker Compose stacks, Terraform-managed containers and a kind Kubernetes cluster all live on one VM, and every URL in the course is http://localhost:&lt;port&gt;. No cloud account, no shared infrastructure, and full cleanup is one command per stack. Make the pedagogical point explicitly: the WORKFLOW is what transfers to production and cloud - swapping localhost Docker for AWS changes one Terraform provider block, not the discipline. DEMO NOW (5 min, from instructor/theory-demos.md): run lab-setup/check-environment.sh together and have everyone confirm an all-PASS table - this is the course's first automated feedback loop.</a:t>
             </a:r>
           </a:p>
         </p:txBody>
@@ -671,7 +684,7 @@
           <a:lstStyle/>
           <a:p>
             <a:r>
-              <a:t>Encourage participants to map their current communication friction points. The lab will practise a pull request and retro workflow.</a:t>
+              <a:t>Pause here and collect from the room: one pain point in their organisation this module gave a name to (wall of confusion, cognitive load, third-silo DevOps team, toil). Write them somewhere visible - Module 9's platform canvas exercise reuses this list as user pain points.</a:t>
             </a:r>
           </a:p>
         </p:txBody>
@@ -741,7 +754,7 @@
           <a:lstStyle/>
           <a:p>
             <a:r>
-              <a:t>Ask the room which symptom is most familiar. Transition to the next module: tools alone cannot fix silos, but the wrong tools can reinforce them.</a:t>
+              <a:t>60 minutes theory + a 10-minute self-assessment exercise. The research message: culture is not the soft part - it is the strongest statistical predictor of delivery performance. Give it the same rigour as the technical modules.</a:t>
             </a:r>
           </a:p>
         </p:txBody>
@@ -811,7 +824,7 @@
           <a:lstStyle/>
           <a:p>
             <a:r>
-              <a:t>Briefly introduce stream-aligned, platform, complicated-subsystem and enabling teams. Emphasise that platform teams exist to reduce cognitive load, not to own everything.</a:t>
+              <a:t>Ron Westrum, a sociologist studying safety-critical industries (aviation, healthcare), classified organisational cultures by how information flows - especially unwelcome information. The typology matters to us because the DORA/Accelerate research program found generative culture to be one of the strongest predictors of both delivery performance and organisational performance. The operational test is beautifully simple: what happens when someone brings bad news? Pathological: the messenger is punished, so problems are hidden until they explode. Bureaucratic: the messenger is tolerated, the problem is filed into a process, ownership diffuses. Generative: the messenger is thanked, because the organisation values the information above comfort. Every technical practice this week depends on information flowing: monitoring is worthless if an engineer fears reporting what it shows; postmortems are theatre if attendees protect themselves. EXERCISE (10 min, in theory-demos.md): each participant privately scores their organisation on five Westrum questions, then pairs discuss one concrete behaviour that would move one answer one level.</a:t>
             </a:r>
           </a:p>
         </p:txBody>
@@ -881,7 +894,7 @@
           <a:lstStyle/>
           <a:p>
             <a:r>
-              <a:t>This is a survey module. The goal is not to master every tool but to understand the categories and how they compose into a toolchain.</a:t>
+              <a:t>Edmondson's original hospital study found the counterintuitive result that better nursing teams REPORTED more medication errors - not because they made more, but because they were safe enough to report them. That inversion is the whole story: in unsafe teams the error rate looks low because information is suppressed. Google's Project Aristotle (2012-2015, 180+ teams studied) expected to find that great teams were about who was on them; instead the strongest factor was psychological safety - how the team behaved together. For our purposes: every feedback mechanism this course teaches (tests failing, scanners flagging, monitors alerting, reviews commenting) produces bad news by design. An organisation that punishes bad news will neutralise every one of these tools - people will disable flaky tests instead of fixing them, mute alerts instead of investigating, approve reviews without reading. Culture is not adjacent to the tooling; it is the operating system the tooling runs on.</a:t>
             </a:r>
           </a:p>
         </p:txBody>
@@ -951,7 +964,7 @@
           <a:lstStyle/>
           <a:p>
             <a:r>
-              <a:t>Encourage participants to map their current toolchain to these categories and identify gaps.</a:t>
+              <a:t>Mel Conway's 1968 observation is one of the most empirically durable laws in software. Mechanism: designing an interface between two components requires communication between their authors; where communication is expensive (different teams, buildings, time zones, reporting lines) interfaces become rigid, minimal and slow to change. Practical consequences participants will recognise: a 'database team' produces systems where every change queues behind DBA tickets; separate QA departments produce testing as an after-the-fact phase; frontend/backend team splits produce chatty, versioned internal APIs with negotiation overhead. The reverse Conway maneuver (popularised by Team Topologies) flips the law from constraint to tool: decide the architecture you want - say, independently deployable services around business domains - then restructure teams to match, and the architecture will follow. This is also why Module 6's microservices content keeps returning to team boundaries: bounded contexts are as much organisational as technical.</a:t>
             </a:r>
           </a:p>
         </p:txBody>
@@ -1021,7 +1034,7 @@
           <a:lstStyle/>
           <a:p>
             <a:r>
-              <a:t>Make the distinction: automation does a task; orchestration coordinates tasks. Both reduce toil and free humans for higher-value work.</a:t>
+              <a:t>Concrete mechanics, not platitudes. ADRs: a one-page numbered record per significant decision - context, options considered, decision, consequences - stored in the repo next to the code it affects. Their value compounds: two years later, 'why is this a queue and not an API call?' has an answer, and newcomers onboard by reading the decision history. ChatOps means operational events flow through shared, searchable channels: the deploy bot announces releases, alerts land where humans discuss them, and an incident's timeline reconstructs itself from the channel history - which Module 8's postmortems depend on. Working agreements make implicit expectations explicit and negotiable: 'reviews answered within 4 working hours', 'no deploys after 16:00 Friday', 'WIP limit of 2 per person'. And treat documentation with product seriousness - measured, owned, maintained - because in a platform organisation, documentation IS the user interface (Module 9 returns to this). During labs, notice how every artifact in this course - policies, pipelines, infrastructure - is written down in Git: that is communication strategy, not just tooling.</a:t>
             </a:r>
           </a:p>
         </p:txBody>
@@ -1091,7 +1104,7 @@
           <a:lstStyle/>
           <a:p>
             <a:r>
-              <a:t>Metrics are powerful levers. If the team believes metrics will be weaponised, they will game them. Frame metrics as improvement signals.</a:t>
+              <a:t>Silos persist because they serve real needs - specialisation, clear accountability, career paths - so 'just collaborate more' fails. What works is restructuring incentives and interfaces. Shared goals: if Dev is bonused on features and Ops on uptime, no workshop fixes that; measuring both on lead time AND change-failure rate aligns them structurally. Shared pain: a developer who is paged at 03:00 by their own unhandled exception writes different error handling forever after - this is the feedback loop 'you build it, you run it' creates. Embedded rotation is Team Topologies' enabling pattern: temporary, explicitly time-boxed, with the goal of making the receiving team self-sufficient (not creating dependency). Internal open source (sometimes 'InnerSource') keeps the platform from becoming a bottleneck: when a product team needs a pipeline feature, they can contribute it via PR instead of filing a ticket and waiting. And name the anti-pattern out loud: a 'DevOps team' that owns all pipelines and environments is a third silo - it centralises exactly what DevOps set out to distribute.</a:t>
             </a:r>
           </a:p>
         </p:txBody>
@@ -1161,7 +1174,7 @@
           <a:lstStyle/>
           <a:p>
             <a:r>
-              <a:t>IaC is often the first concrete win participants can take back. Emphasise version control, idempotency and state management.</a:t>
+              <a:t>Team Topologies (Matthew Skelton and Manuel Pais, 2019) is the current standard vocabulary for DevOps-era org design; participants will meet these terms in the wild. Stream-aligned teams own a product or user journey end-to-end and are the point of the whole system - every other type exists to help them flow. Platform teams reduce their cognitive load by providing an internal platform as a product. Enabling teams coach through capability gaps and are deliberately temporary - success is stepping away. Complicated-subsystem teams own components genuinely requiring rare expertise (an ML model, a codec). Equally important are the three interaction modes: collaboration (working together closely - powerful but expensive, keep it temporary), X-as-a-Service (consume through an interface with minimal contact - the target state for platform consumption), and facilitating (coaching). A healthy platform relationship EVOLVES: collaboration while discovering what teams need, then X-as-a-Service once the golden path exists. A platform stuck in permanent collaboration mode has failed to productise; one that started at X-as-a-Service without ever collaborating built the wrong thing.</a:t>
             </a:r>
           </a:p>
         </p:txBody>
@@ -1231,7 +1244,7 @@
           <a:lstStyle/>
           <a:p>
             <a:r>
-              <a:t>Contrast declarative (Terraform, CloudFormation) with imperative (scripts that run commands). Declarative models are easier to reason about and drift-detect.</a:t>
+              <a:t>The blameless practice comes from aviation and was brought into software mainly via Etsy (John Allspaw) and Google SRE. The reasoning is hard-nosed, not soft: if the consequence of touching an incident is punishment, engineers will hide information, and you lose the only accurate account of how your system actually fails. 'Human error' is where the investigation STARTS, not where it ends - the question is what context, tooling, documentation or alerting made the error possible or invisible. Ban counterfactuals in the room: 'they should have checked the config' describes an imaginary incident, not this one; ask instead what made not-checking seem fine (it always had been? the config was 4000 lines? the diff tool hid it?). Insist that action items are systemic (add a preflight validation, fix the runbook, page earlier) with owners and due dates in the normal backlog - a postmortem whose action items die in a document was a ritual, not learning. Participants practise a 5-line version of this after the Module 8 demo, and the format is deliberately identical to a real one.</a:t>
             </a:r>
           </a:p>
         </p:txBody>
@@ -1301,7 +1314,7 @@
           <a:lstStyle/>
           <a:p>
             <a:r>
-              <a:t>Set the stage: participants will spend two days moving from principles to practice. Emphasise that DevOps is not a job title but a way of working, and platform engineering is the discipline that makes that way of working scalable.</a:t>
+              <a:t>75 minutes of theory with one 5-minute demo. Goal: participants can define DevOps precisely (not 'a team' or 'a tool'), explain why platform engineering emerged, and describe how the two relate. The depth lives in these notes - they are the participant reference.</a:t>
             </a:r>
           </a:p>
         </p:txBody>
@@ -1371,7 +1384,7 @@
           <a:lstStyle/>
           <a:p>
             <a:r>
-              <a:t>Walk through the loop. The state file is critical: it maps real-world IDs back to the code so the tool can compute diffs safely.</a:t>
+              <a:t>Bridge to Module 3: with the people-system understood, we can now look at the tool landscape - and evaluate tools by whether they strengthen flow, feedback and learning rather than by feature lists.</a:t>
             </a:r>
           </a:p>
         </p:txBody>
@@ -1441,7 +1454,7 @@
           <a:lstStyle/>
           <a:p>
             <a:r>
-              <a:t>In cloud-native environments, configuration management is shrinking because containers and Kubernetes handle much of it. Still useful for bare metal and VMs.</a:t>
+              <a:t>45 minutes theory + a 15-minute toolchain-mapping exercise. Goal: participants leave with a MAP of the tool landscape and principles for choosing, not a catalogue of logos. Defuse tool-worship: tools amplify a working system, they do not create one.</a:t>
             </a:r>
           </a:p>
         </p:txBody>
@@ -1511,7 +1524,7 @@
           <a:lstStyle/>
           <a:p>
             <a:r>
-              <a:t>Both are IaC, answering different questions: Terraform answers 'what infrastructure exists?', Ansible answers 'how is each machine configured?'. Real estates use both: Terraform creates the VM, Ansible (or a container image) configures it. The bonus playbook demonstrates idempotence - the property that makes IaC safe to re-run - on the participant's own VM with no SSH or inventory needed.</a:t>
+              <a:t>Teach the CATEGORIES; brands churn, categories are stable. A complete delivery capability needs an answer in each category - the answer may be 'deliberately nothing yet', but it should be deliberate. Walk the flow of one change through the categories: code lands in source control; CI builds and tests it; the artifact registry stores an immutable, versioned output; IaC shapes the environment it will run in; the runtime executes it; secrets management injects credentials without embedding them; observability watches it; incident management wakes someone when watching finds trouble. Two field notes worth sharing: the CNCF landscape lists well over a thousand projects, which is precisely the cognitive-load problem platform engineering answers - nobody should evaluate a thousand tools to ship a web service; and licence changes are a real category risk (Terraform's 2023 licence change produced the OpenTofu fork under the Linux Foundation) - one more argument for keeping your usage of any tool behind an interface you control.</a:t>
             </a:r>
           </a:p>
         </p:txBody>
@@ -1581,7 +1594,7 @@
           <a:lstStyle/>
           <a:p>
             <a:r>
-              <a:t>These practices turn IaC from a convenience into a safety mechanism. The lab will exercise plan/apply and state with the Docker provider so no cloud account is needed.</a:t>
+              <a:t>Give participants an evaluation checklist rather than recommendations. Declarative matters because a desired-state description can be diffed, code-reviewed, policy-scanned and drift-detected - an imperative script can only be re-run and hoped about; this single property is why Terraform, Kubernetes manifests and Compose files dominate their categories. 'Everything in Git' is the enabler for every other practice this course teaches: if the pipeline definition, infrastructure and policies live beside the code, then review, audit and rollback come for free. API-first: any tool that requires a human in a GUI to complete a release will eventually BE the release process. Paved road over mandate previews Module 9 - mandated tools breed shadow IT; attractive defaults breed adoption. And insist on counting exit cost up front: data export, config portability, retraining - the cheapest tool to adopt is often the most expensive to leave. Close with the culture point from Module 2: a generative organisation with mediocre tools outperforms a pathological one with the best tools money can buy, because tools amplify whatever system they land in.</a:t>
             </a:r>
           </a:p>
         </p:txBody>
@@ -1651,7 +1664,7 @@
           <a:lstStyle/>
           <a:p>
             <a:r>
-              <a:t>CI/CD is the engine of fast flow. Tie it back to the DevOps loop and the platform: pipelines should be products, not snowflakes.</a:t>
+              <a:t>Distinguish the two automation layers people conflate. Delivery automation (CI/CD engines) runs jobs in response to code events; the meaningful differences are hosting and maintenance burden - GitHub Actions outsources runner management, Jenkins gives total control at the price of becoming a pet server (ask who in the room maintains a Jenkins - there is always one), Tekton and Argo Workflows run pipelines as Kubernetes-native resources. Runtime orchestration is what keeps services running afterwards: Kubernetes' actual innovation is exposing scheduling, self-healing and rollouts as declarative APIs - which is what makes it automatable at all (Module 6 goes deep). GitOps joins the layers elegantly: instead of the pipeline pushing kubectl commands, a manifest repo describes the desired runtime state and an in-cluster agent (Argo CD, Flux) continuously pulls and converges - manual changes are automatically reverted, the audit log is git log, and cluster credentials never leave the cluster. Our labs use the push model for simplicity, but name GitOps as the production-grade evolution; the mental model - desired state in Git, an agent converging - is Terraform's loop applied to runtime.</a:t>
             </a:r>
           </a:p>
         </p:txBody>
@@ -1721,7 +1734,7 @@
           <a:lstStyle/>
           <a:p>
             <a:r>
-              <a:t>Differentiate CI, CD and continuous deployment. Most organisations aim for continuous delivery first; full auto-deployment requires strong automated testing and feature flags.</a:t>
+              <a:t>This is the measurement backbone for the whole course - introduce it here, and Modules 8 and 9 will reuse it. The DORA research program (DevOps Research and Assessment; the book 'Accelerate') surveyed tens of thousands of practitioners over a decade and produced the four metrics: deployment frequency and lead time for changes (throughput), change failure rate and failed-deployment recovery time (stability). The landmark finding: speed and stability are NOT a trade-off - elite performers are better at BOTH, because the same mechanisms (small batches, automation, fast feedback) produce speed and safety simultaneously. That single result dissolves the classic Dev-vs-Ops argument ('slow down to be safe') with data. Two warnings that must accompany any metrics talk: measure the SYSTEM, not individuals - the instant DORA metrics appear in performance reviews they will be gamed into meaninglessness; and read all four together - deploy frequency alone is trivially gamed (deploy trivia hourly) and shows up immediately in change-failure rate. EXERCISE (15 min, theory-demos.md): pairs map their own organisation's toolchain onto the categories from this module and estimate their four DORA numbers; collect a show of hands on lead time - the spread across the room is usually the best discussion starter of Day 1.</a:t>
             </a:r>
           </a:p>
         </p:txBody>
@@ -1791,7 +1804,7 @@
           <a:lstStyle/>
           <a:p>
             <a:r>
-              <a:t>Trace the arrows. Security scans sit in the middle because they must be fast enough not to break flow. Feedback loops allow rollbacks and fix-forward.</a:t>
+              <a:t>Justify the choices so participants can translate to their own stacks. Each tool was chosen as a representative of its CATEGORY that runs locally at zero cost: what you learn about GitHub Actions' job graph transfers to GitLab CI's stages; kind serves the genuine Kubernetes API, so every kubectl command transfers unchanged to EKS/AKS/GKE; Trivy's severity/fixability triage transfers to any scanner; Rego policies transfer to admission controllers. If the room uses Azure DevOps or Jenkins, the pipeline CONCEPTS (jobs, dependencies, gates, artifact promotion) map one-to-one even where YAML syntax differs. This is also the honest answer to 'why are we not doing this on real cloud?': the workflow is identical, localhost removes cost, account friction and blast radius, and Workshop 3 shows exactly which single file changes when you point Terraform at AWS instead of local Docker.</a:t>
             </a:r>
           </a:p>
         </p:txBody>
@@ -1861,7 +1874,7 @@
           <a:lstStyle/>
           <a:p>
             <a:r>
-              <a:t>This is the single most common CI security mistake: a scan step that can never fail the build looks like a control but changes nothing. In Lab 04 the workflow runs Trivy twice - once as a report (severity HIGH+CRITICAL, exit-code 0) and once as a gate (CRITICAL only, ignore-unfixed, exit-code 1). Discuss what belongs in a gate on day one versus after a triage period. The pinned action version and least-privilege token are supply-chain hygiene participants should copy into every workflow they write.</a:t>
+              <a:t>Bridge to Module 4: source control and pipelines assume the thing being delivered is code - IaC is what makes the INFRASTRUCTURE itself deliverable the same way.</a:t>
             </a:r>
           </a:p>
         </p:txBody>
@@ -1931,7 +1944,7 @@
           <a:lstStyle/>
           <a:p>
             <a:r>
-              <a:t>DORA research (Accelerate, State of DevOps reports) shows speed and stability are not a trade-off: elite performers are better at both, because small automated changes are both faster and safer. Use all four together - optimising deployment frequency alone is gamed easily and shows up in change failure rate. These metrics measure the system, not individuals; never use them for performance reviews or they will be gamed. The capstone handover document asks teams to track these for services on the golden path.</a:t>
+              <a:t>75 minutes deep theory + a 10-minute basic demo (terraform plan walk-through). Workshop 3 later today is the full hands-on. Goal: participants understand WHY declarative + state + review beats scripts, and can place Terraform vs Ansible vs images correctly.</a:t>
             </a:r>
           </a:p>
         </p:txBody>
@@ -2001,7 +2014,7 @@
           <a:lstStyle/>
           <a:p>
             <a:r>
-              <a:t>This is where platform engineering pays off: a small platform team can enable many stream-aligned teams to ship safely without becoming a ticket desk.</a:t>
+              <a:t>Ground this in war stories - every ops veteran in the room has a snowflake server memory; invite one. The deep problem is that manually-produced infrastructure is UNKNOWABLE: its true configuration exists only as the accumulated side effects of every hand that touched it, so you cannot review it, reproduce it, or reason about it. Drift is the slow-motion version: staging and production started identical, then three years of hotfixes, one-off firewall rules and 'temporary' changes made 'it works in staging' an empty sentence. ClickOps is the mechanism of both: console changes are invisible to code review, produce no history, and cannot be rolled back - the console is to infrastructure what editing directly on the production server is to code. The pets/cattle metaphor (Bill Baker, popularised by CERN) captures the mindset shift: pets are named, nursed back to health, irreplaceable; cattle are numbered, replaced when sick, and their definition lives elsewhere - in code. Disaster recovery is the acid test to pose to the room: if your data centre or cloud region vanished tonight, is rebuilding a git clone + terraform apply, or six months of archaeology?</a:t>
             </a:r>
           </a:p>
         </p:txBody>
@@ -2071,7 +2084,7 @@
           <a:lstStyle/>
           <a:p>
             <a:r>
-              <a:t>DevOps emerged from the observation that throwing code over the wall from dev to ops creates delays and outages. CALMS is a useful checklist: if one element is missing, the transformation is fragile.</a:t>
+              <a:t>Spend time on the incentive conflict - it explains everything that follows. Developers were rewarded for shipping change; operations for preventing change (uptime). Both behaved rationally and the organisation suffered: infrequent, enormous, risky releases, handled by ticket queues and handoffs. The 2009 Velocity talk by John Allspaw and Paul Hammond showed Dev and Ops at Flickr cooperating to deploy more than ten times a day - unthinkable then, and it reframed frequent deployment as a SAFETY practice: small changes are easier to review, test and roll back. Patrick Debois coined 'DevOps' with the first devopsdays conference in Ghent the same year. Ask the room: how long does a change take to reach production in your organisation today, and how much of that is waiting?</a:t>
             </a:r>
           </a:p>
         </p:txBody>
@@ -2141,7 +2154,637 @@
           <a:lstStyle/>
           <a:p>
             <a:r>
-              <a:t>This case study synthesises patterns from the State of DevOps reports. Invite participants to compare with their own release cadence.</a:t>
+              <a:t>These four properties are the module's theoretical heart - everything else is tooling. Declarative vs imperative deserves a careful contrast: an imperative script ('create a network, then start container A, then B') encodes one path from one assumed starting point, so it breaks when reality differs and can never tell you what would change; a declarative definition ('these two containers on this network should exist') lets the tool compare desire against reality and compute the minimal path - which is exactly what terraform plan prints, and why plan output is reviewable in a pull request. Idempotence is what makes automation SAFE: a converging tool can run on every commit or on a timer; a non-idempotent script needs a human to check state first, which reintroduces the human bottleneck. Immutability transfers the container insight to infrastructure: patching a running server accumulates unknowable state, so instead you bake a new image/artifact and replace - rollback becomes 'run the previous version' instead of 'undo the patch and pray'. Version control ties it together into governance regulators actually accept: who changed what, when, reviewed by whom - it is all git log.</a:t>
+            </a:r>
+          </a:p>
+        </p:txBody>
+      </p:sp>
+      <p:sp>
+        <p:nvSpPr>
+          <p:cNvPr id="4" name="Slide Number Placeholder 3"/>
+          <p:cNvSpPr>
+            <a:spLocks noGrp="1"/>
+          </p:cNvSpPr>
+          <p:nvPr>
+            <p:ph type="sldNum" idx="5" sz="quarter"/>
+          </p:nvPr>
+        </p:nvSpPr>
+        <p:spPr/>
+      </p:sp>
+    </p:spTree>
+  </p:cSld>
+  <p:clrMapOvr>
+    <a:masterClrMapping/>
+  </p:clrMapOvr>
+</p:notes>
+</file>
+
+<file path=ppt/notesSlides/notesSlide31.xml><?xml version="1.0" encoding="utf-8"?>
+<p:notes xmlns:a="http://schemas.openxmlformats.org/drawingml/2006/main" xmlns:p="http://schemas.openxmlformats.org/presentationml/2006/main" xmlns:r="http://schemas.openxmlformats.org/officeDocument/2006/relationships">
+  <p:cSld>
+    <p:spTree>
+      <p:nvGrpSpPr>
+        <p:cNvPr id="1" name=""/>
+        <p:cNvGrpSpPr/>
+        <p:nvPr/>
+      </p:nvGrpSpPr>
+      <p:grpSpPr>
+        <a:xfrm>
+          <a:off x="0" y="0"/>
+          <a:ext cx="0" cy="0"/>
+          <a:chOff x="0" y="0"/>
+          <a:chExt cx="0" cy="0"/>
+        </a:xfrm>
+      </p:grpSpPr>
+      <p:sp>
+        <p:nvSpPr>
+          <p:cNvPr id="2" name="Slide Image Placeholder 1"/>
+          <p:cNvSpPr>
+            <a:spLocks noGrp="1"/>
+          </p:cNvSpPr>
+          <p:nvPr>
+            <p:ph type="sldImg" idx="2"/>
+          </p:nvPr>
+        </p:nvSpPr>
+        <p:spPr/>
+      </p:sp>
+      <p:sp>
+        <p:nvSpPr>
+          <p:cNvPr id="3" name="Notes Placeholder 2"/>
+          <p:cNvSpPr>
+            <a:spLocks noGrp="1"/>
+          </p:cNvSpPr>
+          <p:nvPr>
+            <p:ph type="body" idx="3" sz="quarter"/>
+          </p:nvPr>
+        </p:nvSpPr>
+        <p:spPr/>
+        <p:txBody>
+          <a:bodyPr/>
+          <a:lstStyle/>
+          <a:p>
+            <a:r>
+              <a:t>Walk each element slowly - this diagram is Workshop 3's map. Code in Git: HCL files declaring resources, reviewed like any code. Plan: the safety mechanism - Terraform refreshes reality, compares against desire, and prints +create/~update/-destroy BEFORE anything changes; a human (or CI gate) approves the diff, not the intention. Apply: executes exactly the approved plan. The STATE FILE is the piece newcomers underestimate: it maps resource names in code to real-world IDs (this docker_container resource IS container abc123), which is how Terraform knows an existing container should be updated rather than duplicated - hence the rules: never edit it by hand, store it remotely with locking when a team shares it, and treat it as sensitive (it can contain secrets in plain text). Drift detection falls out naturally: delete a managed container manually and the next plan shows '1 to add' - Terraform noticed reality diverged from state. The lock file (.terraform.lock.hcl) pins provider versions and IS committed - reproducibility across teammates and CI. Participants run this entire loop, including the drift experiment, in Workshop 3.</a:t>
+            </a:r>
+          </a:p>
+        </p:txBody>
+      </p:sp>
+      <p:sp>
+        <p:nvSpPr>
+          <p:cNvPr id="4" name="Slide Number Placeholder 3"/>
+          <p:cNvSpPr>
+            <a:spLocks noGrp="1"/>
+          </p:cNvSpPr>
+          <p:nvPr>
+            <p:ph type="sldNum" idx="5" sz="quarter"/>
+          </p:nvPr>
+        </p:nvSpPr>
+        <p:spPr/>
+      </p:sp>
+    </p:spTree>
+  </p:cSld>
+  <p:clrMapOvr>
+    <a:masterClrMapping/>
+  </p:clrMapOvr>
+</p:notes>
+</file>
+
+<file path=ppt/notesSlides/notesSlide32.xml><?xml version="1.0" encoding="utf-8"?>
+<p:notes xmlns:a="http://schemas.openxmlformats.org/drawingml/2006/main" xmlns:p="http://schemas.openxmlformats.org/presentationml/2006/main" xmlns:r="http://schemas.openxmlformats.org/officeDocument/2006/relationships">
+  <p:cSld>
+    <p:spTree>
+      <p:nvGrpSpPr>
+        <p:cNvPr id="1" name=""/>
+        <p:cNvGrpSpPr/>
+        <p:nvPr/>
+      </p:nvGrpSpPr>
+      <p:grpSpPr>
+        <a:xfrm>
+          <a:off x="0" y="0"/>
+          <a:ext cx="0" cy="0"/>
+          <a:chOff x="0" y="0"/>
+          <a:chExt cx="0" cy="0"/>
+        </a:xfrm>
+      </p:grpSpPr>
+      <p:sp>
+        <p:nvSpPr>
+          <p:cNvPr id="2" name="Slide Image Placeholder 1"/>
+          <p:cNvSpPr>
+            <a:spLocks noGrp="1"/>
+          </p:cNvSpPr>
+          <p:nvPr>
+            <p:ph type="sldImg" idx="2"/>
+          </p:nvPr>
+        </p:nvSpPr>
+        <p:spPr/>
+      </p:sp>
+      <p:sp>
+        <p:nvSpPr>
+          <p:cNvPr id="3" name="Notes Placeholder 2"/>
+          <p:cNvSpPr>
+            <a:spLocks noGrp="1"/>
+          </p:cNvSpPr>
+          <p:nvPr>
+            <p:ph type="body" idx="3" sz="quarter"/>
+          </p:nvPr>
+        </p:nvSpPr>
+        <p:spPr/>
+        <p:txBody>
+          <a:bodyPr/>
+          <a:lstStyle/>
+          <a:p>
+            <a:r>
+              <a:t>This split answers the outline's 'implementing IaC with configuration management tools' precisely. Provisioning tools make infrastructure exist; configuration management makes existing machines correct. Classic composition: Terraform creates the VM, then Ansible (or cloud-init, or a baked image) configures it. The modern twist: container images have absorbed much of configuration management's old territory - a Dockerfile IS the configuration of the runtime environment, applied at build time instead of continuously - which is why cloud-native shops run less Puppet than 2015 did. But config management remains essential wherever long-lived mutable machines exist: VM fleets, bare metal, network switches, and - as in our bonus lab - workstations. Mention Pulumi as the 'real programming language' alternative to HCL (TypeScript/Python/Go with the same plan/apply model) and OpenTofu as the community fork of Terraform. BASIC DEMO (10 min, theory-demos.md): run the Lab 05 bonus Ansible playbook against the VM's localhost twice - the room watches changed=N become changed=0, which makes idempotence tangible in one minute.</a:t>
+            </a:r>
+          </a:p>
+        </p:txBody>
+      </p:sp>
+      <p:sp>
+        <p:nvSpPr>
+          <p:cNvPr id="4" name="Slide Number Placeholder 3"/>
+          <p:cNvSpPr>
+            <a:spLocks noGrp="1"/>
+          </p:cNvSpPr>
+          <p:nvPr>
+            <p:ph type="sldNum" idx="5" sz="quarter"/>
+          </p:nvPr>
+        </p:nvSpPr>
+        <p:spPr/>
+      </p:sp>
+    </p:spTree>
+  </p:cSld>
+  <p:clrMapOvr>
+    <a:masterClrMapping/>
+  </p:clrMapOvr>
+</p:notes>
+</file>
+
+<file path=ppt/notesSlides/notesSlide33.xml><?xml version="1.0" encoding="utf-8"?>
+<p:notes xmlns:a="http://schemas.openxmlformats.org/drawingml/2006/main" xmlns:p="http://schemas.openxmlformats.org/presentationml/2006/main" xmlns:r="http://schemas.openxmlformats.org/officeDocument/2006/relationships">
+  <p:cSld>
+    <p:spTree>
+      <p:nvGrpSpPr>
+        <p:cNvPr id="1" name=""/>
+        <p:cNvGrpSpPr/>
+        <p:nvPr/>
+      </p:nvGrpSpPr>
+      <p:grpSpPr>
+        <a:xfrm>
+          <a:off x="0" y="0"/>
+          <a:ext cx="0" cy="0"/>
+          <a:chOff x="0" y="0"/>
+          <a:chExt cx="0" cy="0"/>
+        </a:xfrm>
+      </p:grpSpPr>
+      <p:sp>
+        <p:nvSpPr>
+          <p:cNvPr id="2" name="Slide Image Placeholder 1"/>
+          <p:cNvSpPr>
+            <a:spLocks noGrp="1"/>
+          </p:cNvSpPr>
+          <p:nvPr>
+            <p:ph type="sldImg" idx="2"/>
+          </p:nvPr>
+        </p:nvSpPr>
+        <p:spPr/>
+      </p:sp>
+      <p:sp>
+        <p:nvSpPr>
+          <p:cNvPr id="3" name="Notes Placeholder 2"/>
+          <p:cNvSpPr>
+            <a:spLocks noGrp="1"/>
+          </p:cNvSpPr>
+          <p:nvPr>
+            <p:ph type="body" idx="3" sz="quarter"/>
+          </p:nvPr>
+        </p:nvSpPr>
+        <p:spPr/>
+        <p:txBody>
+          <a:bodyPr/>
+          <a:lstStyle/>
+          <a:p>
+            <a:r>
+              <a:t>Five concepts cover 90% of real Terraform reading. Providers are why one workflow spans platforms: our labs use kreuzwerker/docker against the local daemon, and swapping to hashicorp/aws changes the provider block and resource types while plan/apply/state stay identical - THAT is the honest cloud story for this course, and the workshop makes participants prove it to themselves by reading main.tf. Resources declare objects and, crucially, reference each other: our order container's environment references the payment container's name, and from that reference Terraform derives creation ORDER automatically - dependency graphs from data flow, no 'depends_on' choreography needed in most cases. Variables/outputs make configurations reusable across environments (the tfvars file per environment pattern). Modules are the platform-engineering unit: the capstone wraps the whole two-service stack into one module that a consuming team calls with four variables - the module encodes the platform team's decisions once (Module 9's cognitive-load story, realised in HCL). State: covered on the previous slide; in teams it lives remotely (S3+DynamoDB, Terraform Cloud, GitLab) with locking, never in laptops.</a:t>
+            </a:r>
+          </a:p>
+        </p:txBody>
+      </p:sp>
+      <p:sp>
+        <p:nvSpPr>
+          <p:cNvPr id="4" name="Slide Number Placeholder 3"/>
+          <p:cNvSpPr>
+            <a:spLocks noGrp="1"/>
+          </p:cNvSpPr>
+          <p:nvPr>
+            <p:ph type="sldNum" idx="5" sz="quarter"/>
+          </p:nvPr>
+        </p:nvSpPr>
+        <p:spPr/>
+      </p:sp>
+    </p:spTree>
+  </p:cSld>
+  <p:clrMapOvr>
+    <a:masterClrMapping/>
+  </p:clrMapOvr>
+</p:notes>
+</file>
+
+<file path=ppt/notesSlides/notesSlide34.xml><?xml version="1.0" encoding="utf-8"?>
+<p:notes xmlns:a="http://schemas.openxmlformats.org/drawingml/2006/main" xmlns:p="http://schemas.openxmlformats.org/presentationml/2006/main" xmlns:r="http://schemas.openxmlformats.org/officeDocument/2006/relationships">
+  <p:cSld>
+    <p:spTree>
+      <p:nvGrpSpPr>
+        <p:cNvPr id="1" name=""/>
+        <p:cNvGrpSpPr/>
+        <p:nvPr/>
+      </p:nvGrpSpPr>
+      <p:grpSpPr>
+        <a:xfrm>
+          <a:off x="0" y="0"/>
+          <a:ext cx="0" cy="0"/>
+          <a:chOff x="0" y="0"/>
+          <a:chExt cx="0" cy="0"/>
+        </a:xfrm>
+      </p:grpSpPr>
+      <p:sp>
+        <p:nvSpPr>
+          <p:cNvPr id="2" name="Slide Image Placeholder 1"/>
+          <p:cNvSpPr>
+            <a:spLocks noGrp="1"/>
+          </p:cNvSpPr>
+          <p:nvPr>
+            <p:ph type="sldImg" idx="2"/>
+          </p:nvPr>
+        </p:nvSpPr>
+        <p:spPr/>
+      </p:sp>
+      <p:sp>
+        <p:nvSpPr>
+          <p:cNvPr id="3" name="Notes Placeholder 2"/>
+          <p:cNvSpPr>
+            <a:spLocks noGrp="1"/>
+          </p:cNvSpPr>
+          <p:nvPr>
+            <p:ph type="body" idx="3" sz="quarter"/>
+          </p:nvPr>
+        </p:nvSpPr>
+        <p:spPr/>
+        <p:txBody>
+          <a:bodyPr/>
+          <a:lstStyle/>
+          <a:p>
+            <a:r>
+              <a:t>This is the checklist to photograph. PR + plan-in-CI turns infrastructure change management into code review - the reviewer approves an exact diff of reality, which is stronger governance than any change-approval-board meeting, and auditors increasingly agree. Remote state with locking prevents the two-applies-at-once corruption scenario. The lock file gets committed (we practise this) so every machine resolves identical provider builds - the infrastructure equivalent of package-lock.json. IaC scanning catches misconfigurations before they exist: public buckets, missing encryption, permissive security groups, containers without limits - Module 7 wires trivy config into the pipeline and participants see their own Terraform scanned. Secrets: state files can contain resource attributes in plain text, so secrets never go in code AND sensitive values are kept out of state where possible - inject references to a secrets manager (Vault, cloud KMS) instead of values. Small modules: a 5000-line root configuration is unreviewable; compose small modules with narrow interfaces, exactly like functions. Tagging is unglamorous and pays for itself the first time finance asks 'what is this bill?' or an incident asks 'who owns this?'.</a:t>
+            </a:r>
+          </a:p>
+        </p:txBody>
+      </p:sp>
+      <p:sp>
+        <p:nvSpPr>
+          <p:cNvPr id="4" name="Slide Number Placeholder 3"/>
+          <p:cNvSpPr>
+            <a:spLocks noGrp="1"/>
+          </p:cNvSpPr>
+          <p:nvPr>
+            <p:ph type="sldNum" idx="5" sz="quarter"/>
+          </p:nvPr>
+        </p:nvSpPr>
+        <p:spPr/>
+      </p:sp>
+    </p:spTree>
+  </p:cSld>
+  <p:clrMapOvr>
+    <a:masterClrMapping/>
+  </p:clrMapOvr>
+</p:notes>
+</file>
+
+<file path=ppt/notesSlides/notesSlide35.xml><?xml version="1.0" encoding="utf-8"?>
+<p:notes xmlns:a="http://schemas.openxmlformats.org/drawingml/2006/main" xmlns:p="http://schemas.openxmlformats.org/presentationml/2006/main" xmlns:r="http://schemas.openxmlformats.org/officeDocument/2006/relationships">
+  <p:cSld>
+    <p:spTree>
+      <p:nvGrpSpPr>
+        <p:cNvPr id="1" name=""/>
+        <p:cNvGrpSpPr/>
+        <p:nvPr/>
+      </p:nvGrpSpPr>
+      <p:grpSpPr>
+        <a:xfrm>
+          <a:off x="0" y="0"/>
+          <a:ext cx="0" cy="0"/>
+          <a:chOff x="0" y="0"/>
+          <a:chExt cx="0" cy="0"/>
+        </a:xfrm>
+      </p:grpSpPr>
+      <p:sp>
+        <p:nvSpPr>
+          <p:cNvPr id="2" name="Slide Image Placeholder 1"/>
+          <p:cNvSpPr>
+            <a:spLocks noGrp="1"/>
+          </p:cNvSpPr>
+          <p:nvPr>
+            <p:ph type="sldImg" idx="2"/>
+          </p:nvPr>
+        </p:nvSpPr>
+        <p:spPr/>
+      </p:sp>
+      <p:sp>
+        <p:nvSpPr>
+          <p:cNvPr id="3" name="Notes Placeholder 2"/>
+          <p:cNvSpPr>
+            <a:spLocks noGrp="1"/>
+          </p:cNvSpPr>
+          <p:nvPr>
+            <p:ph type="body" idx="3" sz="quarter"/>
+          </p:nvPr>
+        </p:nvSpPr>
+        <p:spPr/>
+        <p:txBody>
+          <a:bodyPr/>
+          <a:lstStyle/>
+          <a:p>
+            <a:r>
+              <a:t>Bridge to Module 5: with infrastructure now deliverable-as-code, the pipeline can carry BOTH application and infrastructure through the same review-test-deploy discipline - which is what CI/CD generalises.</a:t>
+            </a:r>
+          </a:p>
+        </p:txBody>
+      </p:sp>
+      <p:sp>
+        <p:nvSpPr>
+          <p:cNvPr id="4" name="Slide Number Placeholder 3"/>
+          <p:cNvSpPr>
+            <a:spLocks noGrp="1"/>
+          </p:cNvSpPr>
+          <p:nvPr>
+            <p:ph type="sldNum" idx="5" sz="quarter"/>
+          </p:nvPr>
+        </p:nvSpPr>
+        <p:spPr/>
+      </p:sp>
+    </p:spTree>
+  </p:cSld>
+  <p:clrMapOvr>
+    <a:masterClrMapping/>
+  </p:clrMapOvr>
+</p:notes>
+</file>
+
+<file path=ppt/notesSlides/notesSlide36.xml><?xml version="1.0" encoding="utf-8"?>
+<p:notes xmlns:a="http://schemas.openxmlformats.org/drawingml/2006/main" xmlns:p="http://schemas.openxmlformats.org/presentationml/2006/main" xmlns:r="http://schemas.openxmlformats.org/officeDocument/2006/relationships">
+  <p:cSld>
+    <p:spTree>
+      <p:nvGrpSpPr>
+        <p:cNvPr id="1" name=""/>
+        <p:cNvGrpSpPr/>
+        <p:nvPr/>
+      </p:nvGrpSpPr>
+      <p:grpSpPr>
+        <a:xfrm>
+          <a:off x="0" y="0"/>
+          <a:ext cx="0" cy="0"/>
+          <a:chOff x="0" y="0"/>
+          <a:chExt cx="0" cy="0"/>
+        </a:xfrm>
+      </p:grpSpPr>
+      <p:sp>
+        <p:nvSpPr>
+          <p:cNvPr id="2" name="Slide Image Placeholder 1"/>
+          <p:cNvSpPr>
+            <a:spLocks noGrp="1"/>
+          </p:cNvSpPr>
+          <p:nvPr>
+            <p:ph type="sldImg" idx="2"/>
+          </p:nvPr>
+        </p:nvSpPr>
+        <p:spPr/>
+      </p:sp>
+      <p:sp>
+        <p:nvSpPr>
+          <p:cNvPr id="3" name="Notes Placeholder 2"/>
+          <p:cNvSpPr>
+            <a:spLocks noGrp="1"/>
+          </p:cNvSpPr>
+          <p:nvPr>
+            <p:ph type="body" idx="3" sz="quarter"/>
+          </p:nvPr>
+        </p:nvSpPr>
+        <p:spPr/>
+        <p:txBody>
+          <a:bodyPr/>
+          <a:lstStyle/>
+          <a:p>
+            <a:r>
+              <a:t>60 minutes theory; Workshop 1 (late afternoon) builds the real pipeline. Goal: precise definitions (CI vs delivery vs deployment), pipeline anatomy including honest security gates, deployment strategies, and what the platform contributes.</a:t>
+            </a:r>
+          </a:p>
+        </p:txBody>
+      </p:sp>
+      <p:sp>
+        <p:nvSpPr>
+          <p:cNvPr id="4" name="Slide Number Placeholder 3"/>
+          <p:cNvSpPr>
+            <a:spLocks noGrp="1"/>
+          </p:cNvSpPr>
+          <p:nvPr>
+            <p:ph type="sldNum" idx="5" sz="quarter"/>
+          </p:nvPr>
+        </p:nvSpPr>
+        <p:spPr/>
+      </p:sp>
+    </p:spTree>
+  </p:cSld>
+  <p:clrMapOvr>
+    <a:masterClrMapping/>
+  </p:clrMapOvr>
+</p:notes>
+</file>
+
+<file path=ppt/notesSlides/notesSlide37.xml><?xml version="1.0" encoding="utf-8"?>
+<p:notes xmlns:a="http://schemas.openxmlformats.org/drawingml/2006/main" xmlns:p="http://schemas.openxmlformats.org/presentationml/2006/main" xmlns:r="http://schemas.openxmlformats.org/officeDocument/2006/relationships">
+  <p:cSld>
+    <p:spTree>
+      <p:nvGrpSpPr>
+        <p:cNvPr id="1" name=""/>
+        <p:cNvGrpSpPr/>
+        <p:nvPr/>
+      </p:nvGrpSpPr>
+      <p:grpSpPr>
+        <a:xfrm>
+          <a:off x="0" y="0"/>
+          <a:ext cx="0" cy="0"/>
+          <a:chOff x="0" y="0"/>
+          <a:chExt cx="0" cy="0"/>
+        </a:xfrm>
+      </p:grpSpPr>
+      <p:sp>
+        <p:nvSpPr>
+          <p:cNvPr id="2" name="Slide Image Placeholder 1"/>
+          <p:cNvSpPr>
+            <a:spLocks noGrp="1"/>
+          </p:cNvSpPr>
+          <p:nvPr>
+            <p:ph type="sldImg" idx="2"/>
+          </p:nvPr>
+        </p:nvSpPr>
+        <p:spPr/>
+      </p:sp>
+      <p:sp>
+        <p:nvSpPr>
+          <p:cNvPr id="3" name="Notes Placeholder 2"/>
+          <p:cNvSpPr>
+            <a:spLocks noGrp="1"/>
+          </p:cNvSpPr>
+          <p:nvPr>
+            <p:ph type="body" idx="3" sz="quarter"/>
+          </p:nvPr>
+        </p:nvSpPr>
+        <p:spPr/>
+        <p:txBody>
+          <a:bodyPr/>
+          <a:lstStyle/>
+          <a:p>
+            <a:r>
+              <a:t>CI is a PRACTICE, not a server - a Jenkins box building week-old feature branches is not CI. The core insight is about batch size: a 50-line change can be reviewed rigorously, tested meaningfully, and rolled back trivially; a 5000-line merge can only be skimmed and hoped about, and when it breaks, which of its 40 commits caused it? Risk compounds super-linearly, so many small integrations are structurally safer than one big one - the same lean logic as Module 1. Long-lived branches accumulate integration debt: every day unmerged is a day of conflicts building and a day of feedback not arriving. Trunk-based development is the professional consensus (and DORA-correlated with performance): branches live hours to a couple of days, and incomplete features hide behind flags rather than branches. The andon-cord norm makes CI real: when the mainline goes red, the team's top priority is green again - a team that tolerates a red build for days has CI theatre, not CI. Feature flags get a caveat: they decouple deploy from release (powerful, next slide) but are themselves technical debt with a lifecycle - flags need owners and removal dates, or you accumulate a config space nobody can reason about.</a:t>
+            </a:r>
+          </a:p>
+        </p:txBody>
+      </p:sp>
+      <p:sp>
+        <p:nvSpPr>
+          <p:cNvPr id="4" name="Slide Number Placeholder 3"/>
+          <p:cNvSpPr>
+            <a:spLocks noGrp="1"/>
+          </p:cNvSpPr>
+          <p:nvPr>
+            <p:ph type="sldNum" idx="5" sz="quarter"/>
+          </p:nvPr>
+        </p:nvSpPr>
+        <p:spPr/>
+      </p:sp>
+    </p:spTree>
+  </p:cSld>
+  <p:clrMapOvr>
+    <a:masterClrMapping/>
+  </p:clrMapOvr>
+</p:notes>
+</file>
+
+<file path=ppt/notesSlides/notesSlide38.xml><?xml version="1.0" encoding="utf-8"?>
+<p:notes xmlns:a="http://schemas.openxmlformats.org/drawingml/2006/main" xmlns:p="http://schemas.openxmlformats.org/presentationml/2006/main" xmlns:r="http://schemas.openxmlformats.org/officeDocument/2006/relationships">
+  <p:cSld>
+    <p:spTree>
+      <p:nvGrpSpPr>
+        <p:cNvPr id="1" name=""/>
+        <p:cNvGrpSpPr/>
+        <p:nvPr/>
+      </p:nvGrpSpPr>
+      <p:grpSpPr>
+        <a:xfrm>
+          <a:off x="0" y="0"/>
+          <a:ext cx="0" cy="0"/>
+          <a:chOff x="0" y="0"/>
+          <a:chExt cx="0" cy="0"/>
+        </a:xfrm>
+      </p:grpSpPr>
+      <p:sp>
+        <p:nvSpPr>
+          <p:cNvPr id="2" name="Slide Image Placeholder 1"/>
+          <p:cNvSpPr>
+            <a:spLocks noGrp="1"/>
+          </p:cNvSpPr>
+          <p:nvPr>
+            <p:ph type="sldImg" idx="2"/>
+          </p:nvPr>
+        </p:nvSpPr>
+        <p:spPr/>
+      </p:sp>
+      <p:sp>
+        <p:nvSpPr>
+          <p:cNvPr id="3" name="Notes Placeholder 2"/>
+          <p:cNvSpPr>
+            <a:spLocks noGrp="1"/>
+          </p:cNvSpPr>
+          <p:nvPr>
+            <p:ph type="body" idx="3" sz="quarter"/>
+          </p:nvPr>
+        </p:nvSpPr>
+        <p:spPr/>
+        <p:txBody>
+          <a:bodyPr/>
+          <a:lstStyle/>
+          <a:p>
+            <a:r>
+              <a:t>Precision here prevents years of confused meetings. Continuous delivery is a state of READINESS: the pipeline proves every commit deployable, and shipping becomes a business decision that can be taken any afternoon - most organisations should target this. Continuous deployment removes the human trigger entirely and is appropriate once test confidence, monitoring and rollback are strong (and change approval regulation permits). The deploy/release distinction is the modern unlock: code can be deployed to production dark (flagged off, or receiving only canary traffic) and released later by flipping a flag - which turns release into a reversible, low-drama act and enables testing in production safely. Build-once-promote is the artifact discipline: the image tested in staging is bit-for-bit the image that reaches production (SHA-tagged, immutable) - rebuilding per environment invites 'works in staging' bugs from dependency drift; our pipeline SHA-tags for exactly this reason. The closing aphorism (Martin Fowler's 'if it hurts, do it more often') is the module's cultural core: pain under frequency is a signal pointing at what to automate next - the organisations deploying daily did not start painless; they started frequent.</a:t>
+            </a:r>
+          </a:p>
+        </p:txBody>
+      </p:sp>
+      <p:sp>
+        <p:nvSpPr>
+          <p:cNvPr id="4" name="Slide Number Placeholder 3"/>
+          <p:cNvSpPr>
+            <a:spLocks noGrp="1"/>
+          </p:cNvSpPr>
+          <p:nvPr>
+            <p:ph type="sldNum" idx="5" sz="quarter"/>
+          </p:nvPr>
+        </p:nvSpPr>
+        <p:spPr/>
+      </p:sp>
+    </p:spTree>
+  </p:cSld>
+  <p:clrMapOvr>
+    <a:masterClrMapping/>
+  </p:clrMapOvr>
+</p:notes>
+</file>
+
+<file path=ppt/notesSlides/notesSlide39.xml><?xml version="1.0" encoding="utf-8"?>
+<p:notes xmlns:a="http://schemas.openxmlformats.org/drawingml/2006/main" xmlns:p="http://schemas.openxmlformats.org/presentationml/2006/main" xmlns:r="http://schemas.openxmlformats.org/officeDocument/2006/relationships">
+  <p:cSld>
+    <p:spTree>
+      <p:nvGrpSpPr>
+        <p:cNvPr id="1" name=""/>
+        <p:cNvGrpSpPr/>
+        <p:nvPr/>
+      </p:nvGrpSpPr>
+      <p:grpSpPr>
+        <a:xfrm>
+          <a:off x="0" y="0"/>
+          <a:ext cx="0" cy="0"/>
+          <a:chOff x="0" y="0"/>
+          <a:chExt cx="0" cy="0"/>
+        </a:xfrm>
+      </p:grpSpPr>
+      <p:sp>
+        <p:nvSpPr>
+          <p:cNvPr id="2" name="Slide Image Placeholder 1"/>
+          <p:cNvSpPr>
+            <a:spLocks noGrp="1"/>
+          </p:cNvSpPr>
+          <p:nvPr>
+            <p:ph type="sldImg" idx="2"/>
+          </p:nvPr>
+        </p:nvSpPr>
+        <p:spPr/>
+      </p:sp>
+      <p:sp>
+        <p:nvSpPr>
+          <p:cNvPr id="3" name="Notes Placeholder 2"/>
+          <p:cNvSpPr>
+            <a:spLocks noGrp="1"/>
+          </p:cNvSpPr>
+          <p:nvPr>
+            <p:ph type="body" idx="3" sz="quarter"/>
+          </p:nvPr>
+        </p:nvSpPr>
+        <p:spPr/>
+        <p:txBody>
+          <a:bodyPr/>
+          <a:lstStyle/>
+          <a:p>
+            <a:r>
+              <a:t>Trace one commit through the diagram end to end, because Workshop 1 builds the left half and the capstone adds the right. Commit/PR triggers everything - no manual pipeline starts. Build produces the SHA-tagged image once. Test executes the test pyramid (unit tests in seconds first, then API tests - fast feedback before expensive feedback). The security gate scans the artifact and can genuinely fail the build (next slide is dedicated to this, because most real pipelines get it wrong). Deploy-to-staging exercises the real deployment mechanics; the smoke test proves the deployed thing actually serves (our capstone curls /health and creates an order - a deploy that 'succeeded' but serves 500s is a failure the pipeline must catch). Production sits behind an environment gate - in GitHub Actions, an 'environment' with required approvers gives continuous DELIVERY; removing the approval gives continuous DEPLOYMENT: the difference is one setting, which makes the previous slide's distinction concrete. The feedback arrows matter as much as the forward flow: a red stage stops the line and fixing forward takes minutes because the batch is small; rollback on the right is 'redeploy the previous immutable artifact', not surgery.</a:t>
             </a:r>
           </a:p>
         </p:txBody>
@@ -2211,7 +2854,287 @@
           <a:lstStyle/>
           <a:p>
             <a:r>
-              <a:t>Point out that the left side emphasises building the right thing and building it right, while the right side emphasises operating it safely and learning from production.</a:t>
+              <a:t>Definitions matter because 'DevOps' is the most abused word in IT. The common anti-pattern is creating a third silo called 'the DevOps team' that owns pipelines and becomes a new bottleneck between Dev and Ops - the exact problem DevOps set out to remove. The Amazon principle 'you build it, you run it' captures the ownership shift: the team that writes a service carries the pager for it, which closes the feedback loop between code quality and operational pain. The lean lineage is real, not decorative: small batch sizes, limiting work in progress, pulling quality forward, and reducing handoffs come directly from manufacturing (Toyota Production System) via the book 'The Phoenix Project'. When someone in the room says 'we have a DevOps engineer', explore what that person actually does - often they are a platform engineer (Module 1, later) or a build engineer.</a:t>
+            </a:r>
+          </a:p>
+        </p:txBody>
+      </p:sp>
+      <p:sp>
+        <p:nvSpPr>
+          <p:cNvPr id="4" name="Slide Number Placeholder 3"/>
+          <p:cNvSpPr>
+            <a:spLocks noGrp="1"/>
+          </p:cNvSpPr>
+          <p:nvPr>
+            <p:ph type="sldNum" idx="5" sz="quarter"/>
+          </p:nvPr>
+        </p:nvSpPr>
+        <p:spPr/>
+      </p:sp>
+    </p:spTree>
+  </p:cSld>
+  <p:clrMapOvr>
+    <a:masterClrMapping/>
+  </p:clrMapOvr>
+</p:notes>
+</file>
+
+<file path=ppt/notesSlides/notesSlide40.xml><?xml version="1.0" encoding="utf-8"?>
+<p:notes xmlns:a="http://schemas.openxmlformats.org/drawingml/2006/main" xmlns:p="http://schemas.openxmlformats.org/presentationml/2006/main" xmlns:r="http://schemas.openxmlformats.org/officeDocument/2006/relationships">
+  <p:cSld>
+    <p:spTree>
+      <p:nvGrpSpPr>
+        <p:cNvPr id="1" name=""/>
+        <p:cNvGrpSpPr/>
+        <p:nvPr/>
+      </p:nvGrpSpPr>
+      <p:grpSpPr>
+        <a:xfrm>
+          <a:off x="0" y="0"/>
+          <a:ext cx="0" cy="0"/>
+          <a:chOff x="0" y="0"/>
+          <a:chExt cx="0" cy="0"/>
+        </a:xfrm>
+      </p:grpSpPr>
+      <p:sp>
+        <p:nvSpPr>
+          <p:cNvPr id="2" name="Slide Image Placeholder 1"/>
+          <p:cNvSpPr>
+            <a:spLocks noGrp="1"/>
+          </p:cNvSpPr>
+          <p:nvPr>
+            <p:ph type="sldImg" idx="2"/>
+          </p:nvPr>
+        </p:nvSpPr>
+        <p:spPr/>
+      </p:sp>
+      <p:sp>
+        <p:nvSpPr>
+          <p:cNvPr id="3" name="Notes Placeholder 2"/>
+          <p:cNvSpPr>
+            <a:spLocks noGrp="1"/>
+          </p:cNvSpPr>
+          <p:nvPr>
+            <p:ph type="body" idx="3" sz="quarter"/>
+          </p:nvPr>
+        </p:nvSpPr>
+        <p:spPr/>
+        <p:txBody>
+          <a:bodyPr/>
+          <a:lstStyle/>
+          <a:p>
+            <a:r>
+              <a:t>The most common security-in-CI failure is a scanner wired with exit-code 0 and called a 'gate' in the audit deck - it is a dashboard nobody looks at, and it changes nothing. Teach the two-step pattern participants will build in Workshop 1: a REPORT step (HIGH+CRITICAL, exit-code 0) keeps full visibility for triage, and a GATE step (CRITICAL only, ignore-unfixed, exit-code 1) actually stops the line - but only for findings a developer can act on TODAY, because a gate that fails on unfixable upstream CVEs blocks all delivery indefinitely and gets bypassed within a week, taking the team's respect for red builds with it. Gates must be trustworthy to be tolerated: start narrow (fixable criticals), widen deliberately as the backlog clears. The two supply-chain lines preview Module 7 but belong in every pipeline from day one: a third-party action pinned to @master means an upstream compromise runs instantly with YOUR repository's credentials - pin versions; and default tokens with write access mean any compromised step can push code - declare least-privilege permissions explicitly. Both patterns are already in the workshop's workflow file; point at them when you get there.</a:t>
+            </a:r>
+          </a:p>
+        </p:txBody>
+      </p:sp>
+      <p:sp>
+        <p:nvSpPr>
+          <p:cNvPr id="4" name="Slide Number Placeholder 3"/>
+          <p:cNvSpPr>
+            <a:spLocks noGrp="1"/>
+          </p:cNvSpPr>
+          <p:nvPr>
+            <p:ph type="sldNum" idx="5" sz="quarter"/>
+          </p:nvPr>
+        </p:nvSpPr>
+        <p:spPr/>
+      </p:sp>
+    </p:spTree>
+  </p:cSld>
+  <p:clrMapOvr>
+    <a:masterClrMapping/>
+  </p:clrMapOvr>
+</p:notes>
+</file>
+
+<file path=ppt/notesSlides/notesSlide41.xml><?xml version="1.0" encoding="utf-8"?>
+<p:notes xmlns:a="http://schemas.openxmlformats.org/drawingml/2006/main" xmlns:p="http://schemas.openxmlformats.org/presentationml/2006/main" xmlns:r="http://schemas.openxmlformats.org/officeDocument/2006/relationships">
+  <p:cSld>
+    <p:spTree>
+      <p:nvGrpSpPr>
+        <p:cNvPr id="1" name=""/>
+        <p:cNvGrpSpPr/>
+        <p:nvPr/>
+      </p:nvGrpSpPr>
+      <p:grpSpPr>
+        <a:xfrm>
+          <a:off x="0" y="0"/>
+          <a:ext cx="0" cy="0"/>
+          <a:chOff x="0" y="0"/>
+          <a:chExt cx="0" cy="0"/>
+        </a:xfrm>
+      </p:grpSpPr>
+      <p:sp>
+        <p:nvSpPr>
+          <p:cNvPr id="2" name="Slide Image Placeholder 1"/>
+          <p:cNvSpPr>
+            <a:spLocks noGrp="1"/>
+          </p:cNvSpPr>
+          <p:nvPr>
+            <p:ph type="sldImg" idx="2"/>
+          </p:nvPr>
+        </p:nvSpPr>
+        <p:spPr/>
+      </p:sp>
+      <p:sp>
+        <p:nvSpPr>
+          <p:cNvPr id="3" name="Notes Placeholder 2"/>
+          <p:cNvSpPr>
+            <a:spLocks noGrp="1"/>
+          </p:cNvSpPr>
+          <p:nvPr>
+            <p:ph type="body" idx="3" sz="quarter"/>
+          </p:nvPr>
+        </p:nvSpPr>
+        <p:spPr/>
+        <p:txBody>
+          <a:bodyPr/>
+          <a:lstStyle/>
+          <a:p>
+            <a:r>
+              <a:t>Deployment strategies are risk-management instruments; choose per service, not per fashion. Rolling is the sensible default and what Kubernetes does out of the box - participants watch a rolling update replace pods one by one in Workshop 2 and roll it back with one command. Its constraint deserves emphasis: during the roll, old and new versions serve simultaneously, so changes must be backwards-compatible - which drives the expand/contract pattern for database migrations (add the new column first, deploy code that handles both, remove the old column later; never break-and-fix in one step). Blue-green buys atomic cutover and instant rollback at the price of doubled infrastructure - attractive for monoliths and regulated cutovers. Canary is the elite pattern: real production traffic in controlled percentages, with promotion gated on metrics (error rate, latency) between steps - tools like Argo Rollouts and Flagger automate the progression, which is called progressive delivery; note the dependency on Module 8's observability - a canary without good metrics is just a slow deploy. Shadow testing validates against real traffic patterns with zero user exposure - powerful for rewrites, expensive to mirror safely (beware side effects: shadowed writes must not hit real systems twice).</a:t>
+            </a:r>
+          </a:p>
+        </p:txBody>
+      </p:sp>
+      <p:sp>
+        <p:nvSpPr>
+          <p:cNvPr id="4" name="Slide Number Placeholder 3"/>
+          <p:cNvSpPr>
+            <a:spLocks noGrp="1"/>
+          </p:cNvSpPr>
+          <p:nvPr>
+            <p:ph type="sldNum" idx="5" sz="quarter"/>
+          </p:nvPr>
+        </p:nvSpPr>
+        <p:spPr/>
+      </p:sp>
+    </p:spTree>
+  </p:cSld>
+  <p:clrMapOvr>
+    <a:masterClrMapping/>
+  </p:clrMapOvr>
+</p:notes>
+</file>
+
+<file path=ppt/notesSlides/notesSlide42.xml><?xml version="1.0" encoding="utf-8"?>
+<p:notes xmlns:a="http://schemas.openxmlformats.org/drawingml/2006/main" xmlns:p="http://schemas.openxmlformats.org/presentationml/2006/main" xmlns:r="http://schemas.openxmlformats.org/officeDocument/2006/relationships">
+  <p:cSld>
+    <p:spTree>
+      <p:nvGrpSpPr>
+        <p:cNvPr id="1" name=""/>
+        <p:cNvGrpSpPr/>
+        <p:nvPr/>
+      </p:nvGrpSpPr>
+      <p:grpSpPr>
+        <a:xfrm>
+          <a:off x="0" y="0"/>
+          <a:ext cx="0" cy="0"/>
+          <a:chOff x="0" y="0"/>
+          <a:chExt cx="0" cy="0"/>
+        </a:xfrm>
+      </p:grpSpPr>
+      <p:sp>
+        <p:nvSpPr>
+          <p:cNvPr id="2" name="Slide Image Placeholder 1"/>
+          <p:cNvSpPr>
+            <a:spLocks noGrp="1"/>
+          </p:cNvSpPr>
+          <p:nvPr>
+            <p:ph type="sldImg" idx="2"/>
+          </p:nvPr>
+        </p:nvSpPr>
+        <p:spPr/>
+      </p:sp>
+      <p:sp>
+        <p:nvSpPr>
+          <p:cNvPr id="3" name="Notes Placeholder 2"/>
+          <p:cNvSpPr>
+            <a:spLocks noGrp="1"/>
+          </p:cNvSpPr>
+          <p:nvPr>
+            <p:ph type="body" idx="3" sz="quarter"/>
+          </p:nvPr>
+        </p:nvSpPr>
+        <p:spPr/>
+        <p:txBody>
+          <a:bodyPr/>
+          <a:lstStyle/>
+          <a:p>
+            <a:r>
+              <a:t>This slide connects Module 5 to the course's platform thread. Without a platform, every team hand-rolls pipelines: quality varies wildly, security steps are omitted under deadline pressure, and pipeline maintenance becomes distributed toil across every team. The platform play is centralise-and-serve: reusable workflows (GitHub Actions' workflow_call, GitLab includes, shared Jenkins libraries) let a team's entire CI file be ten lines that inherit the golden path - and when the platform team improves the scan step, every consuming team gets it on the next run without a single ticket. Secrets follow the same logic: the platform wires OIDC or a secrets manager into the pipeline so credentials never appear in repositories or logs. 'Reaches production on day one' is the platform's headline metric (time-to-first-deploy) and Module 9 will treat it as a product KPI. Real-world patterns worth naming for the room: Netflix's Spinnaker, Shopify's deployment platform, and the State of DevOps reports' consistent finding that elite performers standardise their delivery tooling - the capstone's golden path is a miniature of exactly this.</a:t>
+            </a:r>
+          </a:p>
+        </p:txBody>
+      </p:sp>
+      <p:sp>
+        <p:nvSpPr>
+          <p:cNvPr id="4" name="Slide Number Placeholder 3"/>
+          <p:cNvSpPr>
+            <a:spLocks noGrp="1"/>
+          </p:cNvSpPr>
+          <p:nvPr>
+            <p:ph type="sldNum" idx="5" sz="quarter"/>
+          </p:nvPr>
+        </p:nvSpPr>
+        <p:spPr/>
+      </p:sp>
+    </p:spTree>
+  </p:cSld>
+  <p:clrMapOvr>
+    <a:masterClrMapping/>
+  </p:clrMapOvr>
+</p:notes>
+</file>
+
+<file path=ppt/notesSlides/notesSlide43.xml><?xml version="1.0" encoding="utf-8"?>
+<p:notes xmlns:a="http://schemas.openxmlformats.org/drawingml/2006/main" xmlns:p="http://schemas.openxmlformats.org/presentationml/2006/main" xmlns:r="http://schemas.openxmlformats.org/officeDocument/2006/relationships">
+  <p:cSld>
+    <p:spTree>
+      <p:nvGrpSpPr>
+        <p:cNvPr id="1" name=""/>
+        <p:cNvGrpSpPr/>
+        <p:nvPr/>
+      </p:nvGrpSpPr>
+      <p:grpSpPr>
+        <a:xfrm>
+          <a:off x="0" y="0"/>
+          <a:ext cx="0" cy="0"/>
+          <a:chOff x="0" y="0"/>
+          <a:chExt cx="0" cy="0"/>
+        </a:xfrm>
+      </p:grpSpPr>
+      <p:sp>
+        <p:nvSpPr>
+          <p:cNvPr id="2" name="Slide Image Placeholder 1"/>
+          <p:cNvSpPr>
+            <a:spLocks noGrp="1"/>
+          </p:cNvSpPr>
+          <p:nvPr>
+            <p:ph type="sldImg" idx="2"/>
+          </p:nvPr>
+        </p:nvSpPr>
+        <p:spPr/>
+      </p:sp>
+      <p:sp>
+        <p:nvSpPr>
+          <p:cNvPr id="3" name="Notes Placeholder 2"/>
+          <p:cNvSpPr>
+            <a:spLocks noGrp="1"/>
+          </p:cNvSpPr>
+          <p:nvPr>
+            <p:ph type="body" idx="3" sz="quarter"/>
+          </p:nvPr>
+        </p:nvSpPr>
+        <p:spPr/>
+        <p:txBody>
+          <a:bodyPr/>
+          <a:lstStyle/>
+          <a:p>
+            <a:r>
+              <a:t>Set up Workshop 1 (next block): participants build the test-build-scan pipeline for the order service and trigger it from a pull request - the left half of today's diagram, for real. Day 2 then containerises deeper (Module 6) and extends the pipeline's reach to Kubernetes.</a:t>
             </a:r>
           </a:p>
         </p:txBody>
@@ -2281,7 +3204,7 @@
           <a:lstStyle/>
           <a:p>
             <a:r>
-              <a:t>Use the analogy of a public cloud: AWS does not make you hand-craft every VM. A good internal platform gives the same experience inside an organisation.</a:t>
+              <a:t>The Three Ways (Gene Kim) are the theoretical backbone; use them as a classification tool all week. Flow: CI/CD pipelines, trunk-based development, IaC - anything that moves change left-to-right faster and in smaller pieces. Feedback: automated tests, security scans, observability, SLOs - anything that tells you quickly that something is wrong, as close to the cause as possible. Continual learning: blameless postmortems, game days, error budgets - anything that converts failure into system improvement rather than fear. A good exercise: name any practice ('code review?', 'canary deploys?', 'chaos engineering?') and have the room place it. Code review is feedback; canary is flow AND feedback; chaos engineering is learning. If a practice serves none of the three ways, question why you do it.</a:t>
             </a:r>
           </a:p>
         </p:txBody>
@@ -2351,7 +3274,7 @@
           <a:lstStyle/>
           <a:p>
             <a:r>
-              <a:t>A useful phrase: 'DevOps is the what and why; platform engineering is the how at scale.' Mention Team Topologies: platform teams should reduce, not increase, cognitive load.</a:t>
+              <a:t>CALMS (Jez Humble, building on Damon Edwards and John Willis) is a health-check model: organisations routinely over-invest in Automation and under-invest in Culture and Measurement, then wonder why the tooling did not change outcomes. Walk each letter with a concrete failure mode. Culture failure: pipelines exist but every deploy still needs a change-approval board meeting. Automation failure: 'we automated the deploy' but test coverage is so thin nobody trusts it, so deploys still happen quarterly. Lean failure: one release train carrying 200 changes - when it derails, which change caused it? Measurement failure: teams argue from anecdotes ('deploys feel risky') with no data. Sharing failure: three teams each build their own deployment scripts, solving the same problem three times. This course touches every letter and the notes say where.</a:t>
             </a:r>
           </a:p>
         </p:txBody>
@@ -2421,7 +3344,7 @@
           <a:lstStyle/>
           <a:p>
             <a:r>
-              <a:t>Orient participants: native Python (Lab 00), Docker Compose stacks (Labs 03/08), Terraform-managed containers (Lab 05) and a kind Kubernetes cluster (Labs 06/09) all live on one VM. Every URL in the course is http://localhost:&lt;port&gt;. No cloud account and no shared infrastructure - and full cleanup is one command per stack. The workflow, not the infrastructure, is what transfers to production.</a:t>
+              <a:t>Walk the loop phase by phase and stress two things. First, it is a loop, not a pipeline with an end: what you learn operating and monitoring the system feeds the next planning cycle - that closing of the loop IS DevOps. Second, in a handover organisation this picture is cut in the middle: Dev owns the left half, Ops the right half, and information dies at the boundary. During the course participants traverse the whole loop once with the same small application, so by Day 2 afternoon this diagram describes what they have personally done, not an abstraction.</a:t>
             </a:r>
           </a:p>
         </p:txBody>
@@ -2491,7 +3414,7 @@
           <a:lstStyle/>
           <a:p>
             <a:r>
-              <a:t>Pause here. Ask participants for one pain point they experience where a platform could help.</a:t>
+              <a:t>The theory here is cognitive load (from cognitive psychology, applied by Team Topologies): intrinsic load is the essence of the team's actual problem (their business domain); extraneous load is everything else they must wrestle with to ship (cluster setup, pipeline syntax, scanner configuration); germane load is productive learning. Pure DevOps taken literally means every team carries all the extraneous load themselves - eight teams each becoming Kubernetes experts is waste, and worse, it crowds out the intrinsic work you actually hired them for. A platform team absorbs the extraneous load ONCE and serves it as a product: templates, pipelines, runtime, observability, security defaults. Important framing: platform engineering is not a rejection of DevOps but its industrialisation - the goal (teams own their services end to end) is unchanged; the platform makes that ownership affordable.</a:t>
             </a:r>
           </a:p>
         </p:txBody>
@@ -2561,7 +3484,7 @@
           <a:lstStyle/>
           <a:p>
             <a:r>
-              <a:t>This module shifts from technology to people. Most DevOps failures are cultural, not technical. Use this time to make the case for psychological safety and shared ownership.</a:t>
+              <a:t>These three terms cause endless confusion in job adverts; give participants a crisp separation. DevOps is a philosophy of shared ownership - anyone claiming to 'hire a DevOps' is usually hiring a platform or build engineer. SRE (Site Reliability Engineering, from Google) operationalises reliability as an engineering problem: Service Level Objectives quantify how reliable a service must be, error budgets convert the gap to 100% into a spendable resource, and 'toil' (manual, repetitive, automatable operational work) is systematically eliminated - Google caps toil at 50% of an SRE's time. Platform engineering packages both into a product. Concrete example with this course's material: SRE thinking gives us the 99% SLO and burn-rate alerts (Module 8); the platform bakes probes, scanning and dashboards into the golden path (Module 10); DevOps culture means the order-service team still carries responsibility for what they ship.</a:t>
             </a:r>
           </a:p>
         </p:txBody>
@@ -5616,7 +6539,7 @@
                 </a:solidFill>
                 <a:latin typeface="Calibri"/>
               </a:rPr>
-              <a:t>Day 1 — Foundations, Culture, IaC &amp; CI/CD</a:t>
+              <a:t>Day 1 — Foundations, Culture, Tools, IaC &amp; CI/CD</a:t>
             </a:r>
           </a:p>
         </p:txBody>
@@ -5653,96 +6576,98 @@
         <p:txBody>
           <a:bodyPr/>
           <a:lstStyle/>
-          <a:p>
-            <a:r>
-              <a:rPr sz="3200" b="1">
+          <a:p/>
+        </p:txBody>
+      </p:sp>
+      <p:sp>
+        <p:nvSpPr>
+          <p:cNvPr id="3" name="TextBox 2"/>
+          <p:cNvSpPr txBox="1"/>
+          <p:nvPr/>
+        </p:nvSpPr>
+        <p:spPr>
+          <a:xfrm>
+            <a:off x="457200" y="274320"/>
+            <a:ext cx="8229600" cy="731520"/>
+          </a:xfrm>
+          <a:prstGeom prst="rect">
+            <a:avLst/>
+          </a:prstGeom>
+          <a:noFill/>
+        </p:spPr>
+        <p:txBody>
+          <a:bodyPr wrap="none">
+            <a:spAutoFit/>
+          </a:bodyPr>
+          <a:lstStyle/>
+          <a:p>
+            <a:r>
+              <a:rPr sz="3000" b="1">
                 <a:solidFill>
                   <a:srgbClr val="1A3C6C"/>
                 </a:solidFill>
                 <a:latin typeface="Calibri"/>
               </a:rPr>
-              <a:t>Building a Collaborative Culture</a:t>
-            </a:r>
-          </a:p>
-        </p:txBody>
-      </p:sp>
-      <p:sp>
-        <p:nvSpPr>
-          <p:cNvPr id="3" name="Content Placeholder 2"/>
-          <p:cNvSpPr>
-            <a:spLocks noGrp="1"/>
-          </p:cNvSpPr>
-          <p:nvPr>
-            <p:ph idx="1"/>
-          </p:nvPr>
-        </p:nvSpPr>
-        <p:spPr/>
-        <p:txBody>
-          <a:bodyPr/>
-          <a:lstStyle/>
-          <a:p>
-            <a:pPr>
-              <a:defRPr sz="2000">
-                <a:solidFill>
-                  <a:srgbClr val="333333"/>
-                </a:solidFill>
-                <a:latin typeface="Calibri"/>
-              </a:defRPr>
-            </a:pPr>
-            <a:r>
-              <a:t>Psychological safety: people can speak up, ask questions and admit mistakes without blame.</a:t>
-            </a:r>
-          </a:p>
-          <a:p>
-            <a:pPr>
-              <a:defRPr sz="2000">
-                <a:solidFill>
-                  <a:srgbClr val="333333"/>
-                </a:solidFill>
-                <a:latin typeface="Calibri"/>
-              </a:defRPr>
-            </a:pPr>
-            <a:r>
-              <a:t>Shared ownership: the whole team owns availability, security, cost and user outcomes.</a:t>
-            </a:r>
-          </a:p>
-          <a:p>
-            <a:pPr>
-              <a:defRPr sz="2000">
-                <a:solidFill>
-                  <a:srgbClr val="333333"/>
-                </a:solidFill>
-                <a:latin typeface="Calibri"/>
-              </a:defRPr>
-            </a:pPr>
-            <a:r>
-              <a:t>Westrum organisational culture predicts software delivery performance.</a:t>
-            </a:r>
-          </a:p>
-          <a:p>
-            <a:pPr>
-              <a:defRPr sz="2000">
-                <a:solidFill>
-                  <a:srgbClr val="333333"/>
-                </a:solidFill>
-                <a:latin typeface="Calibri"/>
-              </a:defRPr>
-            </a:pPr>
-            <a:r>
-              <a:t>High-trust environments learn faster and recover from incidents more quickly.</a:t>
-            </a:r>
-          </a:p>
-          <a:p>
-            <a:pPr>
-              <a:defRPr sz="2000">
-                <a:solidFill>
-                  <a:srgbClr val="333333"/>
-                </a:solidFill>
-                <a:latin typeface="Calibri"/>
-              </a:defRPr>
-            </a:pPr>
-            <a:r>
-              <a:t>Practical habits: blameless postmortems, pair/mob work, transparent metrics.</a:t>
+              <a:t>Your Lab Environment for These Two Days</a:t>
+            </a:r>
+          </a:p>
+        </p:txBody>
+      </p:sp>
+      <p:pic>
+        <p:nvPicPr>
+          <p:cNvPr id="4" name="Picture 3" descr="11-course-lab-topology.png"/>
+          <p:cNvPicPr>
+            <a:picLocks noChangeAspect="1"/>
+          </p:cNvPicPr>
+          <p:nvPr/>
+        </p:nvPicPr>
+        <p:blipFill>
+          <a:blip r:embed="rId2"/>
+          <a:stretch>
+            <a:fillRect/>
+          </a:stretch>
+        </p:blipFill>
+        <p:spPr>
+          <a:xfrm>
+            <a:off x="914400" y="1097280"/>
+            <a:ext cx="7315200" cy="4449635"/>
+          </a:xfrm>
+          <a:prstGeom prst="rect">
+            <a:avLst/>
+          </a:prstGeom>
+        </p:spPr>
+      </p:pic>
+      <p:sp>
+        <p:nvSpPr>
+          <p:cNvPr id="5" name="TextBox 4"/>
+          <p:cNvSpPr txBox="1"/>
+          <p:nvPr/>
+        </p:nvSpPr>
+        <p:spPr>
+          <a:xfrm>
+            <a:off x="457200" y="5943600"/>
+            <a:ext cx="8229600" cy="731520"/>
+          </a:xfrm>
+          <a:prstGeom prst="rect">
+            <a:avLst/>
+          </a:prstGeom>
+          <a:noFill/>
+        </p:spPr>
+        <p:txBody>
+          <a:bodyPr wrap="none">
+            <a:spAutoFit/>
+          </a:bodyPr>
+          <a:lstStyle/>
+          <a:p>
+            <a:pPr algn="ctr"/>
+            <a:r>
+              <a:rPr sz="1600" b="0">
+                <a:solidFill>
+                  <a:srgbClr val="333333"/>
+                </a:solidFill>
+                <a:latin typeface="Calibri"/>
+              </a:rPr>
+              <a:t>One Ubuntu 24.04 VM per participant - every lab runs on its localhost.</a:t>
             </a:r>
           </a:p>
         </p:txBody>
@@ -5779,132 +6704,6 @@
         <p:txBody>
           <a:bodyPr/>
           <a:lstStyle/>
-          <a:p>
-            <a:r>
-              <a:rPr sz="3200" b="1">
-                <a:solidFill>
-                  <a:srgbClr val="1A3C6C"/>
-                </a:solidFill>
-                <a:latin typeface="Calibri"/>
-              </a:rPr>
-              <a:t>Communication Strategies</a:t>
-            </a:r>
-          </a:p>
-        </p:txBody>
-      </p:sp>
-      <p:sp>
-        <p:nvSpPr>
-          <p:cNvPr id="3" name="Content Placeholder 2"/>
-          <p:cNvSpPr>
-            <a:spLocks noGrp="1"/>
-          </p:cNvSpPr>
-          <p:nvPr>
-            <p:ph idx="1"/>
-          </p:nvPr>
-        </p:nvSpPr>
-        <p:spPr/>
-        <p:txBody>
-          <a:bodyPr/>
-          <a:lstStyle/>
-          <a:p>
-            <a:pPr>
-              <a:defRPr sz="2000">
-                <a:solidFill>
-                  <a:srgbClr val="333333"/>
-                </a:solidFill>
-                <a:latin typeface="Calibri"/>
-              </a:defRPr>
-            </a:pPr>
-            <a:r>
-              <a:t>Align language: devs, ops, security and product should share goals, not jargon.</a:t>
-            </a:r>
-          </a:p>
-          <a:p>
-            <a:pPr>
-              <a:defRPr sz="2000">
-                <a:solidFill>
-                  <a:srgbClr val="333333"/>
-                </a:solidFill>
-                <a:latin typeface="Calibri"/>
-              </a:defRPr>
-            </a:pPr>
-            <a:r>
-              <a:t>Chat-ops and shared channels reduce ticket tennis and increase context.</a:t>
-            </a:r>
-          </a:p>
-          <a:p>
-            <a:pPr>
-              <a:defRPr sz="2000">
-                <a:solidFill>
-                  <a:srgbClr val="333333"/>
-                </a:solidFill>
-                <a:latin typeface="Calibri"/>
-              </a:defRPr>
-            </a:pPr>
-            <a:r>
-              <a:t>Document decisions in lightweight ADRs (Architecture Decision Records).</a:t>
-            </a:r>
-          </a:p>
-          <a:p>
-            <a:pPr>
-              <a:defRPr sz="2000">
-                <a:solidFill>
-                  <a:srgbClr val="333333"/>
-                </a:solidFill>
-                <a:latin typeface="Calibri"/>
-              </a:defRPr>
-            </a:pPr>
-            <a:r>
-              <a:t>Run regular ceremonies that include all disciplines: stand-ups, refinement, retros.</a:t>
-            </a:r>
-          </a:p>
-          <a:p>
-            <a:pPr>
-              <a:defRPr sz="2000">
-                <a:solidFill>
-                  <a:srgbClr val="333333"/>
-                </a:solidFill>
-                <a:latin typeface="Calibri"/>
-              </a:defRPr>
-            </a:pPr>
-            <a:r>
-              <a:t>Visible work: Kanban or boards that show flow across teams, not just inside teams.</a:t>
-            </a:r>
-          </a:p>
-        </p:txBody>
-      </p:sp>
-    </p:spTree>
-  </p:cSld>
-  <p:clrMapOvr>
-    <a:masterClrMapping/>
-  </p:clrMapOvr>
-</p:sld>
-</file>
-
-<file path=ppt/slides/slide12.xml><?xml version="1.0" encoding="utf-8"?>
-<p:sld xmlns:a="http://schemas.openxmlformats.org/drawingml/2006/main" xmlns:p="http://schemas.openxmlformats.org/presentationml/2006/main" xmlns:r="http://schemas.openxmlformats.org/officeDocument/2006/relationships">
-  <p:cSld>
-    <p:spTree>
-      <p:nvGrpSpPr>
-        <p:cNvPr id="1" name=""/>
-        <p:cNvGrpSpPr/>
-        <p:nvPr/>
-      </p:nvGrpSpPr>
-      <p:grpSpPr/>
-      <p:sp>
-        <p:nvSpPr>
-          <p:cNvPr id="2" name="Title 1"/>
-          <p:cNvSpPr>
-            <a:spLocks noGrp="1"/>
-          </p:cNvSpPr>
-          <p:nvPr>
-            <p:ph type="title"/>
-          </p:nvPr>
-        </p:nvSpPr>
-        <p:spPr/>
-        <p:txBody>
-          <a:bodyPr/>
-          <a:lstStyle/>
           <a:p/>
         </p:txBody>
       </p:sp>
@@ -5937,7 +6736,7 @@
                 </a:solidFill>
                 <a:latin typeface="Calibri"/>
               </a:rPr>
-              <a:t>Overcoming Silos</a:t>
+              <a:t>Module 1 - Key Takeaway</a:t>
             </a:r>
           </a:p>
         </p:txBody>
@@ -5950,8 +6749,8 @@
         </p:nvSpPr>
         <p:spPr>
           <a:xfrm>
-            <a:off x="457200" y="1188720"/>
-            <a:ext cx="3931920" cy="5029200"/>
+            <a:off x="914400" y="1828800"/>
+            <a:ext cx="7315200" cy="3200400"/>
           </a:xfrm>
           <a:prstGeom prst="rect">
             <a:avLst/>
@@ -5964,81 +6763,15 @@
           </a:bodyPr>
           <a:lstStyle/>
           <a:p>
-            <a:pPr>
-              <a:defRPr sz="1800">
-                <a:solidFill>
-                  <a:srgbClr val="333333"/>
-                </a:solidFill>
-                <a:latin typeface="Calibri"/>
-              </a:defRPr>
-            </a:pPr>
-            <a:r>
-              <a:t>Symptoms of silos:</a:t>
-            </a:r>
-          </a:p>
-          <a:p>
-            <a:pPr>
-              <a:defRPr sz="1800">
-                <a:solidFill>
-                  <a:srgbClr val="333333"/>
-                </a:solidFill>
-                <a:latin typeface="Calibri"/>
-              </a:defRPr>
-            </a:pPr>
-            <a:r>
-              <a:t>• Long hand-off queues</a:t>
-            </a:r>
-          </a:p>
-          <a:p>
-            <a:pPr>
-              <a:defRPr sz="1800">
-                <a:solidFill>
-                  <a:srgbClr val="333333"/>
-                </a:solidFill>
-                <a:latin typeface="Calibri"/>
-              </a:defRPr>
-            </a:pPr>
-            <a:r>
-              <a:t>• 'Works on my machine'</a:t>
-            </a:r>
-          </a:p>
-          <a:p>
-            <a:pPr>
-              <a:defRPr sz="1800">
-                <a:solidFill>
-                  <a:srgbClr val="333333"/>
-                </a:solidFill>
-                <a:latin typeface="Calibri"/>
-              </a:defRPr>
-            </a:pPr>
-            <a:r>
-              <a:t>• Separate blame cultures</a:t>
-            </a:r>
-          </a:p>
-          <a:p>
-            <a:pPr>
-              <a:defRPr sz="1800">
-                <a:solidFill>
-                  <a:srgbClr val="333333"/>
-                </a:solidFill>
-                <a:latin typeface="Calibri"/>
-              </a:defRPr>
-            </a:pPr>
-            <a:r>
-              <a:t>• Duplicated tooling</a:t>
-            </a:r>
-          </a:p>
-          <a:p>
-            <a:pPr>
-              <a:defRPr sz="1800">
-                <a:solidFill>
-                  <a:srgbClr val="333333"/>
-                </a:solidFill>
-                <a:latin typeface="Calibri"/>
-              </a:defRPr>
-            </a:pPr>
-            <a:r>
-              <a:t>• Slow incident response</a:t>
+            <a:pPr algn="ctr"/>
+            <a:r>
+              <a:rPr sz="2800" b="0">
+                <a:solidFill>
+                  <a:srgbClr val="4A90D9"/>
+                </a:solidFill>
+                <a:latin typeface="Calibri"/>
+              </a:rPr>
+              <a:t>"Platform engineering turns DevOps from a heroic individual effort into a repeatable, scalable organisational capability."</a:t>
             </a:r>
           </a:p>
         </p:txBody>
@@ -6051,8 +6784,8 @@
         </p:nvSpPr>
         <p:spPr>
           <a:xfrm>
-            <a:off x="4754880" y="1188720"/>
-            <a:ext cx="3931920" cy="5029200"/>
+            <a:off x="914400" y="5029200"/>
+            <a:ext cx="7315200" cy="731520"/>
           </a:xfrm>
           <a:prstGeom prst="rect">
             <a:avLst/>
@@ -6060,86 +6793,20 @@
           <a:noFill/>
         </p:spPr>
         <p:txBody>
-          <a:bodyPr wrap="square">
+          <a:bodyPr wrap="none">
             <a:spAutoFit/>
           </a:bodyPr>
           <a:lstStyle/>
           <a:p>
-            <a:pPr>
-              <a:defRPr sz="1800">
-                <a:solidFill>
-                  <a:srgbClr val="333333"/>
-                </a:solidFill>
-                <a:latin typeface="Calibri"/>
-              </a:defRPr>
-            </a:pPr>
-            <a:r>
-              <a:t>Antidotes:</a:t>
-            </a:r>
-          </a:p>
-          <a:p>
-            <a:pPr>
-              <a:defRPr sz="1800">
-                <a:solidFill>
-                  <a:srgbClr val="333333"/>
-                </a:solidFill>
-                <a:latin typeface="Calibri"/>
-              </a:defRPr>
-            </a:pPr>
-            <a:r>
-              <a:t>• Cross-functional teams</a:t>
-            </a:r>
-          </a:p>
-          <a:p>
-            <a:pPr>
-              <a:defRPr sz="1800">
-                <a:solidFill>
-                  <a:srgbClr val="333333"/>
-                </a:solidFill>
-                <a:latin typeface="Calibri"/>
-              </a:defRPr>
-            </a:pPr>
-            <a:r>
-              <a:t>• Shared on-call rotations</a:t>
-            </a:r>
-          </a:p>
-          <a:p>
-            <a:pPr>
-              <a:defRPr sz="1800">
-                <a:solidFill>
-                  <a:srgbClr val="333333"/>
-                </a:solidFill>
-                <a:latin typeface="Calibri"/>
-              </a:defRPr>
-            </a:pPr>
-            <a:r>
-              <a:t>• Common platforms and APIs</a:t>
-            </a:r>
-          </a:p>
-          <a:p>
-            <a:pPr>
-              <a:defRPr sz="1800">
-                <a:solidFill>
-                  <a:srgbClr val="333333"/>
-                </a:solidFill>
-                <a:latin typeface="Calibri"/>
-              </a:defRPr>
-            </a:pPr>
-            <a:r>
-              <a:t>• Joint OKRs across functions</a:t>
-            </a:r>
-          </a:p>
-          <a:p>
-            <a:pPr>
-              <a:defRPr sz="1800">
-                <a:solidFill>
-                  <a:srgbClr val="333333"/>
-                </a:solidFill>
-                <a:latin typeface="Calibri"/>
-              </a:defRPr>
-            </a:pPr>
-            <a:r>
-              <a:t>• Team Topologies patterns</a:t>
+            <a:pPr algn="r"/>
+            <a:r>
+              <a:rPr sz="1800" b="0">
+                <a:solidFill>
+                  <a:srgbClr val="333333"/>
+                </a:solidFill>
+                <a:latin typeface="Calibri"/>
+              </a:rPr>
+              <a:t>— Course synthesis</a:t>
             </a:r>
           </a:p>
         </p:txBody>
@@ -6152,135 +6819,7 @@
 </p:sld>
 </file>
 
-<file path=ppt/slides/slide13.xml><?xml version="1.0" encoding="utf-8"?>
-<p:sld xmlns:a="http://schemas.openxmlformats.org/drawingml/2006/main" xmlns:p="http://schemas.openxmlformats.org/presentationml/2006/main" xmlns:r="http://schemas.openxmlformats.org/officeDocument/2006/relationships">
-  <p:cSld>
-    <p:spTree>
-      <p:nvGrpSpPr>
-        <p:cNvPr id="1" name=""/>
-        <p:cNvGrpSpPr/>
-        <p:nvPr/>
-      </p:nvGrpSpPr>
-      <p:grpSpPr/>
-      <p:sp>
-        <p:nvSpPr>
-          <p:cNvPr id="2" name="Title 1"/>
-          <p:cNvSpPr>
-            <a:spLocks noGrp="1"/>
-          </p:cNvSpPr>
-          <p:nvPr>
-            <p:ph type="title"/>
-          </p:nvPr>
-        </p:nvSpPr>
-        <p:spPr/>
-        <p:txBody>
-          <a:bodyPr/>
-          <a:lstStyle/>
-          <a:p/>
-        </p:txBody>
-      </p:sp>
-      <p:sp>
-        <p:nvSpPr>
-          <p:cNvPr id="3" name="TextBox 2"/>
-          <p:cNvSpPr txBox="1"/>
-          <p:nvPr/>
-        </p:nvSpPr>
-        <p:spPr>
-          <a:xfrm>
-            <a:off x="457200" y="274320"/>
-            <a:ext cx="8229600" cy="731520"/>
-          </a:xfrm>
-          <a:prstGeom prst="rect">
-            <a:avLst/>
-          </a:prstGeom>
-          <a:noFill/>
-        </p:spPr>
-        <p:txBody>
-          <a:bodyPr wrap="none">
-            <a:spAutoFit/>
-          </a:bodyPr>
-          <a:lstStyle/>
-          <a:p>
-            <a:r>
-              <a:rPr sz="3000" b="1">
-                <a:solidFill>
-                  <a:srgbClr val="1A3C6C"/>
-                </a:solidFill>
-                <a:latin typeface="Calibri"/>
-              </a:rPr>
-              <a:t>Team Topologies</a:t>
-            </a:r>
-          </a:p>
-        </p:txBody>
-      </p:sp>
-      <p:pic>
-        <p:nvPicPr>
-          <p:cNvPr id="4" name="Picture 3" descr="09-team-topologies.png"/>
-          <p:cNvPicPr>
-            <a:picLocks noChangeAspect="1"/>
-          </p:cNvPicPr>
-          <p:nvPr/>
-        </p:nvPicPr>
-        <p:blipFill>
-          <a:blip r:embed="rId2"/>
-          <a:stretch>
-            <a:fillRect/>
-          </a:stretch>
-        </p:blipFill>
-        <p:spPr>
-          <a:xfrm>
-            <a:off x="914400" y="1097280"/>
-            <a:ext cx="7315200" cy="3985905"/>
-          </a:xfrm>
-          <a:prstGeom prst="rect">
-            <a:avLst/>
-          </a:prstGeom>
-        </p:spPr>
-      </p:pic>
-      <p:sp>
-        <p:nvSpPr>
-          <p:cNvPr id="5" name="TextBox 4"/>
-          <p:cNvSpPr txBox="1"/>
-          <p:nvPr/>
-        </p:nvSpPr>
-        <p:spPr>
-          <a:xfrm>
-            <a:off x="457200" y="5943600"/>
-            <a:ext cx="8229600" cy="731520"/>
-          </a:xfrm>
-          <a:prstGeom prst="rect">
-            <a:avLst/>
-          </a:prstGeom>
-          <a:noFill/>
-        </p:spPr>
-        <p:txBody>
-          <a:bodyPr wrap="none">
-            <a:spAutoFit/>
-          </a:bodyPr>
-          <a:lstStyle/>
-          <a:p>
-            <a:pPr algn="ctr"/>
-            <a:r>
-              <a:rPr sz="1600" b="0">
-                <a:solidFill>
-                  <a:srgbClr val="333333"/>
-                </a:solidFill>
-                <a:latin typeface="Calibri"/>
-              </a:rPr>
-              <a:t>Choose the right team type for the right problem.</a:t>
-            </a:r>
-          </a:p>
-        </p:txBody>
-      </p:sp>
-    </p:spTree>
-  </p:cSld>
-  <p:clrMapOvr>
-    <a:masterClrMapping/>
-  </p:clrMapOvr>
-</p:sld>
-</file>
-
-<file path=ppt/slides/slide14.xml><?xml version="1.0" encoding="utf-8"?>
+<file path=ppt/slides/slide12.xml><?xml version="1.0" encoding="utf-8"?>
 <p:sld xmlns:a="http://schemas.openxmlformats.org/drawingml/2006/main" xmlns:p="http://schemas.openxmlformats.org/presentationml/2006/main" xmlns:r="http://schemas.openxmlformats.org/officeDocument/2006/relationships">
   <p:cSld>
     <p:spTree>
@@ -6380,11 +6919,263 @@
                 </a:solidFill>
                 <a:latin typeface="Calibri"/>
               </a:rPr>
-              <a:t>Module 3</a:t>
+              <a:t>Module 2</a:t>
             </a:r>
             <a:br/>
             <a:r>
-              <a:t>Tools and Technologies</a:t>
+              <a:t>Culture and Collaboration</a:t>
+            </a:r>
+          </a:p>
+        </p:txBody>
+      </p:sp>
+    </p:spTree>
+  </p:cSld>
+  <p:clrMapOvr>
+    <a:masterClrMapping/>
+  </p:clrMapOvr>
+</p:sld>
+</file>
+
+<file path=ppt/slides/slide13.xml><?xml version="1.0" encoding="utf-8"?>
+<p:sld xmlns:a="http://schemas.openxmlformats.org/drawingml/2006/main" xmlns:p="http://schemas.openxmlformats.org/presentationml/2006/main" xmlns:r="http://schemas.openxmlformats.org/officeDocument/2006/relationships">
+  <p:cSld>
+    <p:spTree>
+      <p:nvGrpSpPr>
+        <p:cNvPr id="1" name=""/>
+        <p:cNvGrpSpPr/>
+        <p:nvPr/>
+      </p:nvGrpSpPr>
+      <p:grpSpPr/>
+      <p:sp>
+        <p:nvSpPr>
+          <p:cNvPr id="2" name="Title 1"/>
+          <p:cNvSpPr>
+            <a:spLocks noGrp="1"/>
+          </p:cNvSpPr>
+          <p:nvPr>
+            <p:ph type="title"/>
+          </p:nvPr>
+        </p:nvSpPr>
+        <p:spPr/>
+        <p:txBody>
+          <a:bodyPr/>
+          <a:lstStyle/>
+          <a:p>
+            <a:r>
+              <a:rPr sz="3200" b="1">
+                <a:solidFill>
+                  <a:srgbClr val="1A3C6C"/>
+                </a:solidFill>
+                <a:latin typeface="Calibri"/>
+              </a:rPr>
+              <a:t>Culture Is Measurable: the Westrum Typology</a:t>
+            </a:r>
+          </a:p>
+        </p:txBody>
+      </p:sp>
+      <p:sp>
+        <p:nvSpPr>
+          <p:cNvPr id="3" name="Content Placeholder 2"/>
+          <p:cNvSpPr>
+            <a:spLocks noGrp="1"/>
+          </p:cNvSpPr>
+          <p:nvPr>
+            <p:ph idx="1"/>
+          </p:nvPr>
+        </p:nvSpPr>
+        <p:spPr/>
+        <p:txBody>
+          <a:bodyPr/>
+          <a:lstStyle/>
+          <a:p>
+            <a:pPr>
+              <a:defRPr sz="1900">
+                <a:solidFill>
+                  <a:srgbClr val="333333"/>
+                </a:solidFill>
+                <a:latin typeface="Calibri"/>
+              </a:defRPr>
+            </a:pPr>
+            <a:r>
+              <a:t>PATHOLOGICAL (power-oriented): info hoarded, messengers shot, failure -&gt; scapegoating.</a:t>
+            </a:r>
+          </a:p>
+          <a:p>
+            <a:pPr>
+              <a:defRPr sz="1900">
+                <a:solidFill>
+                  <a:srgbClr val="333333"/>
+                </a:solidFill>
+                <a:latin typeface="Calibri"/>
+              </a:defRPr>
+            </a:pPr>
+            <a:r>
+              <a:t>BUREAUCRATIC (rule-oriented): info flows in channels, failure -&gt; process and blame-shifting.</a:t>
+            </a:r>
+          </a:p>
+          <a:p>
+            <a:pPr>
+              <a:defRPr sz="1900">
+                <a:solidFill>
+                  <a:srgbClr val="333333"/>
+                </a:solidFill>
+                <a:latin typeface="Calibri"/>
+              </a:defRPr>
+            </a:pPr>
+            <a:r>
+              <a:t>GENERATIVE (performance-oriented): info flows freely, failure -&gt; inquiry and learning.</a:t>
+            </a:r>
+          </a:p>
+          <a:p>
+            <a:pPr>
+              <a:defRPr sz="1900">
+                <a:solidFill>
+                  <a:srgbClr val="333333"/>
+                </a:solidFill>
+                <a:latin typeface="Calibri"/>
+              </a:defRPr>
+            </a:pPr>
+            <a:r>
+              <a:t>DORA research: generative culture statistically predicts software delivery performance.</a:t>
+            </a:r>
+          </a:p>
+          <a:p>
+            <a:pPr>
+              <a:defRPr sz="1900">
+                <a:solidFill>
+                  <a:srgbClr val="333333"/>
+                </a:solidFill>
+                <a:latin typeface="Calibri"/>
+              </a:defRPr>
+            </a:pPr>
+            <a:r>
+              <a:t>Culture is how the organisation responds to BAD NEWS.</a:t>
+            </a:r>
+          </a:p>
+        </p:txBody>
+      </p:sp>
+    </p:spTree>
+  </p:cSld>
+  <p:clrMapOvr>
+    <a:masterClrMapping/>
+  </p:clrMapOvr>
+</p:sld>
+</file>
+
+<file path=ppt/slides/slide14.xml><?xml version="1.0" encoding="utf-8"?>
+<p:sld xmlns:a="http://schemas.openxmlformats.org/drawingml/2006/main" xmlns:p="http://schemas.openxmlformats.org/presentationml/2006/main" xmlns:r="http://schemas.openxmlformats.org/officeDocument/2006/relationships">
+  <p:cSld>
+    <p:spTree>
+      <p:nvGrpSpPr>
+        <p:cNvPr id="1" name=""/>
+        <p:cNvGrpSpPr/>
+        <p:nvPr/>
+      </p:nvGrpSpPr>
+      <p:grpSpPr/>
+      <p:sp>
+        <p:nvSpPr>
+          <p:cNvPr id="2" name="Title 1"/>
+          <p:cNvSpPr>
+            <a:spLocks noGrp="1"/>
+          </p:cNvSpPr>
+          <p:nvPr>
+            <p:ph type="title"/>
+          </p:nvPr>
+        </p:nvSpPr>
+        <p:spPr/>
+        <p:txBody>
+          <a:bodyPr/>
+          <a:lstStyle/>
+          <a:p>
+            <a:r>
+              <a:rPr sz="3200" b="1">
+                <a:solidFill>
+                  <a:srgbClr val="1A3C6C"/>
+                </a:solidFill>
+                <a:latin typeface="Calibri"/>
+              </a:rPr>
+              <a:t>Psychological Safety - the Foundation Layer</a:t>
+            </a:r>
+          </a:p>
+        </p:txBody>
+      </p:sp>
+      <p:sp>
+        <p:nvSpPr>
+          <p:cNvPr id="3" name="Content Placeholder 2"/>
+          <p:cNvSpPr>
+            <a:spLocks noGrp="1"/>
+          </p:cNvSpPr>
+          <p:nvPr>
+            <p:ph idx="1"/>
+          </p:nvPr>
+        </p:nvSpPr>
+        <p:spPr/>
+        <p:txBody>
+          <a:bodyPr/>
+          <a:lstStyle/>
+          <a:p>
+            <a:pPr>
+              <a:defRPr sz="1900">
+                <a:solidFill>
+                  <a:srgbClr val="333333"/>
+                </a:solidFill>
+                <a:latin typeface="Calibri"/>
+              </a:defRPr>
+            </a:pPr>
+            <a:r>
+              <a:t>Definition (Amy Edmondson): belief that the team is safe for interpersonal risk-taking.</a:t>
+            </a:r>
+          </a:p>
+          <a:p>
+            <a:pPr>
+              <a:defRPr sz="1900">
+                <a:solidFill>
+                  <a:srgbClr val="333333"/>
+                </a:solidFill>
+                <a:latin typeface="Calibri"/>
+              </a:defRPr>
+            </a:pPr>
+            <a:r>
+              <a:t>Google's Project Aristotle: THE top factor distinguishing effective teams.</a:t>
+            </a:r>
+          </a:p>
+          <a:p>
+            <a:pPr>
+              <a:defRPr sz="1900">
+                <a:solidFill>
+                  <a:srgbClr val="333333"/>
+                </a:solidFill>
+                <a:latin typeface="Calibri"/>
+              </a:defRPr>
+            </a:pPr>
+            <a:r>
+              <a:t>Safe teams surface problems earlier - which looks like MORE errors, and is actually fewer.</a:t>
+            </a:r>
+          </a:p>
+          <a:p>
+            <a:pPr>
+              <a:defRPr sz="1900">
+                <a:solidFill>
+                  <a:srgbClr val="333333"/>
+                </a:solidFill>
+                <a:latin typeface="Calibri"/>
+              </a:defRPr>
+            </a:pPr>
+            <a:r>
+              <a:t>Built in small moments: how leaders react to questions, dissent, and mistakes.</a:t>
+            </a:r>
+          </a:p>
+          <a:p>
+            <a:pPr>
+              <a:defRPr sz="1900">
+                <a:solidFill>
+                  <a:srgbClr val="333333"/>
+                </a:solidFill>
+                <a:latin typeface="Calibri"/>
+              </a:defRPr>
+            </a:pPr>
+            <a:r>
+              <a:t>Prerequisite for: honest code review, real postmortems, accurate estimates, on-call health.</a:t>
             </a:r>
           </a:p>
         </p:txBody>
@@ -6429,7 +7220,7 @@
                 </a:solidFill>
                 <a:latin typeface="Calibri"/>
               </a:rPr>
-              <a:t>Essential Tool Categories</a:t>
+              <a:t>Conway's Law - Architecture Mirrors Communication</a:t>
             </a:r>
           </a:p>
         </p:txBody>
@@ -6450,67 +7241,67 @@
           <a:lstStyle/>
           <a:p>
             <a:pPr>
-              <a:defRPr sz="2000">
-                <a:solidFill>
-                  <a:srgbClr val="333333"/>
-                </a:solidFill>
-                <a:latin typeface="Calibri"/>
-              </a:defRPr>
-            </a:pPr>
-            <a:r>
-              <a:t>Source control: Git, GitHub, GitLab, Bitbucket — the single source of truth.</a:t>
-            </a:r>
-          </a:p>
-          <a:p>
-            <a:pPr>
-              <a:defRPr sz="2000">
-                <a:solidFill>
-                  <a:srgbClr val="333333"/>
-                </a:solidFill>
-                <a:latin typeface="Calibri"/>
-              </a:defRPr>
-            </a:pPr>
-            <a:r>
-              <a:t>CI/CD: GitHub Actions, GitLab CI, Azure DevOps, Jenkins, CircleCI, Argo Workflows.</a:t>
-            </a:r>
-          </a:p>
-          <a:p>
-            <a:pPr>
-              <a:defRPr sz="2000">
-                <a:solidFill>
-                  <a:srgbClr val="333333"/>
-                </a:solidFill>
-                <a:latin typeface="Calibri"/>
-              </a:defRPr>
-            </a:pPr>
-            <a:r>
-              <a:t>IaC: Terraform, Pulumi, Ansible, CloudFormation, ARM/Bicep.</a:t>
-            </a:r>
-          </a:p>
-          <a:p>
-            <a:pPr>
-              <a:defRPr sz="2000">
-                <a:solidFill>
-                  <a:srgbClr val="333333"/>
-                </a:solidFill>
-                <a:latin typeface="Calibri"/>
-              </a:defRPr>
-            </a:pPr>
-            <a:r>
-              <a:t>Containers &amp; orchestration: Docker, containerd, Kubernetes, Helm.</a:t>
-            </a:r>
-          </a:p>
-          <a:p>
-            <a:pPr>
-              <a:defRPr sz="2000">
-                <a:solidFill>
-                  <a:srgbClr val="333333"/>
-                </a:solidFill>
-                <a:latin typeface="Calibri"/>
-              </a:defRPr>
-            </a:pPr>
-            <a:r>
-              <a:t>Observability: Prometheus, Grafana, Datadog, Honeycomb, Jaeger, ELK/Loki.</a:t>
+              <a:defRPr sz="1900">
+                <a:solidFill>
+                  <a:srgbClr val="333333"/>
+                </a:solidFill>
+                <a:latin typeface="Calibri"/>
+              </a:defRPr>
+            </a:pPr>
+            <a:r>
+              <a:t>'Organisations design systems that mirror their own communication structures' (1968).</a:t>
+            </a:r>
+          </a:p>
+          <a:p>
+            <a:pPr>
+              <a:defRPr sz="1900">
+                <a:solidFill>
+                  <a:srgbClr val="333333"/>
+                </a:solidFill>
+                <a:latin typeface="Calibri"/>
+              </a:defRPr>
+            </a:pPr>
+            <a:r>
+              <a:t>Four teams building a compiler produced... a four-pass compiler.</a:t>
+            </a:r>
+          </a:p>
+          <a:p>
+            <a:pPr>
+              <a:defRPr sz="1900">
+                <a:solidFill>
+                  <a:srgbClr val="333333"/>
+                </a:solidFill>
+                <a:latin typeface="Calibri"/>
+              </a:defRPr>
+            </a:pPr>
+            <a:r>
+              <a:t>Silos in the org chart become seams, queues and outages in the architecture.</a:t>
+            </a:r>
+          </a:p>
+          <a:p>
+            <a:pPr>
+              <a:defRPr sz="1900">
+                <a:solidFill>
+                  <a:srgbClr val="333333"/>
+                </a:solidFill>
+                <a:latin typeface="Calibri"/>
+              </a:defRPr>
+            </a:pPr>
+            <a:r>
+              <a:t>REVERSE CONWAY MANEUVER: shape teams to match the architecture you WANT.</a:t>
+            </a:r>
+          </a:p>
+          <a:p>
+            <a:pPr>
+              <a:defRPr sz="1900">
+                <a:solidFill>
+                  <a:srgbClr val="333333"/>
+                </a:solidFill>
+                <a:latin typeface="Calibri"/>
+              </a:defRPr>
+            </a:pPr>
+            <a:r>
+              <a:t>This is why microservices without team ownership changes always disappoint.</a:t>
             </a:r>
           </a:p>
         </p:txBody>
@@ -6555,7 +7346,7 @@
                 </a:solidFill>
                 <a:latin typeface="Calibri"/>
               </a:rPr>
-              <a:t>Automation and Orchestration</a:t>
+              <a:t>Communication Strategies That Scale</a:t>
             </a:r>
           </a:p>
         </p:txBody>
@@ -6576,67 +7367,67 @@
           <a:lstStyle/>
           <a:p>
             <a:pPr>
-              <a:defRPr sz="2000">
-                <a:solidFill>
-                  <a:srgbClr val="333333"/>
-                </a:solidFill>
-                <a:latin typeface="Calibri"/>
-              </a:defRPr>
-            </a:pPr>
-            <a:r>
-              <a:t>Automate what is repeated, error-prone or slows flow: builds, tests, deployments, provisioning.</a:t>
-            </a:r>
-          </a:p>
-          <a:p>
-            <a:pPr>
-              <a:defRPr sz="2000">
-                <a:solidFill>
-                  <a:srgbClr val="333333"/>
-                </a:solidFill>
-                <a:latin typeface="Calibri"/>
-              </a:defRPr>
-            </a:pPr>
-            <a:r>
-              <a:t>Orchestration coordinates multiple automated tasks across systems and teams.</a:t>
-            </a:r>
-          </a:p>
-          <a:p>
-            <a:pPr>
-              <a:defRPr sz="2000">
-                <a:solidFill>
-                  <a:srgbClr val="333333"/>
-                </a:solidFill>
-                <a:latin typeface="Calibri"/>
-              </a:defRPr>
-            </a:pPr>
-            <a:r>
-              <a:t>Workflow engines (e.g. Argo, Airflow) handle complex, event-driven pipelines.</a:t>
-            </a:r>
-          </a:p>
-          <a:p>
-            <a:pPr>
-              <a:defRPr sz="2000">
-                <a:solidFill>
-                  <a:srgbClr val="333333"/>
-                </a:solidFill>
-                <a:latin typeface="Calibri"/>
-              </a:defRPr>
-            </a:pPr>
-            <a:r>
-              <a:t>Idempotency matters: running the same automation twice should converge to the same state.</a:t>
-            </a:r>
-          </a:p>
-          <a:p>
-            <a:pPr>
-              <a:defRPr sz="2000">
-                <a:solidFill>
-                  <a:srgbClr val="333333"/>
-                </a:solidFill>
-                <a:latin typeface="Calibri"/>
-              </a:defRPr>
-            </a:pPr>
-            <a:r>
-              <a:t>Start with versioned scripts, evolve to declarative platforms, add guard rails.</a:t>
+              <a:defRPr sz="1900">
+                <a:solidFill>
+                  <a:srgbClr val="333333"/>
+                </a:solidFill>
+                <a:latin typeface="Calibri"/>
+              </a:defRPr>
+            </a:pPr>
+            <a:r>
+              <a:t>Default to asynchronous + written: decisions travel and survive; meetings do not.</a:t>
+            </a:r>
+          </a:p>
+          <a:p>
+            <a:pPr>
+              <a:defRPr sz="1900">
+                <a:solidFill>
+                  <a:srgbClr val="333333"/>
+                </a:solidFill>
+                <a:latin typeface="Calibri"/>
+              </a:defRPr>
+            </a:pPr>
+            <a:r>
+              <a:t>ADRs (Architecture Decision Records): short docs capturing WHAT was decided and WHY.</a:t>
+            </a:r>
+          </a:p>
+          <a:p>
+            <a:pPr>
+              <a:defRPr sz="1900">
+                <a:solidFill>
+                  <a:srgbClr val="333333"/>
+                </a:solidFill>
+                <a:latin typeface="Calibri"/>
+              </a:defRPr>
+            </a:pPr>
+            <a:r>
+              <a:t>ChatOps: operations in shared channels - deploys, alerts, incident timelines visible to all.</a:t>
+            </a:r>
+          </a:p>
+          <a:p>
+            <a:pPr>
+              <a:defRPr sz="1900">
+                <a:solidFill>
+                  <a:srgbClr val="333333"/>
+                </a:solidFill>
+                <a:latin typeface="Calibri"/>
+              </a:defRPr>
+            </a:pPr>
+            <a:r>
+              <a:t>Working agreements: explicit team norms (review turnaround, on-call handoff, WIP limits).</a:t>
+            </a:r>
+          </a:p>
+          <a:p>
+            <a:pPr>
+              <a:defRPr sz="1900">
+                <a:solidFill>
+                  <a:srgbClr val="333333"/>
+                </a:solidFill>
+                <a:latin typeface="Calibri"/>
+              </a:defRPr>
+            </a:pPr>
+            <a:r>
+              <a:t>Documentation is a product: if the platform's docs are bad, the platform is bad.</a:t>
             </a:r>
           </a:p>
         </p:txBody>
@@ -6681,7 +7472,7 @@
                 </a:solidFill>
                 <a:latin typeface="Calibri"/>
               </a:rPr>
-              <a:t>Monitoring &amp; Analytics for Continuous Improvement</a:t>
+              <a:t>Breaking Silos Without Breaking the Org</a:t>
             </a:r>
           </a:p>
         </p:txBody>
@@ -6702,67 +7493,67 @@
           <a:lstStyle/>
           <a:p>
             <a:pPr>
-              <a:defRPr sz="2000">
-                <a:solidFill>
-                  <a:srgbClr val="333333"/>
-                </a:solidFill>
-                <a:latin typeface="Calibri"/>
-              </a:defRPr>
-            </a:pPr>
-            <a:r>
-              <a:t>DORA metrics: deployment frequency, lead time, change failure rate, MTTR.</a:t>
-            </a:r>
-          </a:p>
-          <a:p>
-            <a:pPr>
-              <a:defRPr sz="2000">
-                <a:solidFill>
-                  <a:srgbClr val="333333"/>
-                </a:solidFill>
-                <a:latin typeface="Calibri"/>
-              </a:defRPr>
-            </a:pPr>
-            <a:r>
-              <a:t>Platform engineering adds platform adoption, developer satisfaction and self-serve metrics.</a:t>
-            </a:r>
-          </a:p>
-          <a:p>
-            <a:pPr>
-              <a:defRPr sz="2000">
-                <a:solidFill>
-                  <a:srgbClr val="333333"/>
-                </a:solidFill>
-                <a:latin typeface="Calibri"/>
-              </a:defRPr>
-            </a:pPr>
-            <a:r>
-              <a:t>Use metrics to prioritise work, not to punish people.</a:t>
-            </a:r>
-          </a:p>
-          <a:p>
-            <a:pPr>
-              <a:defRPr sz="2000">
-                <a:solidFill>
-                  <a:srgbClr val="333333"/>
-                </a:solidFill>
-                <a:latin typeface="Calibri"/>
-              </a:defRPr>
-            </a:pPr>
-            <a:r>
-              <a:t>Dashboards should lead to action: alerts need runbooks, trends need owners.</a:t>
-            </a:r>
-          </a:p>
-          <a:p>
-            <a:pPr>
-              <a:defRPr sz="2000">
-                <a:solidFill>
-                  <a:srgbClr val="333333"/>
-                </a:solidFill>
-                <a:latin typeface="Calibri"/>
-              </a:defRPr>
-            </a:pPr>
-            <a:r>
-              <a:t>Continuous improvement = measure, hypothesise, experiment, learn.</a:t>
+              <a:defRPr sz="1900">
+                <a:solidFill>
+                  <a:srgbClr val="333333"/>
+                </a:solidFill>
+                <a:latin typeface="Calibri"/>
+              </a:defRPr>
+            </a:pPr>
+            <a:r>
+              <a:t>Shared goals: measure Dev AND Ops on the same outcomes (DORA metrics, SLOs).</a:t>
+            </a:r>
+          </a:p>
+          <a:p>
+            <a:pPr>
+              <a:defRPr sz="1900">
+                <a:solidFill>
+                  <a:srgbClr val="333333"/>
+                </a:solidFill>
+                <a:latin typeface="Calibri"/>
+              </a:defRPr>
+            </a:pPr>
+            <a:r>
+              <a:t>Shared pain: developers join on-call for their own services - feedback with teeth.</a:t>
+            </a:r>
+          </a:p>
+          <a:p>
+            <a:pPr>
+              <a:defRPr sz="1900">
+                <a:solidFill>
+                  <a:srgbClr val="333333"/>
+                </a:solidFill>
+                <a:latin typeface="Calibri"/>
+              </a:defRPr>
+            </a:pPr>
+            <a:r>
+              <a:t>Embedded rotation: ops engineers embed in product teams temporarily (enabling pattern).</a:t>
+            </a:r>
+          </a:p>
+          <a:p>
+            <a:pPr>
+              <a:defRPr sz="1900">
+                <a:solidFill>
+                  <a:srgbClr val="333333"/>
+                </a:solidFill>
+                <a:latin typeface="Calibri"/>
+              </a:defRPr>
+            </a:pPr>
+            <a:r>
+              <a:t>Internal open source: any team may propose PRs to another team's repo - platform included.</a:t>
+            </a:r>
+          </a:p>
+          <a:p>
+            <a:pPr>
+              <a:defRPr sz="1900">
+                <a:solidFill>
+                  <a:srgbClr val="333333"/>
+                </a:solidFill>
+                <a:latin typeface="Calibri"/>
+              </a:defRPr>
+            </a:pPr>
+            <a:r>
+              <a:t>Do NOT create a 'DevOps team' silo between Dev and Ops - it recreates the wall.</a:t>
             </a:r>
           </a:p>
         </p:txBody>
@@ -6776,6 +7567,260 @@
 </file>
 
 <file path=ppt/slides/slide18.xml><?xml version="1.0" encoding="utf-8"?>
+<p:sld xmlns:a="http://schemas.openxmlformats.org/drawingml/2006/main" xmlns:p="http://schemas.openxmlformats.org/presentationml/2006/main" xmlns:r="http://schemas.openxmlformats.org/officeDocument/2006/relationships">
+  <p:cSld>
+    <p:spTree>
+      <p:nvGrpSpPr>
+        <p:cNvPr id="1" name=""/>
+        <p:cNvGrpSpPr/>
+        <p:nvPr/>
+      </p:nvGrpSpPr>
+      <p:grpSpPr/>
+      <p:sp>
+        <p:nvSpPr>
+          <p:cNvPr id="2" name="Title 1"/>
+          <p:cNvSpPr>
+            <a:spLocks noGrp="1"/>
+          </p:cNvSpPr>
+          <p:nvPr>
+            <p:ph type="title"/>
+          </p:nvPr>
+        </p:nvSpPr>
+        <p:spPr/>
+        <p:txBody>
+          <a:bodyPr/>
+          <a:lstStyle/>
+          <a:p/>
+        </p:txBody>
+      </p:sp>
+      <p:sp>
+        <p:nvSpPr>
+          <p:cNvPr id="3" name="TextBox 2"/>
+          <p:cNvSpPr txBox="1"/>
+          <p:nvPr/>
+        </p:nvSpPr>
+        <p:spPr>
+          <a:xfrm>
+            <a:off x="457200" y="274320"/>
+            <a:ext cx="8229600" cy="731520"/>
+          </a:xfrm>
+          <a:prstGeom prst="rect">
+            <a:avLst/>
+          </a:prstGeom>
+          <a:noFill/>
+        </p:spPr>
+        <p:txBody>
+          <a:bodyPr wrap="none">
+            <a:spAutoFit/>
+          </a:bodyPr>
+          <a:lstStyle/>
+          <a:p>
+            <a:r>
+              <a:rPr sz="3000" b="1">
+                <a:solidFill>
+                  <a:srgbClr val="1A3C6C"/>
+                </a:solidFill>
+                <a:latin typeface="Calibri"/>
+              </a:rPr>
+              <a:t>Team Topologies - Organising for Flow</a:t>
+            </a:r>
+          </a:p>
+        </p:txBody>
+      </p:sp>
+      <p:pic>
+        <p:nvPicPr>
+          <p:cNvPr id="4" name="Picture 3" descr="09-team-topologies.png"/>
+          <p:cNvPicPr>
+            <a:picLocks noChangeAspect="1"/>
+          </p:cNvPicPr>
+          <p:nvPr/>
+        </p:nvPicPr>
+        <p:blipFill>
+          <a:blip r:embed="rId2"/>
+          <a:stretch>
+            <a:fillRect/>
+          </a:stretch>
+        </p:blipFill>
+        <p:spPr>
+          <a:xfrm>
+            <a:off x="914400" y="1097280"/>
+            <a:ext cx="7315200" cy="3985905"/>
+          </a:xfrm>
+          <a:prstGeom prst="rect">
+            <a:avLst/>
+          </a:prstGeom>
+        </p:spPr>
+      </p:pic>
+      <p:sp>
+        <p:nvSpPr>
+          <p:cNvPr id="5" name="TextBox 4"/>
+          <p:cNvSpPr txBox="1"/>
+          <p:nvPr/>
+        </p:nvSpPr>
+        <p:spPr>
+          <a:xfrm>
+            <a:off x="457200" y="5943600"/>
+            <a:ext cx="8229600" cy="731520"/>
+          </a:xfrm>
+          <a:prstGeom prst="rect">
+            <a:avLst/>
+          </a:prstGeom>
+          <a:noFill/>
+        </p:spPr>
+        <p:txBody>
+          <a:bodyPr wrap="none">
+            <a:spAutoFit/>
+          </a:bodyPr>
+          <a:lstStyle/>
+          <a:p>
+            <a:pPr algn="ctr"/>
+            <a:r>
+              <a:rPr sz="1600" b="0">
+                <a:solidFill>
+                  <a:srgbClr val="333333"/>
+                </a:solidFill>
+                <a:latin typeface="Calibri"/>
+              </a:rPr>
+              <a:t>Four team types, three interaction modes (Skelton &amp; Pais).</a:t>
+            </a:r>
+          </a:p>
+        </p:txBody>
+      </p:sp>
+    </p:spTree>
+  </p:cSld>
+  <p:clrMapOvr>
+    <a:masterClrMapping/>
+  </p:clrMapOvr>
+</p:sld>
+</file>
+
+<file path=ppt/slides/slide19.xml><?xml version="1.0" encoding="utf-8"?>
+<p:sld xmlns:a="http://schemas.openxmlformats.org/drawingml/2006/main" xmlns:p="http://schemas.openxmlformats.org/presentationml/2006/main" xmlns:r="http://schemas.openxmlformats.org/officeDocument/2006/relationships">
+  <p:cSld>
+    <p:spTree>
+      <p:nvGrpSpPr>
+        <p:cNvPr id="1" name=""/>
+        <p:cNvGrpSpPr/>
+        <p:nvPr/>
+      </p:nvGrpSpPr>
+      <p:grpSpPr/>
+      <p:sp>
+        <p:nvSpPr>
+          <p:cNvPr id="2" name="Title 1"/>
+          <p:cNvSpPr>
+            <a:spLocks noGrp="1"/>
+          </p:cNvSpPr>
+          <p:nvPr>
+            <p:ph type="title"/>
+          </p:nvPr>
+        </p:nvSpPr>
+        <p:spPr/>
+        <p:txBody>
+          <a:bodyPr/>
+          <a:lstStyle/>
+          <a:p>
+            <a:r>
+              <a:rPr sz="3200" b="1">
+                <a:solidFill>
+                  <a:srgbClr val="1A3C6C"/>
+                </a:solidFill>
+                <a:latin typeface="Calibri"/>
+              </a:rPr>
+              <a:t>Blameless Postmortems and Retrospectives</a:t>
+            </a:r>
+          </a:p>
+        </p:txBody>
+      </p:sp>
+      <p:sp>
+        <p:nvSpPr>
+          <p:cNvPr id="3" name="Content Placeholder 2"/>
+          <p:cNvSpPr>
+            <a:spLocks noGrp="1"/>
+          </p:cNvSpPr>
+          <p:nvPr>
+            <p:ph idx="1"/>
+          </p:nvPr>
+        </p:nvSpPr>
+        <p:spPr/>
+        <p:txBody>
+          <a:bodyPr/>
+          <a:lstStyle/>
+          <a:p>
+            <a:pPr>
+              <a:defRPr sz="1900">
+                <a:solidFill>
+                  <a:srgbClr val="333333"/>
+                </a:solidFill>
+                <a:latin typeface="Calibri"/>
+              </a:defRPr>
+            </a:pPr>
+            <a:r>
+              <a:t>Premise: people made reasonable decisions given the information they had at the time.</a:t>
+            </a:r>
+          </a:p>
+          <a:p>
+            <a:pPr>
+              <a:defRPr sz="1900">
+                <a:solidFill>
+                  <a:srgbClr val="333333"/>
+                </a:solidFill>
+                <a:latin typeface="Calibri"/>
+              </a:defRPr>
+            </a:pPr>
+            <a:r>
+              <a:t>Ask 'what made that action seem correct?' - never 'who did it?'</a:t>
+            </a:r>
+          </a:p>
+          <a:p>
+            <a:pPr>
+              <a:defRPr sz="1900">
+                <a:solidFill>
+                  <a:srgbClr val="333333"/>
+                </a:solidFill>
+                <a:latin typeface="Calibri"/>
+              </a:defRPr>
+            </a:pPr>
+            <a:r>
+              <a:t>Counterfactuals ('should have', 'could have') are banned - they explain nothing.</a:t>
+            </a:r>
+          </a:p>
+          <a:p>
+            <a:pPr>
+              <a:defRPr sz="1900">
+                <a:solidFill>
+                  <a:srgbClr val="333333"/>
+                </a:solidFill>
+                <a:latin typeface="Calibri"/>
+              </a:defRPr>
+            </a:pPr>
+            <a:r>
+              <a:t>Output: systemic action items with owners and dates, tracked like feature work.</a:t>
+            </a:r>
+          </a:p>
+          <a:p>
+            <a:pPr>
+              <a:defRPr sz="1900">
+                <a:solidFill>
+                  <a:srgbClr val="333333"/>
+                </a:solidFill>
+                <a:latin typeface="Calibri"/>
+              </a:defRPr>
+            </a:pPr>
+            <a:r>
+              <a:t>Retrospectives are the same loop at team cadence - improvement as a habit, not an event.</a:t>
+            </a:r>
+          </a:p>
+        </p:txBody>
+      </p:sp>
+    </p:spTree>
+  </p:cSld>
+  <p:clrMapOvr>
+    <a:masterClrMapping/>
+  </p:clrMapOvr>
+</p:sld>
+</file>
+
+<file path=ppt/slides/slide2.xml><?xml version="1.0" encoding="utf-8"?>
 <p:sld xmlns:a="http://schemas.openxmlformats.org/drawingml/2006/main" xmlns:p="http://schemas.openxmlformats.org/presentationml/2006/main" xmlns:r="http://schemas.openxmlformats.org/officeDocument/2006/relationships">
   <p:cSld>
     <p:spTree>
@@ -6875,11 +7920,11 @@
                 </a:solidFill>
                 <a:latin typeface="Calibri"/>
               </a:rPr>
-              <a:t>Module 4</a:t>
+              <a:t>Module 1</a:t>
             </a:r>
             <a:br/>
             <a:r>
-              <a:t>Infrastructure as Code (IaC)</a:t>
+              <a:t>Introduction to DevOps and Platform Engineering</a:t>
             </a:r>
           </a:p>
         </p:txBody>
@@ -6892,7 +7937,7 @@
 </p:sld>
 </file>
 
-<file path=ppt/slides/slide19.xml><?xml version="1.0" encoding="utf-8"?>
+<file path=ppt/slides/slide20.xml><?xml version="1.0" encoding="utf-8"?>
 <p:sld xmlns:a="http://schemas.openxmlformats.org/drawingml/2006/main" xmlns:p="http://schemas.openxmlformats.org/presentationml/2006/main" xmlns:r="http://schemas.openxmlformats.org/officeDocument/2006/relationships">
   <p:cSld>
     <p:spTree>
@@ -6916,6 +7961,30 @@
         <p:txBody>
           <a:bodyPr/>
           <a:lstStyle/>
+          <a:p/>
+        </p:txBody>
+      </p:sp>
+      <p:sp>
+        <p:nvSpPr>
+          <p:cNvPr id="3" name="TextBox 2"/>
+          <p:cNvSpPr txBox="1"/>
+          <p:nvPr/>
+        </p:nvSpPr>
+        <p:spPr>
+          <a:xfrm>
+            <a:off x="457200" y="274320"/>
+            <a:ext cx="8229600" cy="731520"/>
+          </a:xfrm>
+          <a:prstGeom prst="rect">
+            <a:avLst/>
+          </a:prstGeom>
+          <a:noFill/>
+        </p:spPr>
+        <p:txBody>
+          <a:bodyPr wrap="none">
+            <a:spAutoFit/>
+          </a:bodyPr>
+          <a:lstStyle/>
           <a:p>
             <a:r>
               <a:rPr sz="3200" b="1">
@@ -6924,88 +7993,77 @@
                 </a:solidFill>
                 <a:latin typeface="Calibri"/>
               </a:rPr>
-              <a:t>Principles of IaC</a:t>
-            </a:r>
-          </a:p>
-        </p:txBody>
-      </p:sp>
-      <p:sp>
-        <p:nvSpPr>
-          <p:cNvPr id="3" name="Content Placeholder 2"/>
-          <p:cNvSpPr>
-            <a:spLocks noGrp="1"/>
-          </p:cNvSpPr>
-          <p:nvPr>
-            <p:ph idx="1"/>
-          </p:nvPr>
-        </p:nvSpPr>
-        <p:spPr/>
-        <p:txBody>
-          <a:bodyPr/>
-          <a:lstStyle/>
-          <a:p>
-            <a:pPr>
-              <a:defRPr sz="2000">
-                <a:solidFill>
-                  <a:srgbClr val="333333"/>
-                </a:solidFill>
-                <a:latin typeface="Calibri"/>
-              </a:defRPr>
-            </a:pPr>
-            <a:r>
-              <a:t>Infrastructure is defined in files, reviewed, versioned and tested like application code.</a:t>
-            </a:r>
-          </a:p>
-          <a:p>
-            <a:pPr>
-              <a:defRPr sz="2000">
-                <a:solidFill>
-                  <a:srgbClr val="333333"/>
-                </a:solidFill>
-                <a:latin typeface="Calibri"/>
-              </a:defRPr>
-            </a:pPr>
-            <a:r>
-              <a:t>Declarative: describe the desired state; the tool converges reality to match it.</a:t>
-            </a:r>
-          </a:p>
-          <a:p>
-            <a:pPr>
-              <a:defRPr sz="2000">
-                <a:solidFill>
-                  <a:srgbClr val="333333"/>
-                </a:solidFill>
-                <a:latin typeface="Calibri"/>
-              </a:defRPr>
-            </a:pPr>
-            <a:r>
-              <a:t>Idempotent: repeated applies produce the same result (no drift or duplication).</a:t>
-            </a:r>
-          </a:p>
-          <a:p>
-            <a:pPr>
-              <a:defRPr sz="2000">
-                <a:solidFill>
-                  <a:srgbClr val="333333"/>
-                </a:solidFill>
-                <a:latin typeface="Calibri"/>
-              </a:defRPr>
-            </a:pPr>
-            <a:r>
-              <a:t>Immutable infrastructure: change by replacing, not by patching in place.</a:t>
-            </a:r>
-          </a:p>
-          <a:p>
-            <a:pPr>
-              <a:defRPr sz="2000">
-                <a:solidFill>
-                  <a:srgbClr val="333333"/>
-                </a:solidFill>
-                <a:latin typeface="Calibri"/>
-              </a:defRPr>
-            </a:pPr>
-            <a:r>
-              <a:t>GitOps: Git is the source of truth; agents reconcile actual state automatically.</a:t>
+              <a:t>Module 2 - Key Takeaway</a:t>
+            </a:r>
+          </a:p>
+        </p:txBody>
+      </p:sp>
+      <p:sp>
+        <p:nvSpPr>
+          <p:cNvPr id="4" name="TextBox 3"/>
+          <p:cNvSpPr txBox="1"/>
+          <p:nvPr/>
+        </p:nvSpPr>
+        <p:spPr>
+          <a:xfrm>
+            <a:off x="914400" y="1828800"/>
+            <a:ext cx="7315200" cy="3200400"/>
+          </a:xfrm>
+          <a:prstGeom prst="rect">
+            <a:avLst/>
+          </a:prstGeom>
+          <a:noFill/>
+        </p:spPr>
+        <p:txBody>
+          <a:bodyPr wrap="square">
+            <a:spAutoFit/>
+          </a:bodyPr>
+          <a:lstStyle/>
+          <a:p>
+            <a:pPr algn="ctr"/>
+            <a:r>
+              <a:rPr sz="2800" b="0">
+                <a:solidFill>
+                  <a:srgbClr val="4A90D9"/>
+                </a:solidFill>
+                <a:latin typeface="Calibri"/>
+              </a:rPr>
+              <a:t>"Culture is what happens when bad news arrives. Every tool in this course produces bad news by design - your culture decides whether that information becomes learning or silence."</a:t>
+            </a:r>
+          </a:p>
+        </p:txBody>
+      </p:sp>
+      <p:sp>
+        <p:nvSpPr>
+          <p:cNvPr id="5" name="TextBox 4"/>
+          <p:cNvSpPr txBox="1"/>
+          <p:nvPr/>
+        </p:nvSpPr>
+        <p:spPr>
+          <a:xfrm>
+            <a:off x="914400" y="5029200"/>
+            <a:ext cx="7315200" cy="731520"/>
+          </a:xfrm>
+          <a:prstGeom prst="rect">
+            <a:avLst/>
+          </a:prstGeom>
+          <a:noFill/>
+        </p:spPr>
+        <p:txBody>
+          <a:bodyPr wrap="none">
+            <a:spAutoFit/>
+          </a:bodyPr>
+          <a:lstStyle/>
+          <a:p>
+            <a:pPr algn="r"/>
+            <a:r>
+              <a:rPr sz="1800" b="0">
+                <a:solidFill>
+                  <a:srgbClr val="333333"/>
+                </a:solidFill>
+                <a:latin typeface="Calibri"/>
+              </a:rPr>
+              <a:t>— Course synthesis</a:t>
             </a:r>
           </a:p>
         </p:txBody>
@@ -7018,7 +8076,7 @@
 </p:sld>
 </file>
 
-<file path=ppt/slides/slide2.xml><?xml version="1.0" encoding="utf-8"?>
+<file path=ppt/slides/slide21.xml><?xml version="1.0" encoding="utf-8"?>
 <p:sld xmlns:a="http://schemas.openxmlformats.org/drawingml/2006/main" xmlns:p="http://schemas.openxmlformats.org/presentationml/2006/main" xmlns:r="http://schemas.openxmlformats.org/officeDocument/2006/relationships">
   <p:cSld>
     <p:spTree>
@@ -7118,265 +8176,11 @@
                 </a:solidFill>
                 <a:latin typeface="Calibri"/>
               </a:rPr>
-              <a:t>Module 1</a:t>
+              <a:t>Module 3</a:t>
             </a:r>
             <a:br/>
             <a:r>
-              <a:t>Introduction to DevOps and Platform Engineering</a:t>
-            </a:r>
-          </a:p>
-        </p:txBody>
-      </p:sp>
-    </p:spTree>
-  </p:cSld>
-  <p:clrMapOvr>
-    <a:masterClrMapping/>
-  </p:clrMapOvr>
-</p:sld>
-</file>
-
-<file path=ppt/slides/slide20.xml><?xml version="1.0" encoding="utf-8"?>
-<p:sld xmlns:a="http://schemas.openxmlformats.org/drawingml/2006/main" xmlns:p="http://schemas.openxmlformats.org/presentationml/2006/main" xmlns:r="http://schemas.openxmlformats.org/officeDocument/2006/relationships">
-  <p:cSld>
-    <p:spTree>
-      <p:nvGrpSpPr>
-        <p:cNvPr id="1" name=""/>
-        <p:cNvGrpSpPr/>
-        <p:nvPr/>
-      </p:nvGrpSpPr>
-      <p:grpSpPr/>
-      <p:sp>
-        <p:nvSpPr>
-          <p:cNvPr id="2" name="Title 1"/>
-          <p:cNvSpPr>
-            <a:spLocks noGrp="1"/>
-          </p:cNvSpPr>
-          <p:nvPr>
-            <p:ph type="title"/>
-          </p:nvPr>
-        </p:nvSpPr>
-        <p:spPr/>
-        <p:txBody>
-          <a:bodyPr/>
-          <a:lstStyle/>
-          <a:p/>
-        </p:txBody>
-      </p:sp>
-      <p:sp>
-        <p:nvSpPr>
-          <p:cNvPr id="3" name="TextBox 2"/>
-          <p:cNvSpPr txBox="1"/>
-          <p:nvPr/>
-        </p:nvSpPr>
-        <p:spPr>
-          <a:xfrm>
-            <a:off x="457200" y="274320"/>
-            <a:ext cx="8229600" cy="731520"/>
-          </a:xfrm>
-          <a:prstGeom prst="rect">
-            <a:avLst/>
-          </a:prstGeom>
-          <a:noFill/>
-        </p:spPr>
-        <p:txBody>
-          <a:bodyPr wrap="none">
-            <a:spAutoFit/>
-          </a:bodyPr>
-          <a:lstStyle/>
-          <a:p>
-            <a:r>
-              <a:rPr sz="3000" b="1">
-                <a:solidFill>
-                  <a:srgbClr val="1A3C6C"/>
-                </a:solidFill>
-                <a:latin typeface="Calibri"/>
-              </a:rPr>
-              <a:t>IaC Declarative Workflow</a:t>
-            </a:r>
-          </a:p>
-        </p:txBody>
-      </p:sp>
-      <p:pic>
-        <p:nvPicPr>
-          <p:cNvPr id="4" name="Picture 3" descr="03-iac-flow.png"/>
-          <p:cNvPicPr>
-            <a:picLocks noChangeAspect="1"/>
-          </p:cNvPicPr>
-          <p:nvPr/>
-        </p:nvPicPr>
-        <p:blipFill>
-          <a:blip r:embed="rId2"/>
-          <a:stretch>
-            <a:fillRect/>
-          </a:stretch>
-        </p:blipFill>
-        <p:spPr>
-          <a:xfrm>
-            <a:off x="914400" y="1097280"/>
-            <a:ext cx="7315200" cy="3907857"/>
-          </a:xfrm>
-          <a:prstGeom prst="rect">
-            <a:avLst/>
-          </a:prstGeom>
-        </p:spPr>
-      </p:pic>
-      <p:sp>
-        <p:nvSpPr>
-          <p:cNvPr id="5" name="TextBox 4"/>
-          <p:cNvSpPr txBox="1"/>
-          <p:nvPr/>
-        </p:nvSpPr>
-        <p:spPr>
-          <a:xfrm>
-            <a:off x="457200" y="5943600"/>
-            <a:ext cx="8229600" cy="731520"/>
-          </a:xfrm>
-          <a:prstGeom prst="rect">
-            <a:avLst/>
-          </a:prstGeom>
-          <a:noFill/>
-        </p:spPr>
-        <p:txBody>
-          <a:bodyPr wrap="none">
-            <a:spAutoFit/>
-          </a:bodyPr>
-          <a:lstStyle/>
-          <a:p>
-            <a:pPr algn="ctr"/>
-            <a:r>
-              <a:rPr sz="1600" b="0">
-                <a:solidFill>
-                  <a:srgbClr val="333333"/>
-                </a:solidFill>
-                <a:latin typeface="Calibri"/>
-              </a:rPr>
-              <a:t>Code → Plan → Apply → State tracking → Real infrastructure.</a:t>
-            </a:r>
-          </a:p>
-        </p:txBody>
-      </p:sp>
-    </p:spTree>
-  </p:cSld>
-  <p:clrMapOvr>
-    <a:masterClrMapping/>
-  </p:clrMapOvr>
-</p:sld>
-</file>
-
-<file path=ppt/slides/slide21.xml><?xml version="1.0" encoding="utf-8"?>
-<p:sld xmlns:a="http://schemas.openxmlformats.org/drawingml/2006/main" xmlns:p="http://schemas.openxmlformats.org/presentationml/2006/main" xmlns:r="http://schemas.openxmlformats.org/officeDocument/2006/relationships">
-  <p:cSld>
-    <p:spTree>
-      <p:nvGrpSpPr>
-        <p:cNvPr id="1" name=""/>
-        <p:cNvGrpSpPr/>
-        <p:nvPr/>
-      </p:nvGrpSpPr>
-      <p:grpSpPr/>
-      <p:sp>
-        <p:nvSpPr>
-          <p:cNvPr id="2" name="Title 1"/>
-          <p:cNvSpPr>
-            <a:spLocks noGrp="1"/>
-          </p:cNvSpPr>
-          <p:nvPr>
-            <p:ph type="title"/>
-          </p:nvPr>
-        </p:nvSpPr>
-        <p:spPr/>
-        <p:txBody>
-          <a:bodyPr/>
-          <a:lstStyle/>
-          <a:p>
-            <a:r>
-              <a:rPr sz="3200" b="1">
-                <a:solidFill>
-                  <a:srgbClr val="1A3C6C"/>
-                </a:solidFill>
-                <a:latin typeface="Calibri"/>
-              </a:rPr>
-              <a:t>IaC with Configuration Management</a:t>
-            </a:r>
-          </a:p>
-        </p:txBody>
-      </p:sp>
-      <p:sp>
-        <p:nvSpPr>
-          <p:cNvPr id="3" name="Content Placeholder 2"/>
-          <p:cNvSpPr>
-            <a:spLocks noGrp="1"/>
-          </p:cNvSpPr>
-          <p:nvPr>
-            <p:ph idx="1"/>
-          </p:nvPr>
-        </p:nvSpPr>
-        <p:spPr/>
-        <p:txBody>
-          <a:bodyPr/>
-          <a:lstStyle/>
-          <a:p>
-            <a:pPr>
-              <a:defRPr sz="2000">
-                <a:solidFill>
-                  <a:srgbClr val="333333"/>
-                </a:solidFill>
-                <a:latin typeface="Calibri"/>
-              </a:defRPr>
-            </a:pPr>
-            <a:r>
-              <a:t>Provisioning tools (Terraform, CloudFormation) create resources.</a:t>
-            </a:r>
-          </a:p>
-          <a:p>
-            <a:pPr>
-              <a:defRPr sz="2000">
-                <a:solidFill>
-                  <a:srgbClr val="333333"/>
-                </a:solidFill>
-                <a:latin typeface="Calibri"/>
-              </a:defRPr>
-            </a:pPr>
-            <a:r>
-              <a:t>Configuration management (Ansible, Chef, Puppet) installs software and settings.</a:t>
-            </a:r>
-          </a:p>
-          <a:p>
-            <a:pPr>
-              <a:defRPr sz="2000">
-                <a:solidFill>
-                  <a:srgbClr val="333333"/>
-                </a:solidFill>
-                <a:latin typeface="Calibri"/>
-              </a:defRPr>
-            </a:pPr>
-            <a:r>
-              <a:t>Container images increasingly replace config management for runtime state.</a:t>
-            </a:r>
-          </a:p>
-          <a:p>
-            <a:pPr>
-              <a:defRPr sz="2000">
-                <a:solidFill>
-                  <a:srgbClr val="333333"/>
-                </a:solidFill>
-                <a:latin typeface="Calibri"/>
-              </a:defRPr>
-            </a:pPr>
-            <a:r>
-              <a:t>Use modules to reuse patterns across environments and teams.</a:t>
-            </a:r>
-          </a:p>
-          <a:p>
-            <a:pPr>
-              <a:defRPr sz="2000">
-                <a:solidFill>
-                  <a:srgbClr val="333333"/>
-                </a:solidFill>
-                <a:latin typeface="Calibri"/>
-              </a:defRPr>
-            </a:pPr>
-            <a:r>
-              <a:t>Separate environment-specific values (tfvars) from reusable modules.</a:t>
+              <a:t>Tools and Technologies</a:t>
             </a:r>
           </a:p>
         </p:txBody>
@@ -7413,30 +8217,6 @@
         <p:txBody>
           <a:bodyPr/>
           <a:lstStyle/>
-          <a:p/>
-        </p:txBody>
-      </p:sp>
-      <p:sp>
-        <p:nvSpPr>
-          <p:cNvPr id="3" name="TextBox 2"/>
-          <p:cNvSpPr txBox="1"/>
-          <p:nvPr/>
-        </p:nvSpPr>
-        <p:spPr>
-          <a:xfrm>
-            <a:off x="457200" y="274320"/>
-            <a:ext cx="8229600" cy="731520"/>
-          </a:xfrm>
-          <a:prstGeom prst="rect">
-            <a:avLst/>
-          </a:prstGeom>
-          <a:noFill/>
-        </p:spPr>
-        <p:txBody>
-          <a:bodyPr wrap="none">
-            <a:spAutoFit/>
-          </a:bodyPr>
-          <a:lstStyle/>
           <a:p>
             <a:r>
               <a:rPr sz="3200" b="1">
@@ -7445,183 +8225,101 @@
                 </a:solidFill>
                 <a:latin typeface="Calibri"/>
               </a:rPr>
-              <a:t>Provisioning vs Configuration Management</a:t>
-            </a:r>
-          </a:p>
-        </p:txBody>
-      </p:sp>
-      <p:sp>
-        <p:nvSpPr>
-          <p:cNvPr id="4" name="TextBox 3"/>
-          <p:cNvSpPr txBox="1"/>
-          <p:nvPr/>
-        </p:nvSpPr>
-        <p:spPr>
-          <a:xfrm>
-            <a:off x="457200" y="1188720"/>
-            <a:ext cx="3931920" cy="5029200"/>
-          </a:xfrm>
-          <a:prstGeom prst="rect">
-            <a:avLst/>
-          </a:prstGeom>
-          <a:noFill/>
-        </p:spPr>
-        <p:txBody>
-          <a:bodyPr wrap="square">
-            <a:spAutoFit/>
-          </a:bodyPr>
-          <a:lstStyle/>
-          <a:p>
-            <a:pPr>
-              <a:defRPr sz="1800">
-                <a:solidFill>
-                  <a:srgbClr val="333333"/>
-                </a:solidFill>
-                <a:latin typeface="Calibri"/>
-              </a:defRPr>
-            </a:pPr>
-            <a:r>
-              <a:t>TERRAFORM (provisioning)</a:t>
-            </a:r>
-          </a:p>
-          <a:p>
-            <a:pPr>
-              <a:defRPr sz="1800">
-                <a:solidFill>
-                  <a:srgbClr val="333333"/>
-                </a:solidFill>
-                <a:latin typeface="Calibri"/>
-              </a:defRPr>
-            </a:pPr>
-            <a:r>
-              <a:t>Creates and destroys infrastructure: networks, VMs, containers, DNS.</a:t>
-            </a:r>
-          </a:p>
-          <a:p>
-            <a:pPr>
-              <a:defRPr sz="1800">
-                <a:solidFill>
-                  <a:srgbClr val="333333"/>
-                </a:solidFill>
-                <a:latin typeface="Calibri"/>
-              </a:defRPr>
-            </a:pPr>
-            <a:r>
-              <a:t>Declarative HCL; state file tracks what exists.</a:t>
-            </a:r>
-          </a:p>
-          <a:p>
-            <a:pPr>
-              <a:defRPr sz="1800">
-                <a:solidFill>
-                  <a:srgbClr val="333333"/>
-                </a:solidFill>
-                <a:latin typeface="Calibri"/>
-              </a:defRPr>
-            </a:pPr>
-            <a:r>
-              <a:t>plan shows the diff before anything changes.</a:t>
-            </a:r>
-          </a:p>
-          <a:p>
-            <a:pPr>
-              <a:defRPr sz="1800">
-                <a:solidFill>
-                  <a:srgbClr val="333333"/>
-                </a:solidFill>
-                <a:latin typeface="Calibri"/>
-              </a:defRPr>
-            </a:pPr>
-            <a:r>
-              <a:t>Lab 05: provisions our two services on local Docker.</a:t>
-            </a:r>
-          </a:p>
-        </p:txBody>
-      </p:sp>
-      <p:sp>
-        <p:nvSpPr>
-          <p:cNvPr id="5" name="TextBox 4"/>
-          <p:cNvSpPr txBox="1"/>
-          <p:nvPr/>
-        </p:nvSpPr>
-        <p:spPr>
-          <a:xfrm>
-            <a:off x="4754880" y="1188720"/>
-            <a:ext cx="3931920" cy="5029200"/>
-          </a:xfrm>
-          <a:prstGeom prst="rect">
-            <a:avLst/>
-          </a:prstGeom>
-          <a:noFill/>
-        </p:spPr>
-        <p:txBody>
-          <a:bodyPr wrap="square">
-            <a:spAutoFit/>
-          </a:bodyPr>
-          <a:lstStyle/>
-          <a:p>
-            <a:pPr>
-              <a:defRPr sz="1800">
-                <a:solidFill>
-                  <a:srgbClr val="333333"/>
-                </a:solidFill>
-                <a:latin typeface="Calibri"/>
-              </a:defRPr>
-            </a:pPr>
-            <a:r>
-              <a:t>ANSIBLE (configuration management)</a:t>
-            </a:r>
-          </a:p>
-          <a:p>
-            <a:pPr>
-              <a:defRPr sz="1800">
-                <a:solidFill>
-                  <a:srgbClr val="333333"/>
-                </a:solidFill>
-                <a:latin typeface="Calibri"/>
-              </a:defRPr>
-            </a:pPr>
-            <a:r>
-              <a:t>Configures existing machines: packages, files, services, users.</a:t>
-            </a:r>
-          </a:p>
-          <a:p>
-            <a:pPr>
-              <a:defRPr sz="1800">
-                <a:solidFill>
-                  <a:srgbClr val="333333"/>
-                </a:solidFill>
-                <a:latin typeface="Calibri"/>
-              </a:defRPr>
-            </a:pPr>
-            <a:r>
-              <a:t>Declarative YAML tasks; idempotent modules, no state file.</a:t>
-            </a:r>
-          </a:p>
-          <a:p>
-            <a:pPr>
-              <a:defRPr sz="1800">
-                <a:solidFill>
-                  <a:srgbClr val="333333"/>
-                </a:solidFill>
-                <a:latin typeface="Calibri"/>
-              </a:defRPr>
-            </a:pPr>
-            <a:r>
-              <a:t>--check --diff previews changes; second run reports changed=0.</a:t>
-            </a:r>
-          </a:p>
-          <a:p>
-            <a:pPr>
-              <a:defRPr sz="1800">
-                <a:solidFill>
-                  <a:srgbClr val="333333"/>
-                </a:solidFill>
-                <a:latin typeface="Calibri"/>
-              </a:defRPr>
-            </a:pPr>
-            <a:r>
-              <a:t>Lab 05 bonus: configures your own VM over the local connection.</a:t>
+              <a:t>The DevOps Toolchain - Categories, Not Brands</a:t>
+            </a:r>
+          </a:p>
+        </p:txBody>
+      </p:sp>
+      <p:sp>
+        <p:nvSpPr>
+          <p:cNvPr id="3" name="Content Placeholder 2"/>
+          <p:cNvSpPr>
+            <a:spLocks noGrp="1"/>
+          </p:cNvSpPr>
+          <p:nvPr>
+            <p:ph idx="1"/>
+          </p:nvPr>
+        </p:nvSpPr>
+        <p:spPr/>
+        <p:txBody>
+          <a:bodyPr/>
+          <a:lstStyle/>
+          <a:p>
+            <a:pPr>
+              <a:defRPr sz="1900">
+                <a:solidFill>
+                  <a:srgbClr val="333333"/>
+                </a:solidFill>
+                <a:latin typeface="Calibri"/>
+              </a:defRPr>
+            </a:pPr>
+            <a:r>
+              <a:t>Source control (Git) - the single source of truth everything else builds on.</a:t>
+            </a:r>
+          </a:p>
+          <a:p>
+            <a:pPr>
+              <a:defRPr sz="1900">
+                <a:solidFill>
+                  <a:srgbClr val="333333"/>
+                </a:solidFill>
+                <a:latin typeface="Calibri"/>
+              </a:defRPr>
+            </a:pPr>
+            <a:r>
+              <a:t>CI/CD - pipeline engines: GitHub Actions, GitLab CI, Jenkins, Tekton, Argo Workflows.</a:t>
+            </a:r>
+          </a:p>
+          <a:p>
+            <a:pPr>
+              <a:defRPr sz="1900">
+                <a:solidFill>
+                  <a:srgbClr val="333333"/>
+                </a:solidFill>
+                <a:latin typeface="Calibri"/>
+              </a:defRPr>
+            </a:pPr>
+            <a:r>
+              <a:t>Artifacts - registries for images and packages: GHCR, Docker Hub, Artifactory, Nexus.</a:t>
+            </a:r>
+          </a:p>
+          <a:p>
+            <a:pPr>
+              <a:defRPr sz="1900">
+                <a:solidFill>
+                  <a:srgbClr val="333333"/>
+                </a:solidFill>
+                <a:latin typeface="Calibri"/>
+              </a:defRPr>
+            </a:pPr>
+            <a:r>
+              <a:t>IaC + config mgmt - Terraform/OpenTofu, Pulumi | Ansible, Chef, Puppet.</a:t>
+            </a:r>
+          </a:p>
+          <a:p>
+            <a:pPr>
+              <a:defRPr sz="1900">
+                <a:solidFill>
+                  <a:srgbClr val="333333"/>
+                </a:solidFill>
+                <a:latin typeface="Calibri"/>
+              </a:defRPr>
+            </a:pPr>
+            <a:r>
+              <a:t>Runtime - Docker, Kubernetes, serverless | Secrets - Vault, cloud KMS, SOPS.</a:t>
+            </a:r>
+          </a:p>
+          <a:p>
+            <a:pPr>
+              <a:defRPr sz="1900">
+                <a:solidFill>
+                  <a:srgbClr val="333333"/>
+                </a:solidFill>
+                <a:latin typeface="Calibri"/>
+              </a:defRPr>
+            </a:pPr>
+            <a:r>
+              <a:t>Observability - Prometheus, Grafana, Loki, OpenTelemetry, Datadog | Incident - PagerDuty.</a:t>
             </a:r>
           </a:p>
         </p:txBody>
@@ -7666,7 +8364,7 @@
                 </a:solidFill>
                 <a:latin typeface="Calibri"/>
               </a:rPr>
-              <a:t>IaC Best Practices</a:t>
+              <a:t>Principles for Choosing Tools</a:t>
             </a:r>
           </a:p>
         </p:txBody>
@@ -7687,67 +8385,67 @@
           <a:lstStyle/>
           <a:p>
             <a:pPr>
-              <a:defRPr sz="2000">
-                <a:solidFill>
-                  <a:srgbClr val="333333"/>
-                </a:solidFill>
-                <a:latin typeface="Calibri"/>
-              </a:defRPr>
-            </a:pPr>
-            <a:r>
-              <a:t>Store code in Git; use branching, PRs and code review for every change.</a:t>
-            </a:r>
-          </a:p>
-          <a:p>
-            <a:pPr>
-              <a:defRPr sz="2000">
-                <a:solidFill>
-                  <a:srgbClr val="333333"/>
-                </a:solidFill>
-                <a:latin typeface="Calibri"/>
-              </a:defRPr>
-            </a:pPr>
-            <a:r>
-              <a:t>Run 'plan' in CI and require human approval for production 'apply'.</a:t>
-            </a:r>
-          </a:p>
-          <a:p>
-            <a:pPr>
-              <a:defRPr sz="2000">
-                <a:solidFill>
-                  <a:srgbClr val="333333"/>
-                </a:solidFill>
-                <a:latin typeface="Calibri"/>
-              </a:defRPr>
-            </a:pPr>
-            <a:r>
-              <a:t>Use remote state with locking to prevent concurrent changes.</a:t>
-            </a:r>
-          </a:p>
-          <a:p>
-            <a:pPr>
-              <a:defRPr sz="2000">
-                <a:solidFill>
-                  <a:srgbClr val="333333"/>
-                </a:solidFill>
-                <a:latin typeface="Calibri"/>
-              </a:defRPr>
-            </a:pPr>
-            <a:r>
-              <a:t>Lint and validate: terraform fmt, validate, tflint, checkov/tfsec.</a:t>
-            </a:r>
-          </a:p>
-          <a:p>
-            <a:pPr>
-              <a:defRPr sz="2000">
-                <a:solidFill>
-                  <a:srgbClr val="333333"/>
-                </a:solidFill>
-                <a:latin typeface="Calibri"/>
-              </a:defRPr>
-            </a:pPr>
-            <a:r>
-              <a:t>Tag resources, use least privilege, and keep secrets out of state files.</a:t>
+              <a:defRPr sz="1900">
+                <a:solidFill>
+                  <a:srgbClr val="333333"/>
+                </a:solidFill>
+                <a:latin typeface="Calibri"/>
+              </a:defRPr>
+            </a:pPr>
+            <a:r>
+              <a:t>Declarative over imperative: describe the destination, let the tool drive (diffable, reviewable).</a:t>
+            </a:r>
+          </a:p>
+          <a:p>
+            <a:pPr>
+              <a:defRPr sz="1900">
+                <a:solidFill>
+                  <a:srgbClr val="333333"/>
+                </a:solidFill>
+                <a:latin typeface="Calibri"/>
+              </a:defRPr>
+            </a:pPr>
+            <a:r>
+              <a:t>Everything as code, everything in Git: config you cannot version, review or roll back is risk.</a:t>
+            </a:r>
+          </a:p>
+          <a:p>
+            <a:pPr>
+              <a:defRPr sz="1900">
+                <a:solidFill>
+                  <a:srgbClr val="333333"/>
+                </a:solidFill>
+                <a:latin typeface="Calibri"/>
+              </a:defRPr>
+            </a:pPr>
+            <a:r>
+              <a:t>API-first and composable: tools must integrate into pipelines, not demand humans click.</a:t>
+            </a:r>
+          </a:p>
+          <a:p>
+            <a:pPr>
+              <a:defRPr sz="1900">
+                <a:solidFill>
+                  <a:srgbClr val="333333"/>
+                </a:solidFill>
+                <a:latin typeface="Calibri"/>
+              </a:defRPr>
+            </a:pPr>
+            <a:r>
+              <a:t>Paved road over mandate: golden defaults teams WANT, with escape hatches.</a:t>
+            </a:r>
+          </a:p>
+          <a:p>
+            <a:pPr>
+              <a:defRPr sz="1900">
+                <a:solidFill>
+                  <a:srgbClr val="333333"/>
+                </a:solidFill>
+                <a:latin typeface="Calibri"/>
+              </a:defRPr>
+            </a:pPr>
+            <a:r>
+              <a:t>Total cost = licences + integration + operation + training + EXIT cost.</a:t>
             </a:r>
           </a:p>
         </p:txBody>
@@ -7761,6 +8459,538 @@
 </file>
 
 <file path=ppt/slides/slide24.xml><?xml version="1.0" encoding="utf-8"?>
+<p:sld xmlns:a="http://schemas.openxmlformats.org/drawingml/2006/main" xmlns:p="http://schemas.openxmlformats.org/presentationml/2006/main" xmlns:r="http://schemas.openxmlformats.org/officeDocument/2006/relationships">
+  <p:cSld>
+    <p:spTree>
+      <p:nvGrpSpPr>
+        <p:cNvPr id="1" name=""/>
+        <p:cNvGrpSpPr/>
+        <p:nvPr/>
+      </p:nvGrpSpPr>
+      <p:grpSpPr/>
+      <p:sp>
+        <p:nvSpPr>
+          <p:cNvPr id="2" name="Title 1"/>
+          <p:cNvSpPr>
+            <a:spLocks noGrp="1"/>
+          </p:cNvSpPr>
+          <p:nvPr>
+            <p:ph type="title"/>
+          </p:nvPr>
+        </p:nvSpPr>
+        <p:spPr/>
+        <p:txBody>
+          <a:bodyPr/>
+          <a:lstStyle/>
+          <a:p>
+            <a:r>
+              <a:rPr sz="3200" b="1">
+                <a:solidFill>
+                  <a:srgbClr val="1A3C6C"/>
+                </a:solidFill>
+                <a:latin typeface="Calibri"/>
+              </a:rPr>
+              <a:t>Automation and Orchestration Platforms</a:t>
+            </a:r>
+          </a:p>
+        </p:txBody>
+      </p:sp>
+      <p:sp>
+        <p:nvSpPr>
+          <p:cNvPr id="3" name="Content Placeholder 2"/>
+          <p:cNvSpPr>
+            <a:spLocks noGrp="1"/>
+          </p:cNvSpPr>
+          <p:nvPr>
+            <p:ph idx="1"/>
+          </p:nvPr>
+        </p:nvSpPr>
+        <p:spPr/>
+        <p:txBody>
+          <a:bodyPr/>
+          <a:lstStyle/>
+          <a:p>
+            <a:pPr>
+              <a:defRPr sz="1900">
+                <a:solidFill>
+                  <a:srgbClr val="333333"/>
+                </a:solidFill>
+                <a:latin typeface="Calibri"/>
+              </a:defRPr>
+            </a:pPr>
+            <a:r>
+              <a:t>CI engines differ in hosting model: SaaS runners (Actions) vs self-managed (Jenkins) vs in-cluster (Tekton).</a:t>
+            </a:r>
+          </a:p>
+          <a:p>
+            <a:pPr>
+              <a:defRPr sz="1900">
+                <a:solidFill>
+                  <a:srgbClr val="333333"/>
+                </a:solidFill>
+                <a:latin typeface="Calibri"/>
+              </a:defRPr>
+            </a:pPr>
+            <a:r>
+              <a:t>Runtime orchestration: Kubernetes won - scheduling, self-healing, scaling, rollout as APIs.</a:t>
+            </a:r>
+          </a:p>
+          <a:p>
+            <a:pPr>
+              <a:defRPr sz="1900">
+                <a:solidFill>
+                  <a:srgbClr val="333333"/>
+                </a:solidFill>
+                <a:latin typeface="Calibri"/>
+              </a:defRPr>
+            </a:pPr>
+            <a:r>
+              <a:t>GitOps: Git as the source of truth for RUNTIME state - agents (Argo CD, Flux) pull and converge.</a:t>
+            </a:r>
+          </a:p>
+          <a:p>
+            <a:pPr>
+              <a:defRPr sz="1900">
+                <a:solidFill>
+                  <a:srgbClr val="333333"/>
+                </a:solidFill>
+                <a:latin typeface="Calibri"/>
+              </a:defRPr>
+            </a:pPr>
+            <a:r>
+              <a:t>Push (pipeline applies) vs pull (cluster syncs): pull gives drift-correction + audit for free.</a:t>
+            </a:r>
+          </a:p>
+          <a:p>
+            <a:pPr>
+              <a:defRPr sz="1900">
+                <a:solidFill>
+                  <a:srgbClr val="333333"/>
+                </a:solidFill>
+                <a:latin typeface="Calibri"/>
+              </a:defRPr>
+            </a:pPr>
+            <a:r>
+              <a:t>Event-driven automation: webhooks and controllers replace humans as the glue.</a:t>
+            </a:r>
+          </a:p>
+        </p:txBody>
+      </p:sp>
+    </p:spTree>
+  </p:cSld>
+  <p:clrMapOvr>
+    <a:masterClrMapping/>
+  </p:clrMapOvr>
+</p:sld>
+</file>
+
+<file path=ppt/slides/slide25.xml><?xml version="1.0" encoding="utf-8"?>
+<p:sld xmlns:a="http://schemas.openxmlformats.org/drawingml/2006/main" xmlns:p="http://schemas.openxmlformats.org/presentationml/2006/main" xmlns:r="http://schemas.openxmlformats.org/officeDocument/2006/relationships">
+  <p:cSld>
+    <p:spTree>
+      <p:nvGrpSpPr>
+        <p:cNvPr id="1" name=""/>
+        <p:cNvGrpSpPr/>
+        <p:nvPr/>
+      </p:nvGrpSpPr>
+      <p:grpSpPr/>
+      <p:sp>
+        <p:nvSpPr>
+          <p:cNvPr id="2" name="Title 1"/>
+          <p:cNvSpPr>
+            <a:spLocks noGrp="1"/>
+          </p:cNvSpPr>
+          <p:nvPr>
+            <p:ph type="title"/>
+          </p:nvPr>
+        </p:nvSpPr>
+        <p:spPr/>
+        <p:txBody>
+          <a:bodyPr/>
+          <a:lstStyle/>
+          <a:p/>
+        </p:txBody>
+      </p:sp>
+      <p:sp>
+        <p:nvSpPr>
+          <p:cNvPr id="3" name="TextBox 2"/>
+          <p:cNvSpPr txBox="1"/>
+          <p:nvPr/>
+        </p:nvSpPr>
+        <p:spPr>
+          <a:xfrm>
+            <a:off x="457200" y="274320"/>
+            <a:ext cx="8229600" cy="731520"/>
+          </a:xfrm>
+          <a:prstGeom prst="rect">
+            <a:avLst/>
+          </a:prstGeom>
+          <a:noFill/>
+        </p:spPr>
+        <p:txBody>
+          <a:bodyPr wrap="none">
+            <a:spAutoFit/>
+          </a:bodyPr>
+          <a:lstStyle/>
+          <a:p>
+            <a:r>
+              <a:rPr sz="3000" b="1">
+                <a:solidFill>
+                  <a:srgbClr val="1A3C6C"/>
+                </a:solidFill>
+                <a:latin typeface="Calibri"/>
+              </a:rPr>
+              <a:t>Measurement: the Four DORA Metrics</a:t>
+            </a:r>
+          </a:p>
+        </p:txBody>
+      </p:sp>
+      <p:pic>
+        <p:nvPicPr>
+          <p:cNvPr id="4" name="Picture 3" descr="12-dora-metrics.png"/>
+          <p:cNvPicPr>
+            <a:picLocks noChangeAspect="1"/>
+          </p:cNvPicPr>
+          <p:nvPr/>
+        </p:nvPicPr>
+        <p:blipFill>
+          <a:blip r:embed="rId2"/>
+          <a:stretch>
+            <a:fillRect/>
+          </a:stretch>
+        </p:blipFill>
+        <p:spPr>
+          <a:xfrm>
+            <a:off x="914400" y="1097280"/>
+            <a:ext cx="7315200" cy="4148488"/>
+          </a:xfrm>
+          <a:prstGeom prst="rect">
+            <a:avLst/>
+          </a:prstGeom>
+        </p:spPr>
+      </p:pic>
+      <p:sp>
+        <p:nvSpPr>
+          <p:cNvPr id="5" name="TextBox 4"/>
+          <p:cNvSpPr txBox="1"/>
+          <p:nvPr/>
+        </p:nvSpPr>
+        <p:spPr>
+          <a:xfrm>
+            <a:off x="457200" y="5943600"/>
+            <a:ext cx="8229600" cy="731520"/>
+          </a:xfrm>
+          <a:prstGeom prst="rect">
+            <a:avLst/>
+          </a:prstGeom>
+          <a:noFill/>
+        </p:spPr>
+        <p:txBody>
+          <a:bodyPr wrap="none">
+            <a:spAutoFit/>
+          </a:bodyPr>
+          <a:lstStyle/>
+          <a:p>
+            <a:pPr algn="ctr"/>
+            <a:r>
+              <a:rPr sz="1600" b="0">
+                <a:solidFill>
+                  <a:srgbClr val="333333"/>
+                </a:solidFill>
+                <a:latin typeface="Calibri"/>
+              </a:rPr>
+              <a:t>Two throughput metrics, two stability metrics - always read together.</a:t>
+            </a:r>
+          </a:p>
+        </p:txBody>
+      </p:sp>
+    </p:spTree>
+  </p:cSld>
+  <p:clrMapOvr>
+    <a:masterClrMapping/>
+  </p:clrMapOvr>
+</p:sld>
+</file>
+
+<file path=ppt/slides/slide26.xml><?xml version="1.0" encoding="utf-8"?>
+<p:sld xmlns:a="http://schemas.openxmlformats.org/drawingml/2006/main" xmlns:p="http://schemas.openxmlformats.org/presentationml/2006/main" xmlns:r="http://schemas.openxmlformats.org/officeDocument/2006/relationships">
+  <p:cSld>
+    <p:spTree>
+      <p:nvGrpSpPr>
+        <p:cNvPr id="1" name=""/>
+        <p:cNvGrpSpPr/>
+        <p:nvPr/>
+      </p:nvGrpSpPr>
+      <p:grpSpPr/>
+      <p:sp>
+        <p:nvSpPr>
+          <p:cNvPr id="2" name="Title 1"/>
+          <p:cNvSpPr>
+            <a:spLocks noGrp="1"/>
+          </p:cNvSpPr>
+          <p:nvPr>
+            <p:ph type="title"/>
+          </p:nvPr>
+        </p:nvSpPr>
+        <p:spPr/>
+        <p:txBody>
+          <a:bodyPr/>
+          <a:lstStyle/>
+          <a:p>
+            <a:r>
+              <a:rPr sz="3200" b="1">
+                <a:solidFill>
+                  <a:srgbClr val="1A3C6C"/>
+                </a:solidFill>
+                <a:latin typeface="Calibri"/>
+              </a:rPr>
+              <a:t>This Course's Toolchain (and Why)</a:t>
+            </a:r>
+          </a:p>
+        </p:txBody>
+      </p:sp>
+      <p:sp>
+        <p:nvSpPr>
+          <p:cNvPr id="3" name="Content Placeholder 2"/>
+          <p:cNvSpPr>
+            <a:spLocks noGrp="1"/>
+          </p:cNvSpPr>
+          <p:nvPr>
+            <p:ph idx="1"/>
+          </p:nvPr>
+        </p:nvSpPr>
+        <p:spPr/>
+        <p:txBody>
+          <a:bodyPr/>
+          <a:lstStyle/>
+          <a:p>
+            <a:pPr>
+              <a:defRPr sz="1900">
+                <a:solidFill>
+                  <a:srgbClr val="333333"/>
+                </a:solidFill>
+                <a:latin typeface="Calibri"/>
+              </a:defRPr>
+            </a:pPr>
+            <a:r>
+              <a:t>Git + GitHub Actions - ubiquitous, free tier, local fallback with act.</a:t>
+            </a:r>
+          </a:p>
+          <a:p>
+            <a:pPr>
+              <a:defRPr sz="1900">
+                <a:solidFill>
+                  <a:srgbClr val="333333"/>
+                </a:solidFill>
+                <a:latin typeface="Calibri"/>
+              </a:defRPr>
+            </a:pPr>
+            <a:r>
+              <a:t>Docker + Compose - the container standard; Compose for readable multi-service local stacks.</a:t>
+            </a:r>
+          </a:p>
+          <a:p>
+            <a:pPr>
+              <a:defRPr sz="1900">
+                <a:solidFill>
+                  <a:srgbClr val="333333"/>
+                </a:solidFill>
+                <a:latin typeface="Calibri"/>
+              </a:defRPr>
+            </a:pPr>
+            <a:r>
+              <a:t>kind + kubectl - real Kubernetes API inside Docker: zero cloud cost, full fidelity.</a:t>
+            </a:r>
+          </a:p>
+          <a:p>
+            <a:pPr>
+              <a:defRPr sz="1900">
+                <a:solidFill>
+                  <a:srgbClr val="333333"/>
+                </a:solidFill>
+                <a:latin typeface="Calibri"/>
+              </a:defRPr>
+            </a:pPr>
+            <a:r>
+              <a:t>Terraform + Ansible - both IaC halves: provisioning and configuration management.</a:t>
+            </a:r>
+          </a:p>
+          <a:p>
+            <a:pPr>
+              <a:defRPr sz="1900">
+                <a:solidFill>
+                  <a:srgbClr val="333333"/>
+                </a:solidFill>
+                <a:latin typeface="Calibri"/>
+              </a:defRPr>
+            </a:pPr>
+            <a:r>
+              <a:t>Trivy + Conftest/OPA - scanning and policy as code | Prometheus + Grafana - observability.</a:t>
+            </a:r>
+          </a:p>
+          <a:p>
+            <a:pPr>
+              <a:defRPr sz="1900">
+                <a:solidFill>
+                  <a:srgbClr val="333333"/>
+                </a:solidFill>
+                <a:latin typeface="Calibri"/>
+              </a:defRPr>
+            </a:pPr>
+            <a:r>
+              <a:t>Every tool here is free, runs on your VM's localhost, and is category-representative.</a:t>
+            </a:r>
+          </a:p>
+        </p:txBody>
+      </p:sp>
+    </p:spTree>
+  </p:cSld>
+  <p:clrMapOvr>
+    <a:masterClrMapping/>
+  </p:clrMapOvr>
+</p:sld>
+</file>
+
+<file path=ppt/slides/slide27.xml><?xml version="1.0" encoding="utf-8"?>
+<p:sld xmlns:a="http://schemas.openxmlformats.org/drawingml/2006/main" xmlns:p="http://schemas.openxmlformats.org/presentationml/2006/main" xmlns:r="http://schemas.openxmlformats.org/officeDocument/2006/relationships">
+  <p:cSld>
+    <p:spTree>
+      <p:nvGrpSpPr>
+        <p:cNvPr id="1" name=""/>
+        <p:cNvGrpSpPr/>
+        <p:nvPr/>
+      </p:nvGrpSpPr>
+      <p:grpSpPr/>
+      <p:sp>
+        <p:nvSpPr>
+          <p:cNvPr id="2" name="Title 1"/>
+          <p:cNvSpPr>
+            <a:spLocks noGrp="1"/>
+          </p:cNvSpPr>
+          <p:nvPr>
+            <p:ph type="title"/>
+          </p:nvPr>
+        </p:nvSpPr>
+        <p:spPr/>
+        <p:txBody>
+          <a:bodyPr/>
+          <a:lstStyle/>
+          <a:p/>
+        </p:txBody>
+      </p:sp>
+      <p:sp>
+        <p:nvSpPr>
+          <p:cNvPr id="3" name="TextBox 2"/>
+          <p:cNvSpPr txBox="1"/>
+          <p:nvPr/>
+        </p:nvSpPr>
+        <p:spPr>
+          <a:xfrm>
+            <a:off x="457200" y="274320"/>
+            <a:ext cx="8229600" cy="731520"/>
+          </a:xfrm>
+          <a:prstGeom prst="rect">
+            <a:avLst/>
+          </a:prstGeom>
+          <a:noFill/>
+        </p:spPr>
+        <p:txBody>
+          <a:bodyPr wrap="none">
+            <a:spAutoFit/>
+          </a:bodyPr>
+          <a:lstStyle/>
+          <a:p>
+            <a:r>
+              <a:rPr sz="3200" b="1">
+                <a:solidFill>
+                  <a:srgbClr val="1A3C6C"/>
+                </a:solidFill>
+                <a:latin typeface="Calibri"/>
+              </a:rPr>
+              <a:t>Module 3 - Key Takeaway</a:t>
+            </a:r>
+          </a:p>
+        </p:txBody>
+      </p:sp>
+      <p:sp>
+        <p:nvSpPr>
+          <p:cNvPr id="4" name="TextBox 3"/>
+          <p:cNvSpPr txBox="1"/>
+          <p:nvPr/>
+        </p:nvSpPr>
+        <p:spPr>
+          <a:xfrm>
+            <a:off x="914400" y="1828800"/>
+            <a:ext cx="7315200" cy="3200400"/>
+          </a:xfrm>
+          <a:prstGeom prst="rect">
+            <a:avLst/>
+          </a:prstGeom>
+          <a:noFill/>
+        </p:spPr>
+        <p:txBody>
+          <a:bodyPr wrap="square">
+            <a:spAutoFit/>
+          </a:bodyPr>
+          <a:lstStyle/>
+          <a:p>
+            <a:pPr algn="ctr"/>
+            <a:r>
+              <a:rPr sz="2800" b="0">
+                <a:solidFill>
+                  <a:srgbClr val="4A90D9"/>
+                </a:solidFill>
+                <a:latin typeface="Calibri"/>
+              </a:rPr>
+              <a:t>"A fool with a tool is still a fool - but a generative team with a paved road is a force multiplier. Choose categories deliberately; let the platform choose brands once, for everyone."</a:t>
+            </a:r>
+          </a:p>
+        </p:txBody>
+      </p:sp>
+      <p:sp>
+        <p:nvSpPr>
+          <p:cNvPr id="5" name="TextBox 4"/>
+          <p:cNvSpPr txBox="1"/>
+          <p:nvPr/>
+        </p:nvSpPr>
+        <p:spPr>
+          <a:xfrm>
+            <a:off x="914400" y="5029200"/>
+            <a:ext cx="7315200" cy="731520"/>
+          </a:xfrm>
+          <a:prstGeom prst="rect">
+            <a:avLst/>
+          </a:prstGeom>
+          <a:noFill/>
+        </p:spPr>
+        <p:txBody>
+          <a:bodyPr wrap="none">
+            <a:spAutoFit/>
+          </a:bodyPr>
+          <a:lstStyle/>
+          <a:p>
+            <a:pPr algn="r"/>
+            <a:r>
+              <a:rPr sz="1800" b="0">
+                <a:solidFill>
+                  <a:srgbClr val="333333"/>
+                </a:solidFill>
+                <a:latin typeface="Calibri"/>
+              </a:rPr>
+              <a:t>— Course synthesis (first clause: Grady Booch)</a:t>
+            </a:r>
+          </a:p>
+        </p:txBody>
+      </p:sp>
+    </p:spTree>
+  </p:cSld>
+  <p:clrMapOvr>
+    <a:masterClrMapping/>
+  </p:clrMapOvr>
+</p:sld>
+</file>
+
+<file path=ppt/slides/slide28.xml><?xml version="1.0" encoding="utf-8"?>
 <p:sld xmlns:a="http://schemas.openxmlformats.org/drawingml/2006/main" xmlns:p="http://schemas.openxmlformats.org/presentationml/2006/main" xmlns:r="http://schemas.openxmlformats.org/officeDocument/2006/relationships">
   <p:cSld>
     <p:spTree>
@@ -7860,519 +9090,11 @@
                 </a:solidFill>
                 <a:latin typeface="Calibri"/>
               </a:rPr>
-              <a:t>Module 5</a:t>
+              <a:t>Module 4</a:t>
             </a:r>
             <a:br/>
             <a:r>
-              <a:t>Continuous Integration and Continuous Delivery (CI/CD)</a:t>
-            </a:r>
-          </a:p>
-        </p:txBody>
-      </p:sp>
-    </p:spTree>
-  </p:cSld>
-  <p:clrMapOvr>
-    <a:masterClrMapping/>
-  </p:clrMapOvr>
-</p:sld>
-</file>
-
-<file path=ppt/slides/slide25.xml><?xml version="1.0" encoding="utf-8"?>
-<p:sld xmlns:a="http://schemas.openxmlformats.org/drawingml/2006/main" xmlns:p="http://schemas.openxmlformats.org/presentationml/2006/main" xmlns:r="http://schemas.openxmlformats.org/officeDocument/2006/relationships">
-  <p:cSld>
-    <p:spTree>
-      <p:nvGrpSpPr>
-        <p:cNvPr id="1" name=""/>
-        <p:cNvGrpSpPr/>
-        <p:nvPr/>
-      </p:nvGrpSpPr>
-      <p:grpSpPr/>
-      <p:sp>
-        <p:nvSpPr>
-          <p:cNvPr id="2" name="Title 1"/>
-          <p:cNvSpPr>
-            <a:spLocks noGrp="1"/>
-          </p:cNvSpPr>
-          <p:nvPr>
-            <p:ph type="title"/>
-          </p:nvPr>
-        </p:nvSpPr>
-        <p:spPr/>
-        <p:txBody>
-          <a:bodyPr/>
-          <a:lstStyle/>
-          <a:p>
-            <a:r>
-              <a:rPr sz="3200" b="1">
-                <a:solidFill>
-                  <a:srgbClr val="1A3C6C"/>
-                </a:solidFill>
-                <a:latin typeface="Calibri"/>
-              </a:rPr>
-              <a:t>The CI/CD Pipeline</a:t>
-            </a:r>
-          </a:p>
-        </p:txBody>
-      </p:sp>
-      <p:sp>
-        <p:nvSpPr>
-          <p:cNvPr id="3" name="Content Placeholder 2"/>
-          <p:cNvSpPr>
-            <a:spLocks noGrp="1"/>
-          </p:cNvSpPr>
-          <p:nvPr>
-            <p:ph idx="1"/>
-          </p:nvPr>
-        </p:nvSpPr>
-        <p:spPr/>
-        <p:txBody>
-          <a:bodyPr/>
-          <a:lstStyle/>
-          <a:p>
-            <a:pPr>
-              <a:defRPr sz="2000">
-                <a:solidFill>
-                  <a:srgbClr val="333333"/>
-                </a:solidFill>
-                <a:latin typeface="Calibri"/>
-              </a:defRPr>
-            </a:pPr>
-            <a:r>
-              <a:t>Continuous Integration: merge code to trunk frequently, validate with automated tests.</a:t>
-            </a:r>
-          </a:p>
-          <a:p>
-            <a:pPr>
-              <a:defRPr sz="2000">
-                <a:solidFill>
-                  <a:srgbClr val="333333"/>
-                </a:solidFill>
-                <a:latin typeface="Calibri"/>
-              </a:defRPr>
-            </a:pPr>
-            <a:r>
-              <a:t>Continuous Delivery: keep code in a deployable state; deploy to production on demand.</a:t>
-            </a:r>
-          </a:p>
-          <a:p>
-            <a:pPr>
-              <a:defRPr sz="2000">
-                <a:solidFill>
-                  <a:srgbClr val="333333"/>
-                </a:solidFill>
-                <a:latin typeface="Calibri"/>
-              </a:defRPr>
-            </a:pPr>
-            <a:r>
-              <a:t>Continuous Deployment: deploy automatically after tests pass (higher maturity).</a:t>
-            </a:r>
-          </a:p>
-          <a:p>
-            <a:pPr>
-              <a:defRPr sz="2000">
-                <a:solidFill>
-                  <a:srgbClr val="333333"/>
-                </a:solidFill>
-                <a:latin typeface="Calibri"/>
-              </a:defRPr>
-            </a:pPr>
-            <a:r>
-              <a:t>Pipeline stages: build, test, security scan, artifact, deploy, verify, monitor.</a:t>
-            </a:r>
-          </a:p>
-          <a:p>
-            <a:pPr>
-              <a:defRPr sz="2000">
-                <a:solidFill>
-                  <a:srgbClr val="333333"/>
-                </a:solidFill>
-                <a:latin typeface="Calibri"/>
-              </a:defRPr>
-            </a:pPr>
-            <a:r>
-              <a:t>Fast feedback: fail early, surface root cause quickly, keep the pipeline green.</a:t>
-            </a:r>
-          </a:p>
-        </p:txBody>
-      </p:sp>
-    </p:spTree>
-  </p:cSld>
-  <p:clrMapOvr>
-    <a:masterClrMapping/>
-  </p:clrMapOvr>
-</p:sld>
-</file>
-
-<file path=ppt/slides/slide26.xml><?xml version="1.0" encoding="utf-8"?>
-<p:sld xmlns:a="http://schemas.openxmlformats.org/drawingml/2006/main" xmlns:p="http://schemas.openxmlformats.org/presentationml/2006/main" xmlns:r="http://schemas.openxmlformats.org/officeDocument/2006/relationships">
-  <p:cSld>
-    <p:spTree>
-      <p:nvGrpSpPr>
-        <p:cNvPr id="1" name=""/>
-        <p:cNvGrpSpPr/>
-        <p:nvPr/>
-      </p:nvGrpSpPr>
-      <p:grpSpPr/>
-      <p:sp>
-        <p:nvSpPr>
-          <p:cNvPr id="2" name="Title 1"/>
-          <p:cNvSpPr>
-            <a:spLocks noGrp="1"/>
-          </p:cNvSpPr>
-          <p:nvPr>
-            <p:ph type="title"/>
-          </p:nvPr>
-        </p:nvSpPr>
-        <p:spPr/>
-        <p:txBody>
-          <a:bodyPr/>
-          <a:lstStyle/>
-          <a:p/>
-        </p:txBody>
-      </p:sp>
-      <p:sp>
-        <p:nvSpPr>
-          <p:cNvPr id="3" name="TextBox 2"/>
-          <p:cNvSpPr txBox="1"/>
-          <p:nvPr/>
-        </p:nvSpPr>
-        <p:spPr>
-          <a:xfrm>
-            <a:off x="457200" y="274320"/>
-            <a:ext cx="8229600" cy="731520"/>
-          </a:xfrm>
-          <a:prstGeom prst="rect">
-            <a:avLst/>
-          </a:prstGeom>
-          <a:noFill/>
-        </p:spPr>
-        <p:txBody>
-          <a:bodyPr wrap="none">
-            <a:spAutoFit/>
-          </a:bodyPr>
-          <a:lstStyle/>
-          <a:p>
-            <a:r>
-              <a:rPr sz="3000" b="1">
-                <a:solidFill>
-                  <a:srgbClr val="1A3C6C"/>
-                </a:solidFill>
-                <a:latin typeface="Calibri"/>
-              </a:rPr>
-              <a:t>CI/CD Pipeline Flow</a:t>
-            </a:r>
-          </a:p>
-        </p:txBody>
-      </p:sp>
-      <p:pic>
-        <p:nvPicPr>
-          <p:cNvPr id="4" name="Picture 3" descr="02-cicd-pipeline.png"/>
-          <p:cNvPicPr>
-            <a:picLocks noChangeAspect="1"/>
-          </p:cNvPicPr>
-          <p:nvPr/>
-        </p:nvPicPr>
-        <p:blipFill>
-          <a:blip r:embed="rId2"/>
-          <a:stretch>
-            <a:fillRect/>
-          </a:stretch>
-        </p:blipFill>
-        <p:spPr>
-          <a:xfrm>
-            <a:off x="914400" y="1097280"/>
-            <a:ext cx="7315200" cy="3386172"/>
-          </a:xfrm>
-          <a:prstGeom prst="rect">
-            <a:avLst/>
-          </a:prstGeom>
-        </p:spPr>
-      </p:pic>
-      <p:sp>
-        <p:nvSpPr>
-          <p:cNvPr id="5" name="TextBox 4"/>
-          <p:cNvSpPr txBox="1"/>
-          <p:nvPr/>
-        </p:nvSpPr>
-        <p:spPr>
-          <a:xfrm>
-            <a:off x="457200" y="5943600"/>
-            <a:ext cx="8229600" cy="731520"/>
-          </a:xfrm>
-          <a:prstGeom prst="rect">
-            <a:avLst/>
-          </a:prstGeom>
-          <a:noFill/>
-        </p:spPr>
-        <p:txBody>
-          <a:bodyPr wrap="none">
-            <a:spAutoFit/>
-          </a:bodyPr>
-          <a:lstStyle/>
-          <a:p>
-            <a:pPr algn="ctr"/>
-            <a:r>
-              <a:rPr sz="1600" b="0">
-                <a:solidFill>
-                  <a:srgbClr val="333333"/>
-                </a:solidFill>
-                <a:latin typeface="Calibri"/>
-              </a:rPr>
-              <a:t>From commit through production, with feedback and rollback loops.</a:t>
-            </a:r>
-          </a:p>
-        </p:txBody>
-      </p:sp>
-    </p:spTree>
-  </p:cSld>
-  <p:clrMapOvr>
-    <a:masterClrMapping/>
-  </p:clrMapOvr>
-</p:sld>
-</file>
-
-<file path=ppt/slides/slide27.xml><?xml version="1.0" encoding="utf-8"?>
-<p:sld xmlns:a="http://schemas.openxmlformats.org/drawingml/2006/main" xmlns:p="http://schemas.openxmlformats.org/presentationml/2006/main" xmlns:r="http://schemas.openxmlformats.org/officeDocument/2006/relationships">
-  <p:cSld>
-    <p:spTree>
-      <p:nvGrpSpPr>
-        <p:cNvPr id="1" name=""/>
-        <p:cNvGrpSpPr/>
-        <p:nvPr/>
-      </p:nvGrpSpPr>
-      <p:grpSpPr/>
-      <p:sp>
-        <p:nvSpPr>
-          <p:cNvPr id="2" name="Title 1"/>
-          <p:cNvSpPr>
-            <a:spLocks noGrp="1"/>
-          </p:cNvSpPr>
-          <p:nvPr>
-            <p:ph type="title"/>
-          </p:nvPr>
-        </p:nvSpPr>
-        <p:spPr/>
-        <p:txBody>
-          <a:bodyPr/>
-          <a:lstStyle/>
-          <a:p>
-            <a:r>
-              <a:rPr sz="3200" b="1">
-                <a:solidFill>
-                  <a:srgbClr val="1A3C6C"/>
-                </a:solidFill>
-                <a:latin typeface="Calibri"/>
-              </a:rPr>
-              <a:t>A Scan Is Not a Gate</a:t>
-            </a:r>
-          </a:p>
-        </p:txBody>
-      </p:sp>
-      <p:sp>
-        <p:nvSpPr>
-          <p:cNvPr id="3" name="Content Placeholder 2"/>
-          <p:cNvSpPr>
-            <a:spLocks noGrp="1"/>
-          </p:cNvSpPr>
-          <p:nvPr>
-            <p:ph idx="1"/>
-          </p:nvPr>
-        </p:nvSpPr>
-        <p:spPr/>
-        <p:txBody>
-          <a:bodyPr/>
-          <a:lstStyle/>
-          <a:p>
-            <a:pPr>
-              <a:defRPr sz="2000">
-                <a:solidFill>
-                  <a:srgbClr val="333333"/>
-                </a:solidFill>
-                <a:latin typeface="Calibri"/>
-              </a:defRPr>
-            </a:pPr>
-            <a:r>
-              <a:t>Report step: scan results are visible, but the build stays green (exit-code 0).</a:t>
-            </a:r>
-          </a:p>
-          <a:p>
-            <a:pPr>
-              <a:defRPr sz="2000">
-                <a:solidFill>
-                  <a:srgbClr val="333333"/>
-                </a:solidFill>
-                <a:latin typeface="Calibri"/>
-              </a:defRPr>
-            </a:pPr>
-            <a:r>
-              <a:t>Gate step: the build FAILS on findings you can act on (exit-code 1).</a:t>
-            </a:r>
-          </a:p>
-          <a:p>
-            <a:pPr>
-              <a:defRPr sz="2000">
-                <a:solidFill>
-                  <a:srgbClr val="333333"/>
-                </a:solidFill>
-                <a:latin typeface="Calibri"/>
-              </a:defRPr>
-            </a:pPr>
-            <a:r>
-              <a:t>Gate on FIXABLE criticals - failing on unfixable CVEs just trains people to ignore red.</a:t>
-            </a:r>
-          </a:p>
-          <a:p>
-            <a:pPr>
-              <a:defRPr sz="2000">
-                <a:solidFill>
-                  <a:srgbClr val="333333"/>
-                </a:solidFill>
-                <a:latin typeface="Calibri"/>
-              </a:defRPr>
-            </a:pPr>
-            <a:r>
-              <a:t>Pin third-party pipeline actions to versions, never a moving branch.</a:t>
-            </a:r>
-          </a:p>
-          <a:p>
-            <a:pPr>
-              <a:defRPr sz="2000">
-                <a:solidFill>
-                  <a:srgbClr val="333333"/>
-                </a:solidFill>
-                <a:latin typeface="Calibri"/>
-              </a:defRPr>
-            </a:pPr>
-            <a:r>
-              <a:t>Give the pipeline token least privilege (permissions: contents: read).</a:t>
-            </a:r>
-          </a:p>
-        </p:txBody>
-      </p:sp>
-    </p:spTree>
-  </p:cSld>
-  <p:clrMapOvr>
-    <a:masterClrMapping/>
-  </p:clrMapOvr>
-</p:sld>
-</file>
-
-<file path=ppt/slides/slide28.xml><?xml version="1.0" encoding="utf-8"?>
-<p:sld xmlns:a="http://schemas.openxmlformats.org/drawingml/2006/main" xmlns:p="http://schemas.openxmlformats.org/presentationml/2006/main" xmlns:r="http://schemas.openxmlformats.org/officeDocument/2006/relationships">
-  <p:cSld>
-    <p:spTree>
-      <p:nvGrpSpPr>
-        <p:cNvPr id="1" name=""/>
-        <p:cNvGrpSpPr/>
-        <p:nvPr/>
-      </p:nvGrpSpPr>
-      <p:grpSpPr/>
-      <p:sp>
-        <p:nvSpPr>
-          <p:cNvPr id="2" name="Title 1"/>
-          <p:cNvSpPr>
-            <a:spLocks noGrp="1"/>
-          </p:cNvSpPr>
-          <p:nvPr>
-            <p:ph type="title"/>
-          </p:nvPr>
-        </p:nvSpPr>
-        <p:spPr/>
-        <p:txBody>
-          <a:bodyPr/>
-          <a:lstStyle/>
-          <a:p/>
-        </p:txBody>
-      </p:sp>
-      <p:sp>
-        <p:nvSpPr>
-          <p:cNvPr id="3" name="TextBox 2"/>
-          <p:cNvSpPr txBox="1"/>
-          <p:nvPr/>
-        </p:nvSpPr>
-        <p:spPr>
-          <a:xfrm>
-            <a:off x="457200" y="274320"/>
-            <a:ext cx="8229600" cy="731520"/>
-          </a:xfrm>
-          <a:prstGeom prst="rect">
-            <a:avLst/>
-          </a:prstGeom>
-          <a:noFill/>
-        </p:spPr>
-        <p:txBody>
-          <a:bodyPr wrap="none">
-            <a:spAutoFit/>
-          </a:bodyPr>
-          <a:lstStyle/>
-          <a:p>
-            <a:r>
-              <a:rPr sz="3000" b="1">
-                <a:solidFill>
-                  <a:srgbClr val="1A3C6C"/>
-                </a:solidFill>
-                <a:latin typeface="Calibri"/>
-              </a:rPr>
-              <a:t>Measuring Delivery: The Four DORA Metrics</a:t>
-            </a:r>
-          </a:p>
-        </p:txBody>
-      </p:sp>
-      <p:pic>
-        <p:nvPicPr>
-          <p:cNvPr id="4" name="Picture 3" descr="12-dora-metrics.png"/>
-          <p:cNvPicPr>
-            <a:picLocks noChangeAspect="1"/>
-          </p:cNvPicPr>
-          <p:nvPr/>
-        </p:nvPicPr>
-        <p:blipFill>
-          <a:blip r:embed="rId2"/>
-          <a:stretch>
-            <a:fillRect/>
-          </a:stretch>
-        </p:blipFill>
-        <p:spPr>
-          <a:xfrm>
-            <a:off x="914400" y="1097280"/>
-            <a:ext cx="7315200" cy="4148488"/>
-          </a:xfrm>
-          <a:prstGeom prst="rect">
-            <a:avLst/>
-          </a:prstGeom>
-        </p:spPr>
-      </p:pic>
-      <p:sp>
-        <p:nvSpPr>
-          <p:cNvPr id="5" name="TextBox 4"/>
-          <p:cNvSpPr txBox="1"/>
-          <p:nvPr/>
-        </p:nvSpPr>
-        <p:spPr>
-          <a:xfrm>
-            <a:off x="457200" y="5943600"/>
-            <a:ext cx="8229600" cy="731520"/>
-          </a:xfrm>
-          <a:prstGeom prst="rect">
-            <a:avLst/>
-          </a:prstGeom>
-          <a:noFill/>
-        </p:spPr>
-        <p:txBody>
-          <a:bodyPr wrap="none">
-            <a:spAutoFit/>
-          </a:bodyPr>
-          <a:lstStyle/>
-          <a:p>
-            <a:pPr algn="ctr"/>
-            <a:r>
-              <a:rPr sz="1600" b="0">
-                <a:solidFill>
-                  <a:srgbClr val="333333"/>
-                </a:solidFill>
-                <a:latin typeface="Calibri"/>
-              </a:rPr>
-              <a:t>Two throughput metrics, two stability metrics - always read together.</a:t>
+              <a:t>Infrastructure as Code (IaC)</a:t>
             </a:r>
           </a:p>
         </p:txBody>
@@ -8417,7 +9139,7 @@
                 </a:solidFill>
                 <a:latin typeface="Calibri"/>
               </a:rPr>
-              <a:t>Integrating Platform Engineering into CI/CD</a:t>
+              <a:t>The Problem IaC Solves</a:t>
             </a:r>
           </a:p>
         </p:txBody>
@@ -8438,67 +9160,67 @@
           <a:lstStyle/>
           <a:p>
             <a:pPr>
-              <a:defRPr sz="2000">
-                <a:solidFill>
-                  <a:srgbClr val="333333"/>
-                </a:solidFill>
-                <a:latin typeface="Calibri"/>
-              </a:defRPr>
-            </a:pPr>
-            <a:r>
-              <a:t>Golden templates provide approved pipeline patterns out-of-the-box.</a:t>
-            </a:r>
-          </a:p>
-          <a:p>
-            <a:pPr>
-              <a:defRPr sz="2000">
-                <a:solidFill>
-                  <a:srgbClr val="333333"/>
-                </a:solidFill>
-                <a:latin typeface="Calibri"/>
-              </a:defRPr>
-            </a:pPr>
-            <a:r>
-              <a:t>Self-service environments let teams spin up ephemeral staging safely.</a:t>
-            </a:r>
-          </a:p>
-          <a:p>
-            <a:pPr>
-              <a:defRPr sz="2000">
-                <a:solidFill>
-                  <a:srgbClr val="333333"/>
-                </a:solidFill>
-                <a:latin typeface="Calibri"/>
-              </a:defRPr>
-            </a:pPr>
-            <a:r>
-              <a:t>Secrets and credentials are managed by the platform, not hard-coded in repos.</a:t>
-            </a:r>
-          </a:p>
-          <a:p>
-            <a:pPr>
-              <a:defRPr sz="2000">
-                <a:solidFill>
-                  <a:srgbClr val="333333"/>
-                </a:solidFill>
-                <a:latin typeface="Calibri"/>
-              </a:defRPr>
-            </a:pPr>
-            <a:r>
-              <a:t>Deployment targets are abstracted: teams deploy to environments, not to servers.</a:t>
-            </a:r>
-          </a:p>
-          <a:p>
-            <a:pPr>
-              <a:defRPr sz="2000">
-                <a:solidFill>
-                  <a:srgbClr val="333333"/>
-                </a:solidFill>
-                <a:latin typeface="Calibri"/>
-              </a:defRPr>
-            </a:pPr>
-            <a:r>
-              <a:t>Observability hooks are injected by the platform so every service is monitored by default.</a:t>
+              <a:defRPr sz="1900">
+                <a:solidFill>
+                  <a:srgbClr val="333333"/>
+                </a:solidFill>
+                <a:latin typeface="Calibri"/>
+              </a:defRPr>
+            </a:pPr>
+            <a:r>
+              <a:t>Snowflake servers: hand-built, undocumented, unreproducible - 'do not reboot #3'.</a:t>
+            </a:r>
+          </a:p>
+          <a:p>
+            <a:pPr>
+              <a:defRPr sz="1900">
+                <a:solidFill>
+                  <a:srgbClr val="333333"/>
+                </a:solidFill>
+                <a:latin typeface="Calibri"/>
+              </a:defRPr>
+            </a:pPr>
+            <a:r>
+              <a:t>Configuration drift: environments diverge silently until 'works in staging' means nothing.</a:t>
+            </a:r>
+          </a:p>
+          <a:p>
+            <a:pPr>
+              <a:defRPr sz="1900">
+                <a:solidFill>
+                  <a:srgbClr val="333333"/>
+                </a:solidFill>
+                <a:latin typeface="Calibri"/>
+              </a:defRPr>
+            </a:pPr>
+            <a:r>
+              <a:t>ClickOps: console changes leave no diff, no review, no rollback, no audit trail.</a:t>
+            </a:r>
+          </a:p>
+          <a:p>
+            <a:pPr>
+              <a:defRPr sz="1900">
+                <a:solidFill>
+                  <a:srgbClr val="333333"/>
+                </a:solidFill>
+                <a:latin typeface="Calibri"/>
+              </a:defRPr>
+            </a:pPr>
+            <a:r>
+              <a:t>Disaster recovery without IaC is archaeology; with IaC it is 'apply' in a new region.</a:t>
+            </a:r>
+          </a:p>
+          <a:p>
+            <a:pPr>
+              <a:defRPr sz="1900">
+                <a:solidFill>
+                  <a:srgbClr val="333333"/>
+                </a:solidFill>
+                <a:latin typeface="Calibri"/>
+              </a:defRPr>
+            </a:pPr>
+            <a:r>
+              <a:t>Pets vs cattle: name-and-nurse servers vs numbered, replaceable, rebuildable instances.</a:t>
             </a:r>
           </a:p>
         </p:txBody>
@@ -8543,7 +9265,7 @@
                 </a:solidFill>
                 <a:latin typeface="Calibri"/>
               </a:rPr>
-              <a:t>What is DevOps?</a:t>
+              <a:t>Where DevOps Came From</a:t>
             </a:r>
           </a:p>
         </p:txBody>
@@ -8564,67 +9286,67 @@
           <a:lstStyle/>
           <a:p>
             <a:pPr>
-              <a:defRPr sz="2000">
-                <a:solidFill>
-                  <a:srgbClr val="333333"/>
-                </a:solidFill>
-                <a:latin typeface="Calibri"/>
-              </a:defRPr>
-            </a:pPr>
-            <a:r>
-              <a:t>A set of practices that combines software development (Dev) and IT operations (Ops).</a:t>
-            </a:r>
-          </a:p>
-          <a:p>
-            <a:pPr>
-              <a:defRPr sz="2000">
-                <a:solidFill>
-                  <a:srgbClr val="333333"/>
-                </a:solidFill>
-                <a:latin typeface="Calibri"/>
-              </a:defRPr>
-            </a:pPr>
-            <a:r>
-              <a:t>Aims to shorten the systems development life cycle and deliver continuous high-quality software.</a:t>
-            </a:r>
-          </a:p>
-          <a:p>
-            <a:pPr>
-              <a:defRPr sz="2000">
-                <a:solidFill>
-                  <a:srgbClr val="333333"/>
-                </a:solidFill>
-                <a:latin typeface="Calibri"/>
-              </a:defRPr>
-            </a:pPr>
-            <a:r>
-              <a:t>Underpinned by CALMS: Culture, Automation, Lean, Measurement, Sharing.</a:t>
-            </a:r>
-          </a:p>
-          <a:p>
-            <a:pPr>
-              <a:defRPr sz="2000">
-                <a:solidFill>
-                  <a:srgbClr val="333333"/>
-                </a:solidFill>
-                <a:latin typeface="Calibri"/>
-              </a:defRPr>
-            </a:pPr>
-            <a:r>
-              <a:t>Not a tool, not a role — it is a way of organising work around flow and feedback.</a:t>
-            </a:r>
-          </a:p>
-          <a:p>
-            <a:pPr>
-              <a:defRPr sz="2000">
-                <a:solidFill>
-                  <a:srgbClr val="333333"/>
-                </a:solidFill>
-                <a:latin typeface="Calibri"/>
-              </a:defRPr>
-            </a:pPr>
-            <a:r>
-              <a:t>Core loop: Plan → Create → Verify → Release → Deploy → Operate → Monitor → repeat.</a:t>
+              <a:defRPr sz="1900">
+                <a:solidFill>
+                  <a:srgbClr val="333333"/>
+                </a:solidFill>
+                <a:latin typeface="Calibri"/>
+              </a:defRPr>
+            </a:pPr>
+            <a:r>
+              <a:t>Pre-2009: Dev measured on change delivered, Ops measured on stability.</a:t>
+            </a:r>
+          </a:p>
+          <a:p>
+            <a:pPr>
+              <a:defRPr sz="1900">
+                <a:solidFill>
+                  <a:srgbClr val="333333"/>
+                </a:solidFill>
+                <a:latin typeface="Calibri"/>
+              </a:defRPr>
+            </a:pPr>
+            <a:r>
+              <a:t>Opposing incentives created the 'wall of confusion' - throw releases over it.</a:t>
+            </a:r>
+          </a:p>
+          <a:p>
+            <a:pPr>
+              <a:defRPr sz="1900">
+                <a:solidFill>
+                  <a:srgbClr val="333333"/>
+                </a:solidFill>
+                <a:latin typeface="Calibri"/>
+              </a:defRPr>
+            </a:pPr>
+            <a:r>
+              <a:t>Result: quarterly big-bang releases, weekend war rooms, mutual blame.</a:t>
+            </a:r>
+          </a:p>
+          <a:p>
+            <a:pPr>
+              <a:defRPr sz="1900">
+                <a:solidFill>
+                  <a:srgbClr val="333333"/>
+                </a:solidFill>
+                <a:latin typeface="Calibri"/>
+              </a:defRPr>
+            </a:pPr>
+            <a:r>
+              <a:t>2009: '10+ Deploys per Day' (Flickr) and the first devopsdays (Patrick Debois).</a:t>
+            </a:r>
+          </a:p>
+          <a:p>
+            <a:pPr>
+              <a:defRPr sz="1900">
+                <a:solidFill>
+                  <a:srgbClr val="333333"/>
+                </a:solidFill>
+                <a:latin typeface="Calibri"/>
+              </a:defRPr>
+            </a:pPr>
+            <a:r>
+              <a:t>The insight: the conflict is a SYSTEM problem, not a people problem.</a:t>
             </a:r>
           </a:p>
         </p:txBody>
@@ -8669,7 +9391,7 @@
                 </a:solidFill>
                 <a:latin typeface="Calibri"/>
               </a:rPr>
-              <a:t>Case Study: Successful CI/CD</a:t>
+              <a:t>Core Principles: Declarative, Idempotent, Immutable</a:t>
             </a:r>
           </a:p>
         </p:txBody>
@@ -8690,67 +9412,67 @@
           <a:lstStyle/>
           <a:p>
             <a:pPr>
-              <a:defRPr sz="2000">
-                <a:solidFill>
-                  <a:srgbClr val="333333"/>
-                </a:solidFill>
-                <a:latin typeface="Calibri"/>
-              </a:defRPr>
-            </a:pPr>
-            <a:r>
-              <a:t>Goal: reduce release lead time from weeks to hours while keeping change-failure rate low.</a:t>
-            </a:r>
-          </a:p>
-          <a:p>
-            <a:pPr>
-              <a:defRPr sz="2000">
-                <a:solidFill>
-                  <a:srgbClr val="333333"/>
-                </a:solidFill>
-                <a:latin typeface="Calibri"/>
-              </a:defRPr>
-            </a:pPr>
-            <a:r>
-              <a:t>Approach: trunk-based development, feature flags, automated canary analysis.</a:t>
-            </a:r>
-          </a:p>
-          <a:p>
-            <a:pPr>
-              <a:defRPr sz="2000">
-                <a:solidFill>
-                  <a:srgbClr val="333333"/>
-                </a:solidFill>
-                <a:latin typeface="Calibri"/>
-              </a:defRPr>
-            </a:pPr>
-            <a:r>
-              <a:t>Platform provided templated pipelines, artefact registry and deployment guard rails.</a:t>
-            </a:r>
-          </a:p>
-          <a:p>
-            <a:pPr>
-              <a:defRPr sz="2000">
-                <a:solidFill>
-                  <a:srgbClr val="333333"/>
-                </a:solidFill>
-                <a:latin typeface="Calibri"/>
-              </a:defRPr>
-            </a:pPr>
-            <a:r>
-              <a:t>Outcome: higher deployment frequency, faster recovery, reduced manual toil.</a:t>
-            </a:r>
-          </a:p>
-          <a:p>
-            <a:pPr>
-              <a:defRPr sz="2000">
-                <a:solidFill>
-                  <a:srgbClr val="333333"/>
-                </a:solidFill>
-                <a:latin typeface="Calibri"/>
-              </a:defRPr>
-            </a:pPr>
-            <a:r>
-              <a:t>Lesson: optimise for small, safe changes rather than big-bang releases.</a:t>
+              <a:defRPr sz="1900">
+                <a:solidFill>
+                  <a:srgbClr val="333333"/>
+                </a:solidFill>
+                <a:latin typeface="Calibri"/>
+              </a:defRPr>
+            </a:pPr>
+            <a:r>
+              <a:t>DECLARATIVE: describe desired END STATE; the tool computes how to get there.</a:t>
+            </a:r>
+          </a:p>
+          <a:p>
+            <a:pPr>
+              <a:defRPr sz="1900">
+                <a:solidFill>
+                  <a:srgbClr val="333333"/>
+                </a:solidFill>
+                <a:latin typeface="Calibri"/>
+              </a:defRPr>
+            </a:pPr>
+            <a:r>
+              <a:t>  -&gt; enables diffing (plan), review, drift detection - a script can do none of these.</a:t>
+            </a:r>
+          </a:p>
+          <a:p>
+            <a:pPr>
+              <a:defRPr sz="1900">
+                <a:solidFill>
+                  <a:srgbClr val="333333"/>
+                </a:solidFill>
+                <a:latin typeface="Calibri"/>
+              </a:defRPr>
+            </a:pPr>
+            <a:r>
+              <a:t>IDEMPOTENT: applying twice = applying once; safe to re-run, safe to automate.</a:t>
+            </a:r>
+          </a:p>
+          <a:p>
+            <a:pPr>
+              <a:defRPr sz="1900">
+                <a:solidFill>
+                  <a:srgbClr val="333333"/>
+                </a:solidFill>
+                <a:latin typeface="Calibri"/>
+              </a:defRPr>
+            </a:pPr>
+            <a:r>
+              <a:t>IMMUTABLE: never patch in place - build a new artifact, replace the old (like containers).</a:t>
+            </a:r>
+          </a:p>
+          <a:p>
+            <a:pPr>
+              <a:defRPr sz="1900">
+                <a:solidFill>
+                  <a:srgbClr val="333333"/>
+                </a:solidFill>
+                <a:latin typeface="Calibri"/>
+              </a:defRPr>
+            </a:pPr>
+            <a:r>
+              <a:t>Version-controlled: the Git history of your infra IS your change management system.</a:t>
             </a:r>
           </a:p>
         </p:txBody>
@@ -8763,7 +9485,7 @@
 </p:sld>
 </file>
 
-<file path=ppt/slides/slide4.xml><?xml version="1.0" encoding="utf-8"?>
+<file path=ppt/slides/slide31.xml><?xml version="1.0" encoding="utf-8"?>
 <p:sld xmlns:a="http://schemas.openxmlformats.org/drawingml/2006/main" xmlns:p="http://schemas.openxmlformats.org/presentationml/2006/main" xmlns:r="http://schemas.openxmlformats.org/officeDocument/2006/relationships">
   <p:cSld>
     <p:spTree>
@@ -8819,14 +9541,14 @@
                 </a:solidFill>
                 <a:latin typeface="Calibri"/>
               </a:rPr>
-              <a:t>The DevOps Infinity Loop</a:t>
+              <a:t>The IaC Loop: Code, Plan, Apply, State, Drift</a:t>
             </a:r>
           </a:p>
         </p:txBody>
       </p:sp>
       <p:pic>
         <p:nvPicPr>
-          <p:cNvPr id="4" name="Picture 3" descr="01-devops-infinity-loop.png"/>
+          <p:cNvPr id="4" name="Picture 3" descr="03-iac-flow.png"/>
           <p:cNvPicPr>
             <a:picLocks noChangeAspect="1"/>
           </p:cNvPicPr>
@@ -8841,7 +9563,7 @@
         <p:spPr>
           <a:xfrm>
             <a:off x="914400" y="1097280"/>
-            <a:ext cx="7315200" cy="4141846"/>
+            <a:ext cx="7315200" cy="3907857"/>
           </a:xfrm>
           <a:prstGeom prst="rect">
             <a:avLst/>
@@ -8878,7 +9600,7 @@
                 </a:solidFill>
                 <a:latin typeface="Calibri"/>
               </a:rPr>
-              <a:t>DevOps is a continuous cycle of feedback, learning and improvement.</a:t>
+              <a:t>Desired state in Git; plan previews the diff; state maps names to reality.</a:t>
             </a:r>
           </a:p>
         </p:txBody>
@@ -8891,259 +9613,7 @@
 </p:sld>
 </file>
 
-<file path=ppt/slides/slide5.xml><?xml version="1.0" encoding="utf-8"?>
-<p:sld xmlns:a="http://schemas.openxmlformats.org/drawingml/2006/main" xmlns:p="http://schemas.openxmlformats.org/presentationml/2006/main" xmlns:r="http://schemas.openxmlformats.org/officeDocument/2006/relationships">
-  <p:cSld>
-    <p:spTree>
-      <p:nvGrpSpPr>
-        <p:cNvPr id="1" name=""/>
-        <p:cNvGrpSpPr/>
-        <p:nvPr/>
-      </p:nvGrpSpPr>
-      <p:grpSpPr/>
-      <p:sp>
-        <p:nvSpPr>
-          <p:cNvPr id="2" name="Title 1"/>
-          <p:cNvSpPr>
-            <a:spLocks noGrp="1"/>
-          </p:cNvSpPr>
-          <p:nvPr>
-            <p:ph type="title"/>
-          </p:nvPr>
-        </p:nvSpPr>
-        <p:spPr/>
-        <p:txBody>
-          <a:bodyPr/>
-          <a:lstStyle/>
-          <a:p>
-            <a:r>
-              <a:rPr sz="3200" b="1">
-                <a:solidFill>
-                  <a:srgbClr val="1A3C6C"/>
-                </a:solidFill>
-                <a:latin typeface="Calibri"/>
-              </a:rPr>
-              <a:t>What is Platform Engineering?</a:t>
-            </a:r>
-          </a:p>
-        </p:txBody>
-      </p:sp>
-      <p:sp>
-        <p:nvSpPr>
-          <p:cNvPr id="3" name="Content Placeholder 2"/>
-          <p:cNvSpPr>
-            <a:spLocks noGrp="1"/>
-          </p:cNvSpPr>
-          <p:nvPr>
-            <p:ph idx="1"/>
-          </p:nvPr>
-        </p:nvSpPr>
-        <p:spPr/>
-        <p:txBody>
-          <a:bodyPr/>
-          <a:lstStyle/>
-          <a:p>
-            <a:pPr>
-              <a:defRPr sz="2000">
-                <a:solidFill>
-                  <a:srgbClr val="333333"/>
-                </a:solidFill>
-                <a:latin typeface="Calibri"/>
-              </a:defRPr>
-            </a:pPr>
-            <a:r>
-              <a:t>Platform engineering builds and maintains internal developer platforms (IDPs).</a:t>
-            </a:r>
-          </a:p>
-          <a:p>
-            <a:pPr>
-              <a:defRPr sz="2000">
-                <a:solidFill>
-                  <a:srgbClr val="333333"/>
-                </a:solidFill>
-                <a:latin typeface="Calibri"/>
-              </a:defRPr>
-            </a:pPr>
-            <a:r>
-              <a:t>An IDP glues together tools, APIs, workflows and guard rails so stream-aligned teams can self-serve.</a:t>
-            </a:r>
-          </a:p>
-          <a:p>
-            <a:pPr>
-              <a:defRPr sz="2000">
-                <a:solidFill>
-                  <a:srgbClr val="333333"/>
-                </a:solidFill>
-                <a:latin typeface="Calibri"/>
-              </a:defRPr>
-            </a:pPr>
-            <a:r>
-              <a:t>It reduces cognitive load: developers focus on features, not on wiring up infrastructure.</a:t>
-            </a:r>
-          </a:p>
-          <a:p>
-            <a:pPr>
-              <a:defRPr sz="2000">
-                <a:solidFill>
-                  <a:srgbClr val="333333"/>
-                </a:solidFill>
-                <a:latin typeface="Calibri"/>
-              </a:defRPr>
-            </a:pPr>
-            <a:r>
-              <a:t>It treats the platform as a product with users, a backlog, SLOs and a roadmap.</a:t>
-            </a:r>
-          </a:p>
-          <a:p>
-            <a:pPr>
-              <a:defRPr sz="2000">
-                <a:solidFill>
-                  <a:srgbClr val="333333"/>
-                </a:solidFill>
-                <a:latin typeface="Calibri"/>
-              </a:defRPr>
-            </a:pPr>
-            <a:r>
-              <a:t>Typical capabilities: compute, observability, CI/CD, secrets, policy, environments.</a:t>
-            </a:r>
-          </a:p>
-        </p:txBody>
-      </p:sp>
-    </p:spTree>
-  </p:cSld>
-  <p:clrMapOvr>
-    <a:masterClrMapping/>
-  </p:clrMapOvr>
-</p:sld>
-</file>
-
-<file path=ppt/slides/slide6.xml><?xml version="1.0" encoding="utf-8"?>
-<p:sld xmlns:a="http://schemas.openxmlformats.org/drawingml/2006/main" xmlns:p="http://schemas.openxmlformats.org/presentationml/2006/main" xmlns:r="http://schemas.openxmlformats.org/officeDocument/2006/relationships">
-  <p:cSld>
-    <p:spTree>
-      <p:nvGrpSpPr>
-        <p:cNvPr id="1" name=""/>
-        <p:cNvGrpSpPr/>
-        <p:nvPr/>
-      </p:nvGrpSpPr>
-      <p:grpSpPr/>
-      <p:sp>
-        <p:nvSpPr>
-          <p:cNvPr id="2" name="Title 1"/>
-          <p:cNvSpPr>
-            <a:spLocks noGrp="1"/>
-          </p:cNvSpPr>
-          <p:nvPr>
-            <p:ph type="title"/>
-          </p:nvPr>
-        </p:nvSpPr>
-        <p:spPr/>
-        <p:txBody>
-          <a:bodyPr/>
-          <a:lstStyle/>
-          <a:p>
-            <a:r>
-              <a:rPr sz="3200" b="1">
-                <a:solidFill>
-                  <a:srgbClr val="1A3C6C"/>
-                </a:solidFill>
-                <a:latin typeface="Calibri"/>
-              </a:rPr>
-              <a:t>Synergy: DevOps + Platform Engineering</a:t>
-            </a:r>
-          </a:p>
-        </p:txBody>
-      </p:sp>
-      <p:sp>
-        <p:nvSpPr>
-          <p:cNvPr id="3" name="Content Placeholder 2"/>
-          <p:cNvSpPr>
-            <a:spLocks noGrp="1"/>
-          </p:cNvSpPr>
-          <p:nvPr>
-            <p:ph idx="1"/>
-          </p:nvPr>
-        </p:nvSpPr>
-        <p:spPr/>
-        <p:txBody>
-          <a:bodyPr/>
-          <a:lstStyle/>
-          <a:p>
-            <a:pPr>
-              <a:defRPr sz="2000">
-                <a:solidFill>
-                  <a:srgbClr val="333333"/>
-                </a:solidFill>
-                <a:latin typeface="Calibri"/>
-              </a:defRPr>
-            </a:pPr>
-            <a:r>
-              <a:t>DevOps defines the culture and practices; platform engineering provides the paved road.</a:t>
-            </a:r>
-          </a:p>
-          <a:p>
-            <a:pPr>
-              <a:defRPr sz="2000">
-                <a:solidFill>
-                  <a:srgbClr val="333333"/>
-                </a:solidFill>
-                <a:latin typeface="Calibri"/>
-              </a:defRPr>
-            </a:pPr>
-            <a:r>
-              <a:t>Without a platform, every team reinvents pipelines, monitoring and deployment patterns.</a:t>
-            </a:r>
-          </a:p>
-          <a:p>
-            <a:pPr>
-              <a:defRPr sz="2000">
-                <a:solidFill>
-                  <a:srgbClr val="333333"/>
-                </a:solidFill>
-                <a:latin typeface="Calibri"/>
-              </a:defRPr>
-            </a:pPr>
-            <a:r>
-              <a:t>Without DevOps culture, the platform becomes a central bottleneck or ignored shelfware.</a:t>
-            </a:r>
-          </a:p>
-          <a:p>
-            <a:pPr>
-              <a:defRPr sz="2000">
-                <a:solidFill>
-                  <a:srgbClr val="333333"/>
-                </a:solidFill>
-                <a:latin typeface="Calibri"/>
-              </a:defRPr>
-            </a:pPr>
-            <a:r>
-              <a:t>Together they enable fast flow, high quality and reduced toil at scale.</a:t>
-            </a:r>
-          </a:p>
-          <a:p>
-            <a:pPr>
-              <a:defRPr sz="2000">
-                <a:solidFill>
-                  <a:srgbClr val="333333"/>
-                </a:solidFill>
-                <a:latin typeface="Calibri"/>
-              </a:defRPr>
-            </a:pPr>
-            <a:r>
-              <a:t>Platform teams succeed when they act as enablers, not gatekeepers.</a:t>
-            </a:r>
-          </a:p>
-        </p:txBody>
-      </p:sp>
-    </p:spTree>
-  </p:cSld>
-  <p:clrMapOvr>
-    <a:masterClrMapping/>
-  </p:clrMapOvr>
-</p:sld>
-</file>
-
-<file path=ppt/slides/slide7.xml><?xml version="1.0" encoding="utf-8"?>
+<file path=ppt/slides/slide32.xml><?xml version="1.0" encoding="utf-8"?>
 <p:sld xmlns:a="http://schemas.openxmlformats.org/drawingml/2006/main" xmlns:p="http://schemas.openxmlformats.org/presentationml/2006/main" xmlns:r="http://schemas.openxmlformats.org/officeDocument/2006/relationships">
   <p:cSld>
     <p:spTree>
@@ -9193,51 +9663,27 @@
           <a:lstStyle/>
           <a:p>
             <a:r>
-              <a:rPr sz="3000" b="1">
+              <a:rPr sz="3200" b="1">
                 <a:solidFill>
                   <a:srgbClr val="1A3C6C"/>
                 </a:solidFill>
                 <a:latin typeface="Calibri"/>
               </a:rPr>
-              <a:t>Your Lab Environment for These Two Days</a:t>
-            </a:r>
-          </a:p>
-        </p:txBody>
-      </p:sp>
-      <p:pic>
-        <p:nvPicPr>
-          <p:cNvPr id="4" name="Picture 3" descr="11-course-lab-topology.png"/>
-          <p:cNvPicPr>
-            <a:picLocks noChangeAspect="1"/>
-          </p:cNvPicPr>
+              <a:t>Provisioning vs Configuration Management</a:t>
+            </a:r>
+          </a:p>
+        </p:txBody>
+      </p:sp>
+      <p:sp>
+        <p:nvSpPr>
+          <p:cNvPr id="4" name="TextBox 3"/>
+          <p:cNvSpPr txBox="1"/>
           <p:nvPr/>
-        </p:nvPicPr>
-        <p:blipFill>
-          <a:blip r:embed="rId2"/>
-          <a:stretch>
-            <a:fillRect/>
-          </a:stretch>
-        </p:blipFill>
+        </p:nvSpPr>
         <p:spPr>
           <a:xfrm>
-            <a:off x="914400" y="1097280"/>
-            <a:ext cx="7315200" cy="4449635"/>
-          </a:xfrm>
-          <a:prstGeom prst="rect">
-            <a:avLst/>
-          </a:prstGeom>
-        </p:spPr>
-      </p:pic>
-      <p:sp>
-        <p:nvSpPr>
-          <p:cNvPr id="5" name="TextBox 4"/>
-          <p:cNvSpPr txBox="1"/>
-          <p:nvPr/>
-        </p:nvSpPr>
-        <p:spPr>
-          <a:xfrm>
-            <a:off x="457200" y="5943600"/>
-            <a:ext cx="8229600" cy="731520"/>
+            <a:off x="457200" y="1188720"/>
+            <a:ext cx="3931920" cy="5029200"/>
           </a:xfrm>
           <a:prstGeom prst="rect">
             <a:avLst/>
@@ -9245,20 +9691,181 @@
           <a:noFill/>
         </p:spPr>
         <p:txBody>
-          <a:bodyPr wrap="none">
+          <a:bodyPr wrap="square">
             <a:spAutoFit/>
           </a:bodyPr>
           <a:lstStyle/>
           <a:p>
-            <a:pPr algn="ctr"/>
-            <a:r>
-              <a:rPr sz="1600" b="0">
-                <a:solidFill>
-                  <a:srgbClr val="333333"/>
-                </a:solidFill>
-                <a:latin typeface="Calibri"/>
-              </a:rPr>
-              <a:t>One Ubuntu 24.04 VM per participant — every lab runs on its localhost.</a:t>
+            <a:pPr>
+              <a:defRPr sz="1700">
+                <a:solidFill>
+                  <a:srgbClr val="333333"/>
+                </a:solidFill>
+                <a:latin typeface="Calibri"/>
+              </a:defRPr>
+            </a:pPr>
+            <a:r>
+              <a:t>PROVISIONING - Terraform, OpenTofu, Pulumi, CloudFormation, Bicep</a:t>
+            </a:r>
+          </a:p>
+          <a:p>
+            <a:pPr>
+              <a:defRPr sz="1700">
+                <a:solidFill>
+                  <a:srgbClr val="333333"/>
+                </a:solidFill>
+                <a:latin typeface="Calibri"/>
+              </a:defRPr>
+            </a:pPr>
+            <a:r>
+              <a:t>Creates/destroys infrastructure: networks, VMs, clusters, DNS, containers.</a:t>
+            </a:r>
+          </a:p>
+          <a:p>
+            <a:pPr>
+              <a:defRPr sz="1700">
+                <a:solidFill>
+                  <a:srgbClr val="333333"/>
+                </a:solidFill>
+                <a:latin typeface="Calibri"/>
+              </a:defRPr>
+            </a:pPr>
+            <a:r>
+              <a:t>Declarative model + state file tracking what exists.</a:t>
+            </a:r>
+          </a:p>
+          <a:p>
+            <a:pPr>
+              <a:defRPr sz="1700">
+                <a:solidFill>
+                  <a:srgbClr val="333333"/>
+                </a:solidFill>
+                <a:latin typeface="Calibri"/>
+              </a:defRPr>
+            </a:pPr>
+            <a:r>
+              <a:t>Answers: WHAT infrastructure exists?</a:t>
+            </a:r>
+          </a:p>
+          <a:p>
+            <a:pPr>
+              <a:defRPr sz="1700">
+                <a:solidFill>
+                  <a:srgbClr val="333333"/>
+                </a:solidFill>
+                <a:latin typeface="Calibri"/>
+              </a:defRPr>
+            </a:pPr>
+          </a:p>
+          <a:p>
+            <a:pPr>
+              <a:defRPr sz="1700">
+                <a:solidFill>
+                  <a:srgbClr val="333333"/>
+                </a:solidFill>
+                <a:latin typeface="Calibri"/>
+              </a:defRPr>
+            </a:pPr>
+            <a:r>
+              <a:t>Cloud-agnostic workflow; provider plugins per platform.</a:t>
+            </a:r>
+          </a:p>
+        </p:txBody>
+      </p:sp>
+      <p:sp>
+        <p:nvSpPr>
+          <p:cNvPr id="5" name="TextBox 4"/>
+          <p:cNvSpPr txBox="1"/>
+          <p:nvPr/>
+        </p:nvSpPr>
+        <p:spPr>
+          <a:xfrm>
+            <a:off x="4754880" y="1188720"/>
+            <a:ext cx="3931920" cy="5029200"/>
+          </a:xfrm>
+          <a:prstGeom prst="rect">
+            <a:avLst/>
+          </a:prstGeom>
+          <a:noFill/>
+        </p:spPr>
+        <p:txBody>
+          <a:bodyPr wrap="square">
+            <a:spAutoFit/>
+          </a:bodyPr>
+          <a:lstStyle/>
+          <a:p>
+            <a:pPr>
+              <a:defRPr sz="1700">
+                <a:solidFill>
+                  <a:srgbClr val="333333"/>
+                </a:solidFill>
+                <a:latin typeface="Calibri"/>
+              </a:defRPr>
+            </a:pPr>
+            <a:r>
+              <a:t>CONFIG MANAGEMENT - Ansible, Chef, Puppet, Salt</a:t>
+            </a:r>
+          </a:p>
+          <a:p>
+            <a:pPr>
+              <a:defRPr sz="1700">
+                <a:solidFill>
+                  <a:srgbClr val="333333"/>
+                </a:solidFill>
+                <a:latin typeface="Calibri"/>
+              </a:defRPr>
+            </a:pPr>
+            <a:r>
+              <a:t>Configures existing machines: packages, files, services, users.</a:t>
+            </a:r>
+          </a:p>
+          <a:p>
+            <a:pPr>
+              <a:defRPr sz="1700">
+                <a:solidFill>
+                  <a:srgbClr val="333333"/>
+                </a:solidFill>
+                <a:latin typeface="Calibri"/>
+              </a:defRPr>
+            </a:pPr>
+            <a:r>
+              <a:t>Idempotent tasks/modules; Ansible is agentless (SSH), no state file.</a:t>
+            </a:r>
+          </a:p>
+          <a:p>
+            <a:pPr>
+              <a:defRPr sz="1700">
+                <a:solidFill>
+                  <a:srgbClr val="333333"/>
+                </a:solidFill>
+                <a:latin typeface="Calibri"/>
+              </a:defRPr>
+            </a:pPr>
+            <a:r>
+              <a:t>Answers: HOW is each machine configured?</a:t>
+            </a:r>
+          </a:p>
+          <a:p>
+            <a:pPr>
+              <a:defRPr sz="1700">
+                <a:solidFill>
+                  <a:srgbClr val="333333"/>
+                </a:solidFill>
+                <a:latin typeface="Calibri"/>
+              </a:defRPr>
+            </a:pPr>
+          </a:p>
+          <a:p>
+            <a:pPr>
+              <a:defRPr sz="1700">
+                <a:solidFill>
+                  <a:srgbClr val="333333"/>
+                </a:solidFill>
+                <a:latin typeface="Calibri"/>
+              </a:defRPr>
+            </a:pPr>
+            <a:r>
+              <a:t>Still essential for VMs, bare metal, network devices, appliances.</a:t>
             </a:r>
           </a:p>
         </p:txBody>
@@ -9271,7 +9878,272 @@
 </p:sld>
 </file>
 
-<file path=ppt/slides/slide8.xml><?xml version="1.0" encoding="utf-8"?>
+<file path=ppt/slides/slide33.xml><?xml version="1.0" encoding="utf-8"?>
+<p:sld xmlns:a="http://schemas.openxmlformats.org/drawingml/2006/main" xmlns:p="http://schemas.openxmlformats.org/presentationml/2006/main" xmlns:r="http://schemas.openxmlformats.org/officeDocument/2006/relationships">
+  <p:cSld>
+    <p:spTree>
+      <p:nvGrpSpPr>
+        <p:cNvPr id="1" name=""/>
+        <p:cNvGrpSpPr/>
+        <p:nvPr/>
+      </p:nvGrpSpPr>
+      <p:grpSpPr/>
+      <p:sp>
+        <p:nvSpPr>
+          <p:cNvPr id="2" name="Title 1"/>
+          <p:cNvSpPr>
+            <a:spLocks noGrp="1"/>
+          </p:cNvSpPr>
+          <p:nvPr>
+            <p:ph type="title"/>
+          </p:nvPr>
+        </p:nvSpPr>
+        <p:spPr/>
+        <p:txBody>
+          <a:bodyPr/>
+          <a:lstStyle/>
+          <a:p>
+            <a:r>
+              <a:rPr sz="3200" b="1">
+                <a:solidFill>
+                  <a:srgbClr val="1A3C6C"/>
+                </a:solidFill>
+                <a:latin typeface="Calibri"/>
+              </a:rPr>
+              <a:t>Terraform's Mental Model in Five Concepts</a:t>
+            </a:r>
+          </a:p>
+        </p:txBody>
+      </p:sp>
+      <p:sp>
+        <p:nvSpPr>
+          <p:cNvPr id="3" name="Content Placeholder 2"/>
+          <p:cNvSpPr>
+            <a:spLocks noGrp="1"/>
+          </p:cNvSpPr>
+          <p:nvPr>
+            <p:ph idx="1"/>
+          </p:nvPr>
+        </p:nvSpPr>
+        <p:spPr/>
+        <p:txBody>
+          <a:bodyPr/>
+          <a:lstStyle/>
+          <a:p>
+            <a:pPr>
+              <a:defRPr sz="1900">
+                <a:solidFill>
+                  <a:srgbClr val="333333"/>
+                </a:solidFill>
+                <a:latin typeface="Calibri"/>
+              </a:defRPr>
+            </a:pPr>
+            <a:r>
+              <a:t>PROVIDER: plugin that speaks one platform's API (docker, aws, azurerm, kubernetes...).</a:t>
+            </a:r>
+          </a:p>
+          <a:p>
+            <a:pPr>
+              <a:defRPr sz="1900">
+                <a:solidFill>
+                  <a:srgbClr val="333333"/>
+                </a:solidFill>
+                <a:latin typeface="Calibri"/>
+              </a:defRPr>
+            </a:pPr>
+            <a:r>
+              <a:t>RESOURCE: one declared object - a network, a container, a DNS record.</a:t>
+            </a:r>
+          </a:p>
+          <a:p>
+            <a:pPr>
+              <a:defRPr sz="1900">
+                <a:solidFill>
+                  <a:srgbClr val="333333"/>
+                </a:solidFill>
+                <a:latin typeface="Calibri"/>
+              </a:defRPr>
+            </a:pPr>
+            <a:r>
+              <a:t>VARIABLES / OUTPUTS: parameterise modules in; export facts out.</a:t>
+            </a:r>
+          </a:p>
+          <a:p>
+            <a:pPr>
+              <a:defRPr sz="1900">
+                <a:solidFill>
+                  <a:srgbClr val="333333"/>
+                </a:solidFill>
+                <a:latin typeface="Calibri"/>
+              </a:defRPr>
+            </a:pPr>
+            <a:r>
+              <a:t>STATE: the mapping between declarations and reality (remote + locked in teams).</a:t>
+            </a:r>
+          </a:p>
+          <a:p>
+            <a:pPr>
+              <a:defRPr sz="1900">
+                <a:solidFill>
+                  <a:srgbClr val="333333"/>
+                </a:solidFill>
+                <a:latin typeface="Calibri"/>
+              </a:defRPr>
+            </a:pPr>
+            <a:r>
+              <a:t>MODULE: a reusable, versioned package of resources - the platform team's product unit.</a:t>
+            </a:r>
+          </a:p>
+        </p:txBody>
+      </p:sp>
+    </p:spTree>
+  </p:cSld>
+  <p:clrMapOvr>
+    <a:masterClrMapping/>
+  </p:clrMapOvr>
+</p:sld>
+</file>
+
+<file path=ppt/slides/slide34.xml><?xml version="1.0" encoding="utf-8"?>
+<p:sld xmlns:a="http://schemas.openxmlformats.org/drawingml/2006/main" xmlns:p="http://schemas.openxmlformats.org/presentationml/2006/main" xmlns:r="http://schemas.openxmlformats.org/officeDocument/2006/relationships">
+  <p:cSld>
+    <p:spTree>
+      <p:nvGrpSpPr>
+        <p:cNvPr id="1" name=""/>
+        <p:cNvGrpSpPr/>
+        <p:nvPr/>
+      </p:nvGrpSpPr>
+      <p:grpSpPr/>
+      <p:sp>
+        <p:nvSpPr>
+          <p:cNvPr id="2" name="Title 1"/>
+          <p:cNvSpPr>
+            <a:spLocks noGrp="1"/>
+          </p:cNvSpPr>
+          <p:nvPr>
+            <p:ph type="title"/>
+          </p:nvPr>
+        </p:nvSpPr>
+        <p:spPr/>
+        <p:txBody>
+          <a:bodyPr/>
+          <a:lstStyle/>
+          <a:p>
+            <a:r>
+              <a:rPr sz="3200" b="1">
+                <a:solidFill>
+                  <a:srgbClr val="1A3C6C"/>
+                </a:solidFill>
+                <a:latin typeface="Calibri"/>
+              </a:rPr>
+              <a:t>IaC Best Practices (the Production Checklist)</a:t>
+            </a:r>
+          </a:p>
+        </p:txBody>
+      </p:sp>
+      <p:sp>
+        <p:nvSpPr>
+          <p:cNvPr id="3" name="Content Placeholder 2"/>
+          <p:cNvSpPr>
+            <a:spLocks noGrp="1"/>
+          </p:cNvSpPr>
+          <p:nvPr>
+            <p:ph idx="1"/>
+          </p:nvPr>
+        </p:nvSpPr>
+        <p:spPr/>
+        <p:txBody>
+          <a:bodyPr/>
+          <a:lstStyle/>
+          <a:p>
+            <a:pPr>
+              <a:defRPr sz="1900">
+                <a:solidFill>
+                  <a:srgbClr val="333333"/>
+                </a:solidFill>
+                <a:latin typeface="Calibri"/>
+              </a:defRPr>
+            </a:pPr>
+            <a:r>
+              <a:t>Everything through PRs; plan runs in CI and its diff is part of the review.</a:t>
+            </a:r>
+          </a:p>
+          <a:p>
+            <a:pPr>
+              <a:defRPr sz="1900">
+                <a:solidFill>
+                  <a:srgbClr val="333333"/>
+                </a:solidFill>
+                <a:latin typeface="Calibri"/>
+              </a:defRPr>
+            </a:pPr>
+            <a:r>
+              <a:t>Remote state with locking; never local state for shared infrastructure.</a:t>
+            </a:r>
+          </a:p>
+          <a:p>
+            <a:pPr>
+              <a:defRPr sz="1900">
+                <a:solidFill>
+                  <a:srgbClr val="333333"/>
+                </a:solidFill>
+                <a:latin typeface="Calibri"/>
+              </a:defRPr>
+            </a:pPr>
+            <a:r>
+              <a:t>Commit the lock file; pin provider and module versions deliberately.</a:t>
+            </a:r>
+          </a:p>
+          <a:p>
+            <a:pPr>
+              <a:defRPr sz="1900">
+                <a:solidFill>
+                  <a:srgbClr val="333333"/>
+                </a:solidFill>
+                <a:latin typeface="Calibri"/>
+              </a:defRPr>
+            </a:pPr>
+            <a:r>
+              <a:t>Scan IaC like code: trivy config / checkov / tfsec in the pipeline.</a:t>
+            </a:r>
+          </a:p>
+          <a:p>
+            <a:pPr>
+              <a:defRPr sz="1900">
+                <a:solidFill>
+                  <a:srgbClr val="333333"/>
+                </a:solidFill>
+                <a:latin typeface="Calibri"/>
+              </a:defRPr>
+            </a:pPr>
+            <a:r>
+              <a:t>No secrets in code OR state-visible places; use a secrets manager reference.</a:t>
+            </a:r>
+          </a:p>
+          <a:p>
+            <a:pPr>
+              <a:defRPr sz="1900">
+                <a:solidFill>
+                  <a:srgbClr val="333333"/>
+                </a:solidFill>
+                <a:latin typeface="Calibri"/>
+              </a:defRPr>
+            </a:pPr>
+            <a:r>
+              <a:t>Small, composable modules over one giant configuration; tag everything for cost/ownership.</a:t>
+            </a:r>
+          </a:p>
+        </p:txBody>
+      </p:sp>
+    </p:spTree>
+  </p:cSld>
+  <p:clrMapOvr>
+    <a:masterClrMapping/>
+  </p:clrMapOvr>
+</p:sld>
+</file>
+
+<file path=ppt/slides/slide35.xml><?xml version="1.0" encoding="utf-8"?>
 <p:sld xmlns:a="http://schemas.openxmlformats.org/drawingml/2006/main" xmlns:p="http://schemas.openxmlformats.org/presentationml/2006/main" xmlns:r="http://schemas.openxmlformats.org/officeDocument/2006/relationships">
   <p:cSld>
     <p:spTree>
@@ -9327,7 +10199,7 @@
                 </a:solidFill>
                 <a:latin typeface="Calibri"/>
               </a:rPr>
-              <a:t>Key Takeaway</a:t>
+              <a:t>Module 4 - Key Takeaway</a:t>
             </a:r>
           </a:p>
         </p:txBody>
@@ -9362,7 +10234,7 @@
                 </a:solidFill>
                 <a:latin typeface="Calibri"/>
               </a:rPr>
-              <a:t>"Platform engineering turns DevOps from a heroic individual effort into a repeatable, scalable organisational capability."</a:t>
+              <a:t>"Infrastructure as Code is not scripts in Git. It is making your infrastructure reviewable, reproducible and disposable - the plan diff is a safety mechanism, and the Git history is your audit trail."</a:t>
             </a:r>
           </a:p>
         </p:txBody>
@@ -9410,7 +10282,7 @@
 </p:sld>
 </file>
 
-<file path=ppt/slides/slide9.xml><?xml version="1.0" encoding="utf-8"?>
+<file path=ppt/slides/slide36.xml><?xml version="1.0" encoding="utf-8"?>
 <p:sld xmlns:a="http://schemas.openxmlformats.org/drawingml/2006/main" xmlns:p="http://schemas.openxmlformats.org/presentationml/2006/main" xmlns:r="http://schemas.openxmlformats.org/officeDocument/2006/relationships">
   <p:cSld>
     <p:spTree>
@@ -9510,11 +10382,2035 @@
                 </a:solidFill>
                 <a:latin typeface="Calibri"/>
               </a:rPr>
-              <a:t>Module 2</a:t>
+              <a:t>Module 5</a:t>
             </a:r>
             <a:br/>
             <a:r>
-              <a:t>Culture and Collaboration</a:t>
+              <a:t>Continuous Integration and Continuous Delivery</a:t>
+            </a:r>
+          </a:p>
+        </p:txBody>
+      </p:sp>
+    </p:spTree>
+  </p:cSld>
+  <p:clrMapOvr>
+    <a:masterClrMapping/>
+  </p:clrMapOvr>
+</p:sld>
+</file>
+
+<file path=ppt/slides/slide37.xml><?xml version="1.0" encoding="utf-8"?>
+<p:sld xmlns:a="http://schemas.openxmlformats.org/drawingml/2006/main" xmlns:p="http://schemas.openxmlformats.org/presentationml/2006/main" xmlns:r="http://schemas.openxmlformats.org/officeDocument/2006/relationships">
+  <p:cSld>
+    <p:spTree>
+      <p:nvGrpSpPr>
+        <p:cNvPr id="1" name=""/>
+        <p:cNvGrpSpPr/>
+        <p:nvPr/>
+      </p:nvGrpSpPr>
+      <p:grpSpPr/>
+      <p:sp>
+        <p:nvSpPr>
+          <p:cNvPr id="2" name="Title 1"/>
+          <p:cNvSpPr>
+            <a:spLocks noGrp="1"/>
+          </p:cNvSpPr>
+          <p:nvPr>
+            <p:ph type="title"/>
+          </p:nvPr>
+        </p:nvSpPr>
+        <p:spPr/>
+        <p:txBody>
+          <a:bodyPr/>
+          <a:lstStyle/>
+          <a:p>
+            <a:r>
+              <a:rPr sz="3200" b="1">
+                <a:solidFill>
+                  <a:srgbClr val="1A3C6C"/>
+                </a:solidFill>
+                <a:latin typeface="Calibri"/>
+              </a:rPr>
+              <a:t>Continuous Integration - Small Batches, Always Green</a:t>
+            </a:r>
+          </a:p>
+        </p:txBody>
+      </p:sp>
+      <p:sp>
+        <p:nvSpPr>
+          <p:cNvPr id="3" name="Content Placeholder 2"/>
+          <p:cNvSpPr>
+            <a:spLocks noGrp="1"/>
+          </p:cNvSpPr>
+          <p:nvPr>
+            <p:ph idx="1"/>
+          </p:nvPr>
+        </p:nvSpPr>
+        <p:spPr/>
+        <p:txBody>
+          <a:bodyPr/>
+          <a:lstStyle/>
+          <a:p>
+            <a:pPr>
+              <a:defRPr sz="1900">
+                <a:solidFill>
+                  <a:srgbClr val="333333"/>
+                </a:solidFill>
+                <a:latin typeface="Calibri"/>
+              </a:defRPr>
+            </a:pPr>
+            <a:r>
+              <a:t>CI = merge to shared mainline at least daily, verified by automated build + tests.</a:t>
+            </a:r>
+          </a:p>
+          <a:p>
+            <a:pPr>
+              <a:defRPr sz="1900">
+                <a:solidFill>
+                  <a:srgbClr val="333333"/>
+                </a:solidFill>
+                <a:latin typeface="Calibri"/>
+              </a:defRPr>
+            </a:pPr>
+            <a:r>
+              <a:t>The enemy is BATCH SIZE: risk grows super-linearly with change size.</a:t>
+            </a:r>
+          </a:p>
+          <a:p>
+            <a:pPr>
+              <a:defRPr sz="1900">
+                <a:solidFill>
+                  <a:srgbClr val="333333"/>
+                </a:solidFill>
+                <a:latin typeface="Calibri"/>
+              </a:defRPr>
+            </a:pPr>
+            <a:r>
+              <a:t>Long-lived branches = integration debt: conflicts compound, feedback arrives weeks late.</a:t>
+            </a:r>
+          </a:p>
+          <a:p>
+            <a:pPr>
+              <a:defRPr sz="1900">
+                <a:solidFill>
+                  <a:srgbClr val="333333"/>
+                </a:solidFill>
+                <a:latin typeface="Calibri"/>
+              </a:defRPr>
+            </a:pPr>
+            <a:r>
+              <a:t>A red mainline is a stop-the-line event (Toyota andon cord) - fixing it beats all feature work.</a:t>
+            </a:r>
+          </a:p>
+          <a:p>
+            <a:pPr>
+              <a:defRPr sz="1900">
+                <a:solidFill>
+                  <a:srgbClr val="333333"/>
+                </a:solidFill>
+                <a:latin typeface="Calibri"/>
+              </a:defRPr>
+            </a:pPr>
+            <a:r>
+              <a:t>Trunk-based development + feature flags = integrate always, release selectively.</a:t>
+            </a:r>
+          </a:p>
+        </p:txBody>
+      </p:sp>
+    </p:spTree>
+  </p:cSld>
+  <p:clrMapOvr>
+    <a:masterClrMapping/>
+  </p:clrMapOvr>
+</p:sld>
+</file>
+
+<file path=ppt/slides/slide38.xml><?xml version="1.0" encoding="utf-8"?>
+<p:sld xmlns:a="http://schemas.openxmlformats.org/drawingml/2006/main" xmlns:p="http://schemas.openxmlformats.org/presentationml/2006/main" xmlns:r="http://schemas.openxmlformats.org/officeDocument/2006/relationships">
+  <p:cSld>
+    <p:spTree>
+      <p:nvGrpSpPr>
+        <p:cNvPr id="1" name=""/>
+        <p:cNvGrpSpPr/>
+        <p:nvPr/>
+      </p:nvGrpSpPr>
+      <p:grpSpPr/>
+      <p:sp>
+        <p:nvSpPr>
+          <p:cNvPr id="2" name="Title 1"/>
+          <p:cNvSpPr>
+            <a:spLocks noGrp="1"/>
+          </p:cNvSpPr>
+          <p:nvPr>
+            <p:ph type="title"/>
+          </p:nvPr>
+        </p:nvSpPr>
+        <p:spPr/>
+        <p:txBody>
+          <a:bodyPr/>
+          <a:lstStyle/>
+          <a:p>
+            <a:r>
+              <a:rPr sz="3200" b="1">
+                <a:solidFill>
+                  <a:srgbClr val="1A3C6C"/>
+                </a:solidFill>
+                <a:latin typeface="Calibri"/>
+              </a:rPr>
+              <a:t>Delivery vs Deployment - and Deploy vs Release</a:t>
+            </a:r>
+          </a:p>
+        </p:txBody>
+      </p:sp>
+      <p:sp>
+        <p:nvSpPr>
+          <p:cNvPr id="3" name="Content Placeholder 2"/>
+          <p:cNvSpPr>
+            <a:spLocks noGrp="1"/>
+          </p:cNvSpPr>
+          <p:nvPr>
+            <p:ph idx="1"/>
+          </p:nvPr>
+        </p:nvSpPr>
+        <p:spPr/>
+        <p:txBody>
+          <a:bodyPr/>
+          <a:lstStyle/>
+          <a:p>
+            <a:pPr>
+              <a:defRPr sz="1900">
+                <a:solidFill>
+                  <a:srgbClr val="333333"/>
+                </a:solidFill>
+                <a:latin typeface="Calibri"/>
+              </a:defRPr>
+            </a:pPr>
+            <a:r>
+              <a:t>Continuous DELIVERY: every commit leaves the pipeline deployABLE; a human chooses when.</a:t>
+            </a:r>
+          </a:p>
+          <a:p>
+            <a:pPr>
+              <a:defRPr sz="1900">
+                <a:solidFill>
+                  <a:srgbClr val="333333"/>
+                </a:solidFill>
+                <a:latin typeface="Calibri"/>
+              </a:defRPr>
+            </a:pPr>
+            <a:r>
+              <a:t>Continuous DEPLOYMENT: green pipeline -&gt; production automatically; no human in the loop.</a:t>
+            </a:r>
+          </a:p>
+          <a:p>
+            <a:pPr>
+              <a:defRPr sz="1900">
+                <a:solidFill>
+                  <a:srgbClr val="333333"/>
+                </a:solidFill>
+                <a:latin typeface="Calibri"/>
+              </a:defRPr>
+            </a:pPr>
+            <a:r>
+              <a:t>DEPLOY = bits are running. RELEASE = users can see it. Flags/canaries separate the two.</a:t>
+            </a:r>
+          </a:p>
+          <a:p>
+            <a:pPr>
+              <a:defRPr sz="1900">
+                <a:solidFill>
+                  <a:srgbClr val="333333"/>
+                </a:solidFill>
+                <a:latin typeface="Calibri"/>
+              </a:defRPr>
+            </a:pPr>
+            <a:r>
+              <a:t>Build ONCE, promote the same immutable artifact through every environment.</a:t>
+            </a:r>
+          </a:p>
+          <a:p>
+            <a:pPr>
+              <a:defRPr sz="1900">
+                <a:solidFill>
+                  <a:srgbClr val="333333"/>
+                </a:solidFill>
+                <a:latin typeface="Calibri"/>
+              </a:defRPr>
+            </a:pPr>
+            <a:r>
+              <a:t>If deploys hurt, do them more often - frequency forces the pain to be automated away.</a:t>
+            </a:r>
+          </a:p>
+        </p:txBody>
+      </p:sp>
+    </p:spTree>
+  </p:cSld>
+  <p:clrMapOvr>
+    <a:masterClrMapping/>
+  </p:clrMapOvr>
+</p:sld>
+</file>
+
+<file path=ppt/slides/slide39.xml><?xml version="1.0" encoding="utf-8"?>
+<p:sld xmlns:a="http://schemas.openxmlformats.org/drawingml/2006/main" xmlns:p="http://schemas.openxmlformats.org/presentationml/2006/main" xmlns:r="http://schemas.openxmlformats.org/officeDocument/2006/relationships">
+  <p:cSld>
+    <p:spTree>
+      <p:nvGrpSpPr>
+        <p:cNvPr id="1" name=""/>
+        <p:cNvGrpSpPr/>
+        <p:nvPr/>
+      </p:nvGrpSpPr>
+      <p:grpSpPr/>
+      <p:sp>
+        <p:nvSpPr>
+          <p:cNvPr id="2" name="Title 1"/>
+          <p:cNvSpPr>
+            <a:spLocks noGrp="1"/>
+          </p:cNvSpPr>
+          <p:nvPr>
+            <p:ph type="title"/>
+          </p:nvPr>
+        </p:nvSpPr>
+        <p:spPr/>
+        <p:txBody>
+          <a:bodyPr/>
+          <a:lstStyle/>
+          <a:p/>
+        </p:txBody>
+      </p:sp>
+      <p:sp>
+        <p:nvSpPr>
+          <p:cNvPr id="3" name="TextBox 2"/>
+          <p:cNvSpPr txBox="1"/>
+          <p:nvPr/>
+        </p:nvSpPr>
+        <p:spPr>
+          <a:xfrm>
+            <a:off x="457200" y="274320"/>
+            <a:ext cx="8229600" cy="731520"/>
+          </a:xfrm>
+          <a:prstGeom prst="rect">
+            <a:avLst/>
+          </a:prstGeom>
+          <a:noFill/>
+        </p:spPr>
+        <p:txBody>
+          <a:bodyPr wrap="none">
+            <a:spAutoFit/>
+          </a:bodyPr>
+          <a:lstStyle/>
+          <a:p>
+            <a:r>
+              <a:rPr sz="3000" b="1">
+                <a:solidFill>
+                  <a:srgbClr val="1A3C6C"/>
+                </a:solidFill>
+                <a:latin typeface="Calibri"/>
+              </a:rPr>
+              <a:t>Anatomy of the Pipeline</a:t>
+            </a:r>
+          </a:p>
+        </p:txBody>
+      </p:sp>
+      <p:pic>
+        <p:nvPicPr>
+          <p:cNvPr id="4" name="Picture 3" descr="02-cicd-pipeline.png"/>
+          <p:cNvPicPr>
+            <a:picLocks noChangeAspect="1"/>
+          </p:cNvPicPr>
+          <p:nvPr/>
+        </p:nvPicPr>
+        <p:blipFill>
+          <a:blip r:embed="rId2"/>
+          <a:stretch>
+            <a:fillRect/>
+          </a:stretch>
+        </p:blipFill>
+        <p:spPr>
+          <a:xfrm>
+            <a:off x="914400" y="1097280"/>
+            <a:ext cx="7315200" cy="3386172"/>
+          </a:xfrm>
+          <a:prstGeom prst="rect">
+            <a:avLst/>
+          </a:prstGeom>
+        </p:spPr>
+      </p:pic>
+      <p:sp>
+        <p:nvSpPr>
+          <p:cNvPr id="5" name="TextBox 4"/>
+          <p:cNvSpPr txBox="1"/>
+          <p:nvPr/>
+        </p:nvSpPr>
+        <p:spPr>
+          <a:xfrm>
+            <a:off x="457200" y="5943600"/>
+            <a:ext cx="8229600" cy="731520"/>
+          </a:xfrm>
+          <a:prstGeom prst="rect">
+            <a:avLst/>
+          </a:prstGeom>
+          <a:noFill/>
+        </p:spPr>
+        <p:txBody>
+          <a:bodyPr wrap="none">
+            <a:spAutoFit/>
+          </a:bodyPr>
+          <a:lstStyle/>
+          <a:p>
+            <a:pPr algn="ctr"/>
+            <a:r>
+              <a:rPr sz="1600" b="0">
+                <a:solidFill>
+                  <a:srgbClr val="333333"/>
+                </a:solidFill>
+                <a:latin typeface="Calibri"/>
+              </a:rPr>
+              <a:t>CI proves the change; CD promotes the artifact; every stage can say no.</a:t>
+            </a:r>
+          </a:p>
+        </p:txBody>
+      </p:sp>
+    </p:spTree>
+  </p:cSld>
+  <p:clrMapOvr>
+    <a:masterClrMapping/>
+  </p:clrMapOvr>
+</p:sld>
+</file>
+
+<file path=ppt/slides/slide4.xml><?xml version="1.0" encoding="utf-8"?>
+<p:sld xmlns:a="http://schemas.openxmlformats.org/drawingml/2006/main" xmlns:p="http://schemas.openxmlformats.org/presentationml/2006/main" xmlns:r="http://schemas.openxmlformats.org/officeDocument/2006/relationships">
+  <p:cSld>
+    <p:spTree>
+      <p:nvGrpSpPr>
+        <p:cNvPr id="1" name=""/>
+        <p:cNvGrpSpPr/>
+        <p:nvPr/>
+      </p:nvGrpSpPr>
+      <p:grpSpPr/>
+      <p:sp>
+        <p:nvSpPr>
+          <p:cNvPr id="2" name="Title 1"/>
+          <p:cNvSpPr>
+            <a:spLocks noGrp="1"/>
+          </p:cNvSpPr>
+          <p:nvPr>
+            <p:ph type="title"/>
+          </p:nvPr>
+        </p:nvSpPr>
+        <p:spPr/>
+        <p:txBody>
+          <a:bodyPr/>
+          <a:lstStyle/>
+          <a:p>
+            <a:r>
+              <a:rPr sz="3200" b="1">
+                <a:solidFill>
+                  <a:srgbClr val="1A3C6C"/>
+                </a:solidFill>
+                <a:latin typeface="Calibri"/>
+              </a:rPr>
+              <a:t>What DevOps Is (and Is Not)</a:t>
+            </a:r>
+          </a:p>
+        </p:txBody>
+      </p:sp>
+      <p:sp>
+        <p:nvSpPr>
+          <p:cNvPr id="3" name="Content Placeholder 2"/>
+          <p:cNvSpPr>
+            <a:spLocks noGrp="1"/>
+          </p:cNvSpPr>
+          <p:nvPr>
+            <p:ph idx="1"/>
+          </p:nvPr>
+        </p:nvSpPr>
+        <p:spPr/>
+        <p:txBody>
+          <a:bodyPr/>
+          <a:lstStyle/>
+          <a:p>
+            <a:pPr>
+              <a:defRPr sz="1900">
+                <a:solidFill>
+                  <a:srgbClr val="333333"/>
+                </a:solidFill>
+                <a:latin typeface="Calibri"/>
+              </a:defRPr>
+            </a:pPr>
+            <a:r>
+              <a:t>A set of practices + a culture that unify development and operations around flow of value.</a:t>
+            </a:r>
+          </a:p>
+          <a:p>
+            <a:pPr>
+              <a:defRPr sz="1900">
+                <a:solidFill>
+                  <a:srgbClr val="333333"/>
+                </a:solidFill>
+                <a:latin typeface="Calibri"/>
+              </a:defRPr>
+            </a:pPr>
+            <a:r>
+              <a:t>Goal: shorten lead time from idea to production WITHOUT sacrificing stability.</a:t>
+            </a:r>
+          </a:p>
+          <a:p>
+            <a:pPr>
+              <a:defRPr sz="1900">
+                <a:solidFill>
+                  <a:srgbClr val="333333"/>
+                </a:solidFill>
+                <a:latin typeface="Calibri"/>
+              </a:defRPr>
+            </a:pPr>
+            <a:r>
+              <a:t>It is NOT: a job title, a team you hire, a tool you buy, or 'Ops with Jenkins'.</a:t>
+            </a:r>
+          </a:p>
+          <a:p>
+            <a:pPr>
+              <a:defRPr sz="1900">
+                <a:solidFill>
+                  <a:srgbClr val="333333"/>
+                </a:solidFill>
+                <a:latin typeface="Calibri"/>
+              </a:defRPr>
+            </a:pPr>
+            <a:r>
+              <a:t>'You build it, you run it' (Werner Vogels, Amazon 2006) - ownership follows the code.</a:t>
+            </a:r>
+          </a:p>
+          <a:p>
+            <a:pPr>
+              <a:defRPr sz="1900">
+                <a:solidFill>
+                  <a:srgbClr val="333333"/>
+                </a:solidFill>
+                <a:latin typeface="Calibri"/>
+              </a:defRPr>
+            </a:pPr>
+            <a:r>
+              <a:t>DevOps applies lean manufacturing thinking to software delivery.</a:t>
+            </a:r>
+          </a:p>
+        </p:txBody>
+      </p:sp>
+    </p:spTree>
+  </p:cSld>
+  <p:clrMapOvr>
+    <a:masterClrMapping/>
+  </p:clrMapOvr>
+</p:sld>
+</file>
+
+<file path=ppt/slides/slide40.xml><?xml version="1.0" encoding="utf-8"?>
+<p:sld xmlns:a="http://schemas.openxmlformats.org/drawingml/2006/main" xmlns:p="http://schemas.openxmlformats.org/presentationml/2006/main" xmlns:r="http://schemas.openxmlformats.org/officeDocument/2006/relationships">
+  <p:cSld>
+    <p:spTree>
+      <p:nvGrpSpPr>
+        <p:cNvPr id="1" name=""/>
+        <p:cNvGrpSpPr/>
+        <p:nvPr/>
+      </p:nvGrpSpPr>
+      <p:grpSpPr/>
+      <p:sp>
+        <p:nvSpPr>
+          <p:cNvPr id="2" name="Title 1"/>
+          <p:cNvSpPr>
+            <a:spLocks noGrp="1"/>
+          </p:cNvSpPr>
+          <p:nvPr>
+            <p:ph type="title"/>
+          </p:nvPr>
+        </p:nvSpPr>
+        <p:spPr/>
+        <p:txBody>
+          <a:bodyPr/>
+          <a:lstStyle/>
+          <a:p>
+            <a:r>
+              <a:rPr sz="3200" b="1">
+                <a:solidFill>
+                  <a:srgbClr val="1A3C6C"/>
+                </a:solidFill>
+                <a:latin typeface="Calibri"/>
+              </a:rPr>
+              <a:t>A Scan Is Not a Gate</a:t>
+            </a:r>
+          </a:p>
+        </p:txBody>
+      </p:sp>
+      <p:sp>
+        <p:nvSpPr>
+          <p:cNvPr id="3" name="Content Placeholder 2"/>
+          <p:cNvSpPr>
+            <a:spLocks noGrp="1"/>
+          </p:cNvSpPr>
+          <p:nvPr>
+            <p:ph idx="1"/>
+          </p:nvPr>
+        </p:nvSpPr>
+        <p:spPr/>
+        <p:txBody>
+          <a:bodyPr/>
+          <a:lstStyle/>
+          <a:p>
+            <a:pPr>
+              <a:defRPr sz="1900">
+                <a:solidFill>
+                  <a:srgbClr val="333333"/>
+                </a:solidFill>
+                <a:latin typeface="Calibri"/>
+              </a:defRPr>
+            </a:pPr>
+            <a:r>
+              <a:t>Report step: results visible, build stays green (exit-code 0) - awareness only.</a:t>
+            </a:r>
+          </a:p>
+          <a:p>
+            <a:pPr>
+              <a:defRPr sz="1900">
+                <a:solidFill>
+                  <a:srgbClr val="333333"/>
+                </a:solidFill>
+                <a:latin typeface="Calibri"/>
+              </a:defRPr>
+            </a:pPr>
+            <a:r>
+              <a:t>Gate step: build FAILS on actionable findings (exit-code 1) - behaviour change.</a:t>
+            </a:r>
+          </a:p>
+          <a:p>
+            <a:pPr>
+              <a:defRPr sz="1900">
+                <a:solidFill>
+                  <a:srgbClr val="333333"/>
+                </a:solidFill>
+                <a:latin typeface="Calibri"/>
+              </a:defRPr>
+            </a:pPr>
+            <a:r>
+              <a:t>Gate on FIXABLE criticals; failing on unfixable CVEs teaches people to ignore red.</a:t>
+            </a:r>
+          </a:p>
+          <a:p>
+            <a:pPr>
+              <a:defRPr sz="1900">
+                <a:solidFill>
+                  <a:srgbClr val="333333"/>
+                </a:solidFill>
+                <a:latin typeface="Calibri"/>
+              </a:defRPr>
+            </a:pPr>
+            <a:r>
+              <a:t>Pin third-party pipeline actions to versions - your pipeline is supply chain too.</a:t>
+            </a:r>
+          </a:p>
+          <a:p>
+            <a:pPr>
+              <a:defRPr sz="1900">
+                <a:solidFill>
+                  <a:srgbClr val="333333"/>
+                </a:solidFill>
+                <a:latin typeface="Calibri"/>
+              </a:defRPr>
+            </a:pPr>
+            <a:r>
+              <a:t>Least-privilege pipeline tokens: 'permissions: contents: read' unless proven otherwise.</a:t>
+            </a:r>
+          </a:p>
+        </p:txBody>
+      </p:sp>
+    </p:spTree>
+  </p:cSld>
+  <p:clrMapOvr>
+    <a:masterClrMapping/>
+  </p:clrMapOvr>
+</p:sld>
+</file>
+
+<file path=ppt/slides/slide41.xml><?xml version="1.0" encoding="utf-8"?>
+<p:sld xmlns:a="http://schemas.openxmlformats.org/drawingml/2006/main" xmlns:p="http://schemas.openxmlformats.org/presentationml/2006/main" xmlns:r="http://schemas.openxmlformats.org/officeDocument/2006/relationships">
+  <p:cSld>
+    <p:spTree>
+      <p:nvGrpSpPr>
+        <p:cNvPr id="1" name=""/>
+        <p:cNvGrpSpPr/>
+        <p:nvPr/>
+      </p:nvGrpSpPr>
+      <p:grpSpPr/>
+      <p:sp>
+        <p:nvSpPr>
+          <p:cNvPr id="2" name="Title 1"/>
+          <p:cNvSpPr>
+            <a:spLocks noGrp="1"/>
+          </p:cNvSpPr>
+          <p:nvPr>
+            <p:ph type="title"/>
+          </p:nvPr>
+        </p:nvSpPr>
+        <p:spPr/>
+        <p:txBody>
+          <a:bodyPr/>
+          <a:lstStyle/>
+          <a:p/>
+        </p:txBody>
+      </p:sp>
+      <p:sp>
+        <p:nvSpPr>
+          <p:cNvPr id="3" name="TextBox 2"/>
+          <p:cNvSpPr txBox="1"/>
+          <p:nvPr/>
+        </p:nvSpPr>
+        <p:spPr>
+          <a:xfrm>
+            <a:off x="457200" y="274320"/>
+            <a:ext cx="8229600" cy="731520"/>
+          </a:xfrm>
+          <a:prstGeom prst="rect">
+            <a:avLst/>
+          </a:prstGeom>
+          <a:noFill/>
+        </p:spPr>
+        <p:txBody>
+          <a:bodyPr wrap="none">
+            <a:spAutoFit/>
+          </a:bodyPr>
+          <a:lstStyle/>
+          <a:p>
+            <a:r>
+              <a:rPr sz="3200" b="1">
+                <a:solidFill>
+                  <a:srgbClr val="1A3C6C"/>
+                </a:solidFill>
+                <a:latin typeface="Calibri"/>
+              </a:rPr>
+              <a:t>Deployment Strategies</a:t>
+            </a:r>
+          </a:p>
+        </p:txBody>
+      </p:sp>
+      <p:sp>
+        <p:nvSpPr>
+          <p:cNvPr id="4" name="TextBox 3"/>
+          <p:cNvSpPr txBox="1"/>
+          <p:nvPr/>
+        </p:nvSpPr>
+        <p:spPr>
+          <a:xfrm>
+            <a:off x="457200" y="1188720"/>
+            <a:ext cx="3931920" cy="5029200"/>
+          </a:xfrm>
+          <a:prstGeom prst="rect">
+            <a:avLst/>
+          </a:prstGeom>
+          <a:noFill/>
+        </p:spPr>
+        <p:txBody>
+          <a:bodyPr wrap="square">
+            <a:spAutoFit/>
+          </a:bodyPr>
+          <a:lstStyle/>
+          <a:p>
+            <a:pPr>
+              <a:defRPr sz="1700">
+                <a:solidFill>
+                  <a:srgbClr val="333333"/>
+                </a:solidFill>
+                <a:latin typeface="Calibri"/>
+              </a:defRPr>
+            </a:pPr>
+            <a:r>
+              <a:t>ROLLING (Kubernetes default)</a:t>
+            </a:r>
+          </a:p>
+          <a:p>
+            <a:pPr>
+              <a:defRPr sz="1700">
+                <a:solidFill>
+                  <a:srgbClr val="333333"/>
+                </a:solidFill>
+                <a:latin typeface="Calibri"/>
+              </a:defRPr>
+            </a:pPr>
+            <a:r>
+              <a:t>Replace instances gradually; zero downtime; both versions serve briefly.</a:t>
+            </a:r>
+          </a:p>
+          <a:p>
+            <a:pPr>
+              <a:defRPr sz="1700">
+                <a:solidFill>
+                  <a:srgbClr val="333333"/>
+                </a:solidFill>
+                <a:latin typeface="Calibri"/>
+              </a:defRPr>
+            </a:pPr>
+            <a:r>
+              <a:t>Cheap; needs backwards-compatible changes.</a:t>
+            </a:r>
+          </a:p>
+          <a:p>
+            <a:pPr>
+              <a:defRPr sz="1700">
+                <a:solidFill>
+                  <a:srgbClr val="333333"/>
+                </a:solidFill>
+                <a:latin typeface="Calibri"/>
+              </a:defRPr>
+            </a:pPr>
+          </a:p>
+          <a:p>
+            <a:pPr>
+              <a:defRPr sz="1700">
+                <a:solidFill>
+                  <a:srgbClr val="333333"/>
+                </a:solidFill>
+                <a:latin typeface="Calibri"/>
+              </a:defRPr>
+            </a:pPr>
+            <a:r>
+              <a:t>BLUE-GREEN</a:t>
+            </a:r>
+          </a:p>
+          <a:p>
+            <a:pPr>
+              <a:defRPr sz="1700">
+                <a:solidFill>
+                  <a:srgbClr val="333333"/>
+                </a:solidFill>
+                <a:latin typeface="Calibri"/>
+              </a:defRPr>
+            </a:pPr>
+            <a:r>
+              <a:t>Two full environments; switch traffic atomically; rollback = switch back.</a:t>
+            </a:r>
+          </a:p>
+          <a:p>
+            <a:pPr>
+              <a:defRPr sz="1700">
+                <a:solidFill>
+                  <a:srgbClr val="333333"/>
+                </a:solidFill>
+                <a:latin typeface="Calibri"/>
+              </a:defRPr>
+            </a:pPr>
+            <a:r>
+              <a:t>Instant reversal; double infrastructure cost; watch stateful cutover.</a:t>
+            </a:r>
+          </a:p>
+        </p:txBody>
+      </p:sp>
+      <p:sp>
+        <p:nvSpPr>
+          <p:cNvPr id="5" name="TextBox 4"/>
+          <p:cNvSpPr txBox="1"/>
+          <p:nvPr/>
+        </p:nvSpPr>
+        <p:spPr>
+          <a:xfrm>
+            <a:off x="4754880" y="1188720"/>
+            <a:ext cx="3931920" cy="5029200"/>
+          </a:xfrm>
+          <a:prstGeom prst="rect">
+            <a:avLst/>
+          </a:prstGeom>
+          <a:noFill/>
+        </p:spPr>
+        <p:txBody>
+          <a:bodyPr wrap="square">
+            <a:spAutoFit/>
+          </a:bodyPr>
+          <a:lstStyle/>
+          <a:p>
+            <a:pPr>
+              <a:defRPr sz="1700">
+                <a:solidFill>
+                  <a:srgbClr val="333333"/>
+                </a:solidFill>
+                <a:latin typeface="Calibri"/>
+              </a:defRPr>
+            </a:pPr>
+            <a:r>
+              <a:t>CANARY</a:t>
+            </a:r>
+          </a:p>
+          <a:p>
+            <a:pPr>
+              <a:defRPr sz="1700">
+                <a:solidFill>
+                  <a:srgbClr val="333333"/>
+                </a:solidFill>
+                <a:latin typeface="Calibri"/>
+              </a:defRPr>
+            </a:pPr>
+            <a:r>
+              <a:t>Route 1-5-25-100% of traffic to the new version, watching metrics between steps.</a:t>
+            </a:r>
+          </a:p>
+          <a:p>
+            <a:pPr>
+              <a:defRPr sz="1700">
+                <a:solidFill>
+                  <a:srgbClr val="333333"/>
+                </a:solidFill>
+                <a:latin typeface="Calibri"/>
+              </a:defRPr>
+            </a:pPr>
+            <a:r>
+              <a:t>Limits blast radius; needs traffic control + good metrics; automatable (progressive delivery).</a:t>
+            </a:r>
+          </a:p>
+          <a:p>
+            <a:pPr>
+              <a:defRPr sz="1700">
+                <a:solidFill>
+                  <a:srgbClr val="333333"/>
+                </a:solidFill>
+                <a:latin typeface="Calibri"/>
+              </a:defRPr>
+            </a:pPr>
+          </a:p>
+          <a:p>
+            <a:pPr>
+              <a:defRPr sz="1700">
+                <a:solidFill>
+                  <a:srgbClr val="333333"/>
+                </a:solidFill>
+                <a:latin typeface="Calibri"/>
+              </a:defRPr>
+            </a:pPr>
+            <a:r>
+              <a:t>SHADOW / DARK</a:t>
+            </a:r>
+          </a:p>
+          <a:p>
+            <a:pPr>
+              <a:defRPr sz="1700">
+                <a:solidFill>
+                  <a:srgbClr val="333333"/>
+                </a:solidFill>
+                <a:latin typeface="Calibri"/>
+              </a:defRPr>
+            </a:pPr>
+            <a:r>
+              <a:t>Mirror real traffic to the new version, discard responses.</a:t>
+            </a:r>
+          </a:p>
+          <a:p>
+            <a:pPr>
+              <a:defRPr sz="1700">
+                <a:solidFill>
+                  <a:srgbClr val="333333"/>
+                </a:solidFill>
+                <a:latin typeface="Calibri"/>
+              </a:defRPr>
+            </a:pPr>
+            <a:r>
+              <a:t>Production validation with zero user risk; costs double compute for the path.</a:t>
+            </a:r>
+          </a:p>
+        </p:txBody>
+      </p:sp>
+    </p:spTree>
+  </p:cSld>
+  <p:clrMapOvr>
+    <a:masterClrMapping/>
+  </p:clrMapOvr>
+</p:sld>
+</file>
+
+<file path=ppt/slides/slide42.xml><?xml version="1.0" encoding="utf-8"?>
+<p:sld xmlns:a="http://schemas.openxmlformats.org/drawingml/2006/main" xmlns:p="http://schemas.openxmlformats.org/presentationml/2006/main" xmlns:r="http://schemas.openxmlformats.org/officeDocument/2006/relationships">
+  <p:cSld>
+    <p:spTree>
+      <p:nvGrpSpPr>
+        <p:cNvPr id="1" name=""/>
+        <p:cNvGrpSpPr/>
+        <p:nvPr/>
+      </p:nvGrpSpPr>
+      <p:grpSpPr/>
+      <p:sp>
+        <p:nvSpPr>
+          <p:cNvPr id="2" name="Title 1"/>
+          <p:cNvSpPr>
+            <a:spLocks noGrp="1"/>
+          </p:cNvSpPr>
+          <p:nvPr>
+            <p:ph type="title"/>
+          </p:nvPr>
+        </p:nvSpPr>
+        <p:spPr/>
+        <p:txBody>
+          <a:bodyPr/>
+          <a:lstStyle/>
+          <a:p>
+            <a:r>
+              <a:rPr sz="3200" b="1">
+                <a:solidFill>
+                  <a:srgbClr val="1A3C6C"/>
+                </a:solidFill>
+                <a:latin typeface="Calibri"/>
+              </a:rPr>
+              <a:t>What the Platform Contributes to CI/CD</a:t>
+            </a:r>
+          </a:p>
+        </p:txBody>
+      </p:sp>
+      <p:sp>
+        <p:nvSpPr>
+          <p:cNvPr id="3" name="Content Placeholder 2"/>
+          <p:cNvSpPr>
+            <a:spLocks noGrp="1"/>
+          </p:cNvSpPr>
+          <p:nvPr>
+            <p:ph idx="1"/>
+          </p:nvPr>
+        </p:nvSpPr>
+        <p:spPr/>
+        <p:txBody>
+          <a:bodyPr/>
+          <a:lstStyle/>
+          <a:p>
+            <a:pPr>
+              <a:defRPr sz="1900">
+                <a:solidFill>
+                  <a:srgbClr val="333333"/>
+                </a:solidFill>
+                <a:latin typeface="Calibri"/>
+              </a:defRPr>
+            </a:pPr>
+            <a:r>
+              <a:t>Templated/reusable pipelines: teams inherit test-build-scan-deploy, not copy-paste YAML.</a:t>
+            </a:r>
+          </a:p>
+          <a:p>
+            <a:pPr>
+              <a:defRPr sz="1900">
+                <a:solidFill>
+                  <a:srgbClr val="333333"/>
+                </a:solidFill>
+                <a:latin typeface="Calibri"/>
+              </a:defRPr>
+            </a:pPr>
+            <a:r>
+              <a:t>Secrets management: pipeline credentials injected by the platform, never in repos.</a:t>
+            </a:r>
+          </a:p>
+          <a:p>
+            <a:pPr>
+              <a:defRPr sz="1900">
+                <a:solidFill>
+                  <a:srgbClr val="333333"/>
+                </a:solidFill>
+                <a:latin typeface="Calibri"/>
+              </a:defRPr>
+            </a:pPr>
+            <a:r>
+              <a:t>Runners, registries, environments: operated once, consumed as a service.</a:t>
+            </a:r>
+          </a:p>
+          <a:p>
+            <a:pPr>
+              <a:defRPr sz="1900">
+                <a:solidFill>
+                  <a:srgbClr val="333333"/>
+                </a:solidFill>
+                <a:latin typeface="Calibri"/>
+              </a:defRPr>
+            </a:pPr>
+            <a:r>
+              <a:t>Policy hooks: the golden-path pipeline enforces org rules invisibly (Module 7).</a:t>
+            </a:r>
+          </a:p>
+          <a:p>
+            <a:pPr>
+              <a:defRPr sz="1900">
+                <a:solidFill>
+                  <a:srgbClr val="333333"/>
+                </a:solidFill>
+                <a:latin typeface="Calibri"/>
+              </a:defRPr>
+            </a:pPr>
+            <a:r>
+              <a:t>Result: a new service reaches production on day one via the paved road.</a:t>
+            </a:r>
+          </a:p>
+        </p:txBody>
+      </p:sp>
+    </p:spTree>
+  </p:cSld>
+  <p:clrMapOvr>
+    <a:masterClrMapping/>
+  </p:clrMapOvr>
+</p:sld>
+</file>
+
+<file path=ppt/slides/slide43.xml><?xml version="1.0" encoding="utf-8"?>
+<p:sld xmlns:a="http://schemas.openxmlformats.org/drawingml/2006/main" xmlns:p="http://schemas.openxmlformats.org/presentationml/2006/main" xmlns:r="http://schemas.openxmlformats.org/officeDocument/2006/relationships">
+  <p:cSld>
+    <p:spTree>
+      <p:nvGrpSpPr>
+        <p:cNvPr id="1" name=""/>
+        <p:cNvGrpSpPr/>
+        <p:nvPr/>
+      </p:nvGrpSpPr>
+      <p:grpSpPr/>
+      <p:sp>
+        <p:nvSpPr>
+          <p:cNvPr id="2" name="Title 1"/>
+          <p:cNvSpPr>
+            <a:spLocks noGrp="1"/>
+          </p:cNvSpPr>
+          <p:nvPr>
+            <p:ph type="title"/>
+          </p:nvPr>
+        </p:nvSpPr>
+        <p:spPr/>
+        <p:txBody>
+          <a:bodyPr/>
+          <a:lstStyle/>
+          <a:p/>
+        </p:txBody>
+      </p:sp>
+      <p:sp>
+        <p:nvSpPr>
+          <p:cNvPr id="3" name="TextBox 2"/>
+          <p:cNvSpPr txBox="1"/>
+          <p:nvPr/>
+        </p:nvSpPr>
+        <p:spPr>
+          <a:xfrm>
+            <a:off x="457200" y="274320"/>
+            <a:ext cx="8229600" cy="731520"/>
+          </a:xfrm>
+          <a:prstGeom prst="rect">
+            <a:avLst/>
+          </a:prstGeom>
+          <a:noFill/>
+        </p:spPr>
+        <p:txBody>
+          <a:bodyPr wrap="none">
+            <a:spAutoFit/>
+          </a:bodyPr>
+          <a:lstStyle/>
+          <a:p>
+            <a:r>
+              <a:rPr sz="3200" b="1">
+                <a:solidFill>
+                  <a:srgbClr val="1A3C6C"/>
+                </a:solidFill>
+                <a:latin typeface="Calibri"/>
+              </a:rPr>
+              <a:t>Module 5 - Key Takeaway</a:t>
+            </a:r>
+          </a:p>
+        </p:txBody>
+      </p:sp>
+      <p:sp>
+        <p:nvSpPr>
+          <p:cNvPr id="4" name="TextBox 3"/>
+          <p:cNvSpPr txBox="1"/>
+          <p:nvPr/>
+        </p:nvSpPr>
+        <p:spPr>
+          <a:xfrm>
+            <a:off x="914400" y="1828800"/>
+            <a:ext cx="7315200" cy="3200400"/>
+          </a:xfrm>
+          <a:prstGeom prst="rect">
+            <a:avLst/>
+          </a:prstGeom>
+          <a:noFill/>
+        </p:spPr>
+        <p:txBody>
+          <a:bodyPr wrap="square">
+            <a:spAutoFit/>
+          </a:bodyPr>
+          <a:lstStyle/>
+          <a:p>
+            <a:pPr algn="ctr"/>
+            <a:r>
+              <a:rPr sz="2800" b="0">
+                <a:solidFill>
+                  <a:srgbClr val="4A90D9"/>
+                </a:solidFill>
+                <a:latin typeface="Calibri"/>
+              </a:rPr>
+              <a:t>"The pipeline is the only path to production - and that is a feature. Everything it checks is checked every time; everything it deploys can be rolled back; everything it does is written down."</a:t>
+            </a:r>
+          </a:p>
+        </p:txBody>
+      </p:sp>
+      <p:sp>
+        <p:nvSpPr>
+          <p:cNvPr id="5" name="TextBox 4"/>
+          <p:cNvSpPr txBox="1"/>
+          <p:nvPr/>
+        </p:nvSpPr>
+        <p:spPr>
+          <a:xfrm>
+            <a:off x="914400" y="5029200"/>
+            <a:ext cx="7315200" cy="731520"/>
+          </a:xfrm>
+          <a:prstGeom prst="rect">
+            <a:avLst/>
+          </a:prstGeom>
+          <a:noFill/>
+        </p:spPr>
+        <p:txBody>
+          <a:bodyPr wrap="none">
+            <a:spAutoFit/>
+          </a:bodyPr>
+          <a:lstStyle/>
+          <a:p>
+            <a:pPr algn="r"/>
+            <a:r>
+              <a:rPr sz="1800" b="0">
+                <a:solidFill>
+                  <a:srgbClr val="333333"/>
+                </a:solidFill>
+                <a:latin typeface="Calibri"/>
+              </a:rPr>
+              <a:t>— Course synthesis</a:t>
+            </a:r>
+          </a:p>
+        </p:txBody>
+      </p:sp>
+    </p:spTree>
+  </p:cSld>
+  <p:clrMapOvr>
+    <a:masterClrMapping/>
+  </p:clrMapOvr>
+</p:sld>
+</file>
+
+<file path=ppt/slides/slide5.xml><?xml version="1.0" encoding="utf-8"?>
+<p:sld xmlns:a="http://schemas.openxmlformats.org/drawingml/2006/main" xmlns:p="http://schemas.openxmlformats.org/presentationml/2006/main" xmlns:r="http://schemas.openxmlformats.org/officeDocument/2006/relationships">
+  <p:cSld>
+    <p:spTree>
+      <p:nvGrpSpPr>
+        <p:cNvPr id="1" name=""/>
+        <p:cNvGrpSpPr/>
+        <p:nvPr/>
+      </p:nvGrpSpPr>
+      <p:grpSpPr/>
+      <p:sp>
+        <p:nvSpPr>
+          <p:cNvPr id="2" name="Title 1"/>
+          <p:cNvSpPr>
+            <a:spLocks noGrp="1"/>
+          </p:cNvSpPr>
+          <p:nvPr>
+            <p:ph type="title"/>
+          </p:nvPr>
+        </p:nvSpPr>
+        <p:spPr/>
+        <p:txBody>
+          <a:bodyPr/>
+          <a:lstStyle/>
+          <a:p>
+            <a:r>
+              <a:rPr sz="3200" b="1">
+                <a:solidFill>
+                  <a:srgbClr val="1A3C6C"/>
+                </a:solidFill>
+                <a:latin typeface="Calibri"/>
+              </a:rPr>
+              <a:t>The Three Ways (The Phoenix Project / DevOps Handbook)</a:t>
+            </a:r>
+          </a:p>
+        </p:txBody>
+      </p:sp>
+      <p:sp>
+        <p:nvSpPr>
+          <p:cNvPr id="3" name="Content Placeholder 2"/>
+          <p:cNvSpPr>
+            <a:spLocks noGrp="1"/>
+          </p:cNvSpPr>
+          <p:nvPr>
+            <p:ph idx="1"/>
+          </p:nvPr>
+        </p:nvSpPr>
+        <p:spPr/>
+        <p:txBody>
+          <a:bodyPr/>
+          <a:lstStyle/>
+          <a:p>
+            <a:pPr>
+              <a:defRPr sz="1900">
+                <a:solidFill>
+                  <a:srgbClr val="333333"/>
+                </a:solidFill>
+                <a:latin typeface="Calibri"/>
+              </a:defRPr>
+            </a:pPr>
+            <a:r>
+              <a:t>1. FLOW: optimise the whole left-to-right stream - small batches, limit WIP, remove handoffs.</a:t>
+            </a:r>
+          </a:p>
+          <a:p>
+            <a:pPr>
+              <a:defRPr sz="1900">
+                <a:solidFill>
+                  <a:srgbClr val="333333"/>
+                </a:solidFill>
+                <a:latin typeface="Calibri"/>
+              </a:defRPr>
+            </a:pPr>
+            <a:r>
+              <a:t>2. FEEDBACK: fast right-to-left signals - tests, monitoring, pager, customer telemetry.</a:t>
+            </a:r>
+          </a:p>
+          <a:p>
+            <a:pPr>
+              <a:defRPr sz="1900">
+                <a:solidFill>
+                  <a:srgbClr val="333333"/>
+                </a:solidFill>
+                <a:latin typeface="Calibri"/>
+              </a:defRPr>
+            </a:pPr>
+            <a:r>
+              <a:t>3. CONTINUAL LEARNING: experiment safely, practise failure, turn incidents into improvement.</a:t>
+            </a:r>
+          </a:p>
+          <a:p>
+            <a:pPr>
+              <a:defRPr sz="1900">
+                <a:solidFill>
+                  <a:srgbClr val="333333"/>
+                </a:solidFill>
+                <a:latin typeface="Calibri"/>
+              </a:defRPr>
+            </a:pPr>
+            <a:r>
+              <a:t>Every practice in this course implements one of the Three Ways.</a:t>
+            </a:r>
+          </a:p>
+        </p:txBody>
+      </p:sp>
+    </p:spTree>
+  </p:cSld>
+  <p:clrMapOvr>
+    <a:masterClrMapping/>
+  </p:clrMapOvr>
+</p:sld>
+</file>
+
+<file path=ppt/slides/slide6.xml><?xml version="1.0" encoding="utf-8"?>
+<p:sld xmlns:a="http://schemas.openxmlformats.org/drawingml/2006/main" xmlns:p="http://schemas.openxmlformats.org/presentationml/2006/main" xmlns:r="http://schemas.openxmlformats.org/officeDocument/2006/relationships">
+  <p:cSld>
+    <p:spTree>
+      <p:nvGrpSpPr>
+        <p:cNvPr id="1" name=""/>
+        <p:cNvGrpSpPr/>
+        <p:nvPr/>
+      </p:nvGrpSpPr>
+      <p:grpSpPr/>
+      <p:sp>
+        <p:nvSpPr>
+          <p:cNvPr id="2" name="Title 1"/>
+          <p:cNvSpPr>
+            <a:spLocks noGrp="1"/>
+          </p:cNvSpPr>
+          <p:nvPr>
+            <p:ph type="title"/>
+          </p:nvPr>
+        </p:nvSpPr>
+        <p:spPr/>
+        <p:txBody>
+          <a:bodyPr/>
+          <a:lstStyle/>
+          <a:p>
+            <a:r>
+              <a:rPr sz="3200" b="1">
+                <a:solidFill>
+                  <a:srgbClr val="1A3C6C"/>
+                </a:solidFill>
+                <a:latin typeface="Calibri"/>
+              </a:rPr>
+              <a:t>CALMS - the Five Dimensions of DevOps</a:t>
+            </a:r>
+          </a:p>
+        </p:txBody>
+      </p:sp>
+      <p:sp>
+        <p:nvSpPr>
+          <p:cNvPr id="3" name="Content Placeholder 2"/>
+          <p:cNvSpPr>
+            <a:spLocks noGrp="1"/>
+          </p:cNvSpPr>
+          <p:nvPr>
+            <p:ph idx="1"/>
+          </p:nvPr>
+        </p:nvSpPr>
+        <p:spPr/>
+        <p:txBody>
+          <a:bodyPr/>
+          <a:lstStyle/>
+          <a:p>
+            <a:pPr>
+              <a:defRPr sz="1900">
+                <a:solidFill>
+                  <a:srgbClr val="333333"/>
+                </a:solidFill>
+                <a:latin typeface="Calibri"/>
+              </a:defRPr>
+            </a:pPr>
+            <a:r>
+              <a:t>Culture - shared ownership, psychological safety, blameless learning (Module 2).</a:t>
+            </a:r>
+          </a:p>
+          <a:p>
+            <a:pPr>
+              <a:defRPr sz="1900">
+                <a:solidFill>
+                  <a:srgbClr val="333333"/>
+                </a:solidFill>
+                <a:latin typeface="Calibri"/>
+              </a:defRPr>
+            </a:pPr>
+            <a:r>
+              <a:t>Automation - pipelines, IaC, tests: make the machine do the repeatable work (Modules 4-5).</a:t>
+            </a:r>
+          </a:p>
+          <a:p>
+            <a:pPr>
+              <a:defRPr sz="1900">
+                <a:solidFill>
+                  <a:srgbClr val="333333"/>
+                </a:solidFill>
+                <a:latin typeface="Calibri"/>
+              </a:defRPr>
+            </a:pPr>
+            <a:r>
+              <a:t>Lean - small batches, limit WIP, eliminate waste (waiting is the biggest waste).</a:t>
+            </a:r>
+          </a:p>
+          <a:p>
+            <a:pPr>
+              <a:defRPr sz="1900">
+                <a:solidFill>
+                  <a:srgbClr val="333333"/>
+                </a:solidFill>
+                <a:latin typeface="Calibri"/>
+              </a:defRPr>
+            </a:pPr>
+            <a:r>
+              <a:t>Measurement - DORA metrics, SLOs: decide with data, not anecdotes (Modules 3, 8).</a:t>
+            </a:r>
+          </a:p>
+          <a:p>
+            <a:pPr>
+              <a:defRPr sz="1900">
+                <a:solidFill>
+                  <a:srgbClr val="333333"/>
+                </a:solidFill>
+                <a:latin typeface="Calibri"/>
+              </a:defRPr>
+            </a:pPr>
+            <a:r>
+              <a:t>Sharing - internal open source, documentation, demos, postmortems published widely.</a:t>
+            </a:r>
+          </a:p>
+        </p:txBody>
+      </p:sp>
+    </p:spTree>
+  </p:cSld>
+  <p:clrMapOvr>
+    <a:masterClrMapping/>
+  </p:clrMapOvr>
+</p:sld>
+</file>
+
+<file path=ppt/slides/slide7.xml><?xml version="1.0" encoding="utf-8"?>
+<p:sld xmlns:a="http://schemas.openxmlformats.org/drawingml/2006/main" xmlns:p="http://schemas.openxmlformats.org/presentationml/2006/main" xmlns:r="http://schemas.openxmlformats.org/officeDocument/2006/relationships">
+  <p:cSld>
+    <p:spTree>
+      <p:nvGrpSpPr>
+        <p:cNvPr id="1" name=""/>
+        <p:cNvGrpSpPr/>
+        <p:nvPr/>
+      </p:nvGrpSpPr>
+      <p:grpSpPr/>
+      <p:sp>
+        <p:nvSpPr>
+          <p:cNvPr id="2" name="Title 1"/>
+          <p:cNvSpPr>
+            <a:spLocks noGrp="1"/>
+          </p:cNvSpPr>
+          <p:nvPr>
+            <p:ph type="title"/>
+          </p:nvPr>
+        </p:nvSpPr>
+        <p:spPr/>
+        <p:txBody>
+          <a:bodyPr/>
+          <a:lstStyle/>
+          <a:p/>
+        </p:txBody>
+      </p:sp>
+      <p:sp>
+        <p:nvSpPr>
+          <p:cNvPr id="3" name="TextBox 2"/>
+          <p:cNvSpPr txBox="1"/>
+          <p:nvPr/>
+        </p:nvSpPr>
+        <p:spPr>
+          <a:xfrm>
+            <a:off x="457200" y="274320"/>
+            <a:ext cx="8229600" cy="731520"/>
+          </a:xfrm>
+          <a:prstGeom prst="rect">
+            <a:avLst/>
+          </a:prstGeom>
+          <a:noFill/>
+        </p:spPr>
+        <p:txBody>
+          <a:bodyPr wrap="none">
+            <a:spAutoFit/>
+          </a:bodyPr>
+          <a:lstStyle/>
+          <a:p>
+            <a:r>
+              <a:rPr sz="3000" b="1">
+                <a:solidFill>
+                  <a:srgbClr val="1A3C6C"/>
+                </a:solidFill>
+                <a:latin typeface="Calibri"/>
+              </a:rPr>
+              <a:t>The DevOps Infinity Loop</a:t>
+            </a:r>
+          </a:p>
+        </p:txBody>
+      </p:sp>
+      <p:pic>
+        <p:nvPicPr>
+          <p:cNvPr id="4" name="Picture 3" descr="01-devops-infinity-loop.png"/>
+          <p:cNvPicPr>
+            <a:picLocks noChangeAspect="1"/>
+          </p:cNvPicPr>
+          <p:nvPr/>
+        </p:nvPicPr>
+        <p:blipFill>
+          <a:blip r:embed="rId2"/>
+          <a:stretch>
+            <a:fillRect/>
+          </a:stretch>
+        </p:blipFill>
+        <p:spPr>
+          <a:xfrm>
+            <a:off x="914400" y="1097280"/>
+            <a:ext cx="7315200" cy="4141846"/>
+          </a:xfrm>
+          <a:prstGeom prst="rect">
+            <a:avLst/>
+          </a:prstGeom>
+        </p:spPr>
+      </p:pic>
+      <p:sp>
+        <p:nvSpPr>
+          <p:cNvPr id="5" name="TextBox 4"/>
+          <p:cNvSpPr txBox="1"/>
+          <p:nvPr/>
+        </p:nvSpPr>
+        <p:spPr>
+          <a:xfrm>
+            <a:off x="457200" y="5943600"/>
+            <a:ext cx="8229600" cy="731520"/>
+          </a:xfrm>
+          <a:prstGeom prst="rect">
+            <a:avLst/>
+          </a:prstGeom>
+          <a:noFill/>
+        </p:spPr>
+        <p:txBody>
+          <a:bodyPr wrap="none">
+            <a:spAutoFit/>
+          </a:bodyPr>
+          <a:lstStyle/>
+          <a:p>
+            <a:pPr algn="ctr"/>
+            <a:r>
+              <a:rPr sz="1600" b="0">
+                <a:solidFill>
+                  <a:srgbClr val="333333"/>
+                </a:solidFill>
+                <a:latin typeface="Calibri"/>
+              </a:rPr>
+              <a:t>Eight phases, one continuous flow - monitoring feeds the next plan.</a:t>
+            </a:r>
+          </a:p>
+        </p:txBody>
+      </p:sp>
+    </p:spTree>
+  </p:cSld>
+  <p:clrMapOvr>
+    <a:masterClrMapping/>
+  </p:clrMapOvr>
+</p:sld>
+</file>
+
+<file path=ppt/slides/slide8.xml><?xml version="1.0" encoding="utf-8"?>
+<p:sld xmlns:a="http://schemas.openxmlformats.org/drawingml/2006/main" xmlns:p="http://schemas.openxmlformats.org/presentationml/2006/main" xmlns:r="http://schemas.openxmlformats.org/officeDocument/2006/relationships">
+  <p:cSld>
+    <p:spTree>
+      <p:nvGrpSpPr>
+        <p:cNvPr id="1" name=""/>
+        <p:cNvGrpSpPr/>
+        <p:nvPr/>
+      </p:nvGrpSpPr>
+      <p:grpSpPr/>
+      <p:sp>
+        <p:nvSpPr>
+          <p:cNvPr id="2" name="Title 1"/>
+          <p:cNvSpPr>
+            <a:spLocks noGrp="1"/>
+          </p:cNvSpPr>
+          <p:nvPr>
+            <p:ph type="title"/>
+          </p:nvPr>
+        </p:nvSpPr>
+        <p:spPr/>
+        <p:txBody>
+          <a:bodyPr/>
+          <a:lstStyle/>
+          <a:p>
+            <a:r>
+              <a:rPr sz="3200" b="1">
+                <a:solidFill>
+                  <a:srgbClr val="1A3C6C"/>
+                </a:solidFill>
+                <a:latin typeface="Calibri"/>
+              </a:rPr>
+              <a:t>Why Platform Engineering Emerged</a:t>
+            </a:r>
+          </a:p>
+        </p:txBody>
+      </p:sp>
+      <p:sp>
+        <p:nvSpPr>
+          <p:cNvPr id="3" name="Content Placeholder 2"/>
+          <p:cNvSpPr>
+            <a:spLocks noGrp="1"/>
+          </p:cNvSpPr>
+          <p:nvPr>
+            <p:ph idx="1"/>
+          </p:nvPr>
+        </p:nvSpPr>
+        <p:spPr/>
+        <p:txBody>
+          <a:bodyPr/>
+          <a:lstStyle/>
+          <a:p>
+            <a:pPr>
+              <a:defRPr sz="1900">
+                <a:solidFill>
+                  <a:srgbClr val="333333"/>
+                </a:solidFill>
+                <a:latin typeface="Calibri"/>
+              </a:defRPr>
+            </a:pPr>
+            <a:r>
+              <a:t>'You build it, you run it' collided with the cloud-native explosion (CNCF landscape: 1000+ tools).</a:t>
+            </a:r>
+          </a:p>
+          <a:p>
+            <a:pPr>
+              <a:defRPr sz="1900">
+                <a:solidFill>
+                  <a:srgbClr val="333333"/>
+                </a:solidFill>
+                <a:latin typeface="Calibri"/>
+              </a:defRPr>
+            </a:pPr>
+            <a:r>
+              <a:t>Every product team needed Kubernetes + Terraform + pipelines + observability + security skills.</a:t>
+            </a:r>
+          </a:p>
+          <a:p>
+            <a:pPr>
+              <a:defRPr sz="1900">
+                <a:solidFill>
+                  <a:srgbClr val="333333"/>
+                </a:solidFill>
+                <a:latin typeface="Calibri"/>
+              </a:defRPr>
+            </a:pPr>
+            <a:r>
+              <a:t>COGNITIVE LOAD became the bottleneck: too much to know before shipping any value.</a:t>
+            </a:r>
+          </a:p>
+          <a:p>
+            <a:pPr>
+              <a:defRPr sz="1900">
+                <a:solidFill>
+                  <a:srgbClr val="333333"/>
+                </a:solidFill>
+                <a:latin typeface="Calibri"/>
+              </a:defRPr>
+            </a:pPr>
+            <a:r>
+              <a:t>Platform engineering: a dedicated team builds an Internal Developer Platform (IDP)</a:t>
+            </a:r>
+          </a:p>
+          <a:p>
+            <a:pPr>
+              <a:defRPr sz="1900">
+                <a:solidFill>
+                  <a:srgbClr val="333333"/>
+                </a:solidFill>
+                <a:latin typeface="Calibri"/>
+              </a:defRPr>
+            </a:pPr>
+            <a:r>
+              <a:t>  so product teams get golden paths instead of blank YAML files.</a:t>
+            </a:r>
+          </a:p>
+        </p:txBody>
+      </p:sp>
+    </p:spTree>
+  </p:cSld>
+  <p:clrMapOvr>
+    <a:masterClrMapping/>
+  </p:clrMapOvr>
+</p:sld>
+</file>
+
+<file path=ppt/slides/slide9.xml><?xml version="1.0" encoding="utf-8"?>
+<p:sld xmlns:a="http://schemas.openxmlformats.org/drawingml/2006/main" xmlns:p="http://schemas.openxmlformats.org/presentationml/2006/main" xmlns:r="http://schemas.openxmlformats.org/officeDocument/2006/relationships">
+  <p:cSld>
+    <p:spTree>
+      <p:nvGrpSpPr>
+        <p:cNvPr id="1" name=""/>
+        <p:cNvGrpSpPr/>
+        <p:nvPr/>
+      </p:nvGrpSpPr>
+      <p:grpSpPr/>
+      <p:sp>
+        <p:nvSpPr>
+          <p:cNvPr id="2" name="Title 1"/>
+          <p:cNvSpPr>
+            <a:spLocks noGrp="1"/>
+          </p:cNvSpPr>
+          <p:nvPr>
+            <p:ph type="title"/>
+          </p:nvPr>
+        </p:nvSpPr>
+        <p:spPr/>
+        <p:txBody>
+          <a:bodyPr/>
+          <a:lstStyle/>
+          <a:p/>
+        </p:txBody>
+      </p:sp>
+      <p:sp>
+        <p:nvSpPr>
+          <p:cNvPr id="3" name="TextBox 2"/>
+          <p:cNvSpPr txBox="1"/>
+          <p:nvPr/>
+        </p:nvSpPr>
+        <p:spPr>
+          <a:xfrm>
+            <a:off x="457200" y="274320"/>
+            <a:ext cx="8229600" cy="731520"/>
+          </a:xfrm>
+          <a:prstGeom prst="rect">
+            <a:avLst/>
+          </a:prstGeom>
+          <a:noFill/>
+        </p:spPr>
+        <p:txBody>
+          <a:bodyPr wrap="none">
+            <a:spAutoFit/>
+          </a:bodyPr>
+          <a:lstStyle/>
+          <a:p>
+            <a:r>
+              <a:rPr sz="3200" b="1">
+                <a:solidFill>
+                  <a:srgbClr val="1A3C6C"/>
+                </a:solidFill>
+                <a:latin typeface="Calibri"/>
+              </a:rPr>
+              <a:t>DevOps vs SRE vs Platform Engineering</a:t>
+            </a:r>
+          </a:p>
+        </p:txBody>
+      </p:sp>
+      <p:sp>
+        <p:nvSpPr>
+          <p:cNvPr id="4" name="TextBox 3"/>
+          <p:cNvSpPr txBox="1"/>
+          <p:nvPr/>
+        </p:nvSpPr>
+        <p:spPr>
+          <a:xfrm>
+            <a:off x="457200" y="1188720"/>
+            <a:ext cx="3931920" cy="5029200"/>
+          </a:xfrm>
+          <a:prstGeom prst="rect">
+            <a:avLst/>
+          </a:prstGeom>
+          <a:noFill/>
+        </p:spPr>
+        <p:txBody>
+          <a:bodyPr wrap="square">
+            <a:spAutoFit/>
+          </a:bodyPr>
+          <a:lstStyle/>
+          <a:p>
+            <a:pPr>
+              <a:defRPr sz="1700">
+                <a:solidFill>
+                  <a:srgbClr val="333333"/>
+                </a:solidFill>
+                <a:latin typeface="Calibri"/>
+              </a:defRPr>
+            </a:pPr>
+            <a:r>
+              <a:t>DEVOPS (a philosophy)</a:t>
+            </a:r>
+          </a:p>
+          <a:p>
+            <a:pPr>
+              <a:defRPr sz="1700">
+                <a:solidFill>
+                  <a:srgbClr val="333333"/>
+                </a:solidFill>
+                <a:latin typeface="Calibri"/>
+              </a:defRPr>
+            </a:pPr>
+            <a:r>
+              <a:t>Whose problem: the org's delivery flow.</a:t>
+            </a:r>
+          </a:p>
+          <a:p>
+            <a:pPr>
+              <a:defRPr sz="1700">
+                <a:solidFill>
+                  <a:srgbClr val="333333"/>
+                </a:solidFill>
+                <a:latin typeface="Calibri"/>
+              </a:defRPr>
+            </a:pPr>
+            <a:r>
+              <a:t>Core question: how do we ship faster AND safer together?</a:t>
+            </a:r>
+          </a:p>
+          <a:p>
+            <a:pPr>
+              <a:defRPr sz="1700">
+                <a:solidFill>
+                  <a:srgbClr val="333333"/>
+                </a:solidFill>
+                <a:latin typeface="Calibri"/>
+              </a:defRPr>
+            </a:pPr>
+            <a:r>
+              <a:t>Practices: CI/CD, IaC, shared ownership, blameless culture.</a:t>
+            </a:r>
+          </a:p>
+          <a:p>
+            <a:pPr>
+              <a:defRPr sz="1700">
+                <a:solidFill>
+                  <a:srgbClr val="333333"/>
+                </a:solidFill>
+                <a:latin typeface="Calibri"/>
+              </a:defRPr>
+            </a:pPr>
+          </a:p>
+          <a:p>
+            <a:pPr>
+              <a:defRPr sz="1700">
+                <a:solidFill>
+                  <a:srgbClr val="333333"/>
+                </a:solidFill>
+                <a:latin typeface="Calibri"/>
+              </a:defRPr>
+            </a:pPr>
+            <a:r>
+              <a:t>SRE (a role/discipline, Google 2003)</a:t>
+            </a:r>
+          </a:p>
+          <a:p>
+            <a:pPr>
+              <a:defRPr sz="1700">
+                <a:solidFill>
+                  <a:srgbClr val="333333"/>
+                </a:solidFill>
+                <a:latin typeface="Calibri"/>
+              </a:defRPr>
+            </a:pPr>
+            <a:r>
+              <a:t>Whose problem: reliability at scale.</a:t>
+            </a:r>
+          </a:p>
+          <a:p>
+            <a:pPr>
+              <a:defRPr sz="1700">
+                <a:solidFill>
+                  <a:srgbClr val="333333"/>
+                </a:solidFill>
+                <a:latin typeface="Calibri"/>
+              </a:defRPr>
+            </a:pPr>
+            <a:r>
+              <a:t>Core question: how reliable must this be, and what does that cost?</a:t>
+            </a:r>
+          </a:p>
+          <a:p>
+            <a:pPr>
+              <a:defRPr sz="1700">
+                <a:solidFill>
+                  <a:srgbClr val="333333"/>
+                </a:solidFill>
+                <a:latin typeface="Calibri"/>
+              </a:defRPr>
+            </a:pPr>
+            <a:r>
+              <a:t>Practices: SLOs, error budgets, toil elimination, incident response.</a:t>
+            </a:r>
+          </a:p>
+        </p:txBody>
+      </p:sp>
+      <p:sp>
+        <p:nvSpPr>
+          <p:cNvPr id="5" name="TextBox 4"/>
+          <p:cNvSpPr txBox="1"/>
+          <p:nvPr/>
+        </p:nvSpPr>
+        <p:spPr>
+          <a:xfrm>
+            <a:off x="4754880" y="1188720"/>
+            <a:ext cx="3931920" cy="5029200"/>
+          </a:xfrm>
+          <a:prstGeom prst="rect">
+            <a:avLst/>
+          </a:prstGeom>
+          <a:noFill/>
+        </p:spPr>
+        <p:txBody>
+          <a:bodyPr wrap="square">
+            <a:spAutoFit/>
+          </a:bodyPr>
+          <a:lstStyle/>
+          <a:p>
+            <a:pPr>
+              <a:defRPr sz="1700">
+                <a:solidFill>
+                  <a:srgbClr val="333333"/>
+                </a:solidFill>
+                <a:latin typeface="Calibri"/>
+              </a:defRPr>
+            </a:pPr>
+            <a:r>
+              <a:t>PLATFORM ENGINEERING (a team + product)</a:t>
+            </a:r>
+          </a:p>
+          <a:p>
+            <a:pPr>
+              <a:defRPr sz="1700">
+                <a:solidFill>
+                  <a:srgbClr val="333333"/>
+                </a:solidFill>
+                <a:latin typeface="Calibri"/>
+              </a:defRPr>
+            </a:pPr>
+            <a:r>
+              <a:t>Whose problem: developer cognitive load.</a:t>
+            </a:r>
+          </a:p>
+          <a:p>
+            <a:pPr>
+              <a:defRPr sz="1700">
+                <a:solidFill>
+                  <a:srgbClr val="333333"/>
+                </a:solidFill>
+                <a:latin typeface="Calibri"/>
+              </a:defRPr>
+            </a:pPr>
+            <a:r>
+              <a:t>Core question: what paved road lets teams self-serve safely?</a:t>
+            </a:r>
+          </a:p>
+          <a:p>
+            <a:pPr>
+              <a:defRPr sz="1700">
+                <a:solidFill>
+                  <a:srgbClr val="333333"/>
+                </a:solidFill>
+                <a:latin typeface="Calibri"/>
+              </a:defRPr>
+            </a:pPr>
+            <a:r>
+              <a:t>Practices: IDP, golden paths, templates, self-service APIs.</a:t>
+            </a:r>
+          </a:p>
+          <a:p>
+            <a:pPr>
+              <a:defRPr sz="1700">
+                <a:solidFill>
+                  <a:srgbClr val="333333"/>
+                </a:solidFill>
+                <a:latin typeface="Calibri"/>
+              </a:defRPr>
+            </a:pPr>
+          </a:p>
+          <a:p>
+            <a:pPr>
+              <a:defRPr sz="1700">
+                <a:solidFill>
+                  <a:srgbClr val="333333"/>
+                </a:solidFill>
+                <a:latin typeface="Calibri"/>
+              </a:defRPr>
+            </a:pPr>
+            <a:r>
+              <a:t>They compose, not compete:</a:t>
+            </a:r>
+          </a:p>
+          <a:p>
+            <a:pPr>
+              <a:defRPr sz="1700">
+                <a:solidFill>
+                  <a:srgbClr val="333333"/>
+                </a:solidFill>
+                <a:latin typeface="Calibri"/>
+              </a:defRPr>
+            </a:pPr>
+            <a:r>
+              <a:t>SRE defines what reliable means;</a:t>
+            </a:r>
+          </a:p>
+          <a:p>
+            <a:pPr>
+              <a:defRPr sz="1700">
+                <a:solidFill>
+                  <a:srgbClr val="333333"/>
+                </a:solidFill>
+                <a:latin typeface="Calibri"/>
+              </a:defRPr>
+            </a:pPr>
+            <a:r>
+              <a:t>the platform makes reliable the default;</a:t>
+            </a:r>
+          </a:p>
+          <a:p>
+            <a:pPr>
+              <a:defRPr sz="1700">
+                <a:solidFill>
+                  <a:srgbClr val="333333"/>
+                </a:solidFill>
+                <a:latin typeface="Calibri"/>
+              </a:defRPr>
+            </a:pPr>
+            <a:r>
+              <a:t>DevOps culture makes teams own the result.</a:t>
             </a:r>
           </a:p>
         </p:txBody>

--- a/slides/DevOps-PlatformEngineering-Day1.pptx
+++ b/slides/DevOps-PlatformEngineering-Day1.pptx
@@ -2585,7 +2585,7 @@
           <a:lstStyle/>
           <a:p>
             <a:r>
-              <a:t>Set up Workshop 1 (next block): participants build the test-build-scan pipeline for the order service and trigger it from a pull request - the left half of today's diagram, for real. Day 2 then containerises deeper (Module 6) and extends the pipeline's reach to Kubernetes.</a:t>
+              <a:t>Set up Workshop 1 (next block): participants build the test-build-scan pipeline for the order service and run it ON THEIR OWN VM with act - the left half of today's diagram, for real, with no GitHub account and a 30-second feedback loop. Pushing the same workflow to GitHub is an optional last part; the file is identical, only the runner changes. Day 2 then containerises deeper (Module 6) and extends the pipeline's reach to Kubernetes.</a:t>
             </a:r>
           </a:p>
         </p:txBody>
